--- a/output/wordlabs-stop-3day.pptx
+++ b/output/wordlabs-stop-3day.pptx
@@ -4240,7 +4240,7 @@
                 <a:ea typeface="Calibri" pitchFamily="34" charset="-122"/>
                 <a:cs typeface="Calibri" pitchFamily="34" charset="-120"/>
               </a:rPr>
-              <a:t>"cease, block, or halt"</a:t>
+              <a:t>"cease, halt, block movement"</a:t>
             </a:r>
             <a:endParaRPr lang="en-US" sz="2200" dirty="0"/>
           </a:p>
@@ -5288,7 +5288,7 @@
                 <a:ea typeface="Calibri" pitchFamily="34" charset="-122"/>
                 <a:cs typeface="Calibri" pitchFamily="34" charset="-120"/>
               </a:rPr>
-              <a:t>Word Labs  •  wordlabs.app  •  Root: 'stop' = cease, block, or halt</a:t>
+              <a:t>Word Labs  •  wordlabs.app  •  Root: 'stop' = cease, halt, block movement</a:t>
             </a:r>
             <a:endParaRPr lang="en-US" sz="800" dirty="0"/>
           </a:p>
@@ -5622,7 +5622,7 @@
                 <a:ea typeface="Trebuchet MS" pitchFamily="34" charset="-122"/>
                 <a:cs typeface="Trebuchet MS" pitchFamily="34" charset="-120"/>
               </a:rPr>
-              <a:t>0</a:t>
+              <a:t>1</a:t>
             </a:r>
             <a:pPr algn="ctr" indent="0" marL="0">
               <a:buNone/>
@@ -5928,7 +5928,7 @@
                 <a:ea typeface="Calibri" pitchFamily="34" charset="-122"/>
                 <a:cs typeface="Calibri" pitchFamily="34" charset="-120"/>
               </a:rPr>
-              <a:t>Word Labs  •  wordlabs.app  •  Root: 'stop' = cease, block, or halt</a:t>
+              <a:t>Word Labs  •  wordlabs.app  •  Root: 'stop' = cease, halt, block movement</a:t>
             </a:r>
             <a:endParaRPr lang="en-US" sz="800" dirty="0"/>
           </a:p>
@@ -6040,7 +6040,7 @@
                 <a:ea typeface="Calibri" pitchFamily="34" charset="-122"/>
                 <a:cs typeface="Calibri" pitchFamily="34" charset="-120"/>
               </a:rPr>
-              <a:t>The coach called for a </a:t>
+              <a:t>The referee called a </a:t>
             </a:r>
             <a:pPr algn="l" indent="0" marL="0">
               <a:buNone/>
@@ -6071,7 +6071,7 @@
                 <a:ea typeface="Calibri" pitchFamily="34" charset="-122"/>
                 <a:cs typeface="Calibri" pitchFamily="34" charset="-120"/>
               </a:rPr>
-              <a:t> so the </a:t>
+              <a:t>, but the </a:t>
             </a:r>
             <a:pPr algn="l" indent="0" marL="0">
               <a:buNone/>
@@ -6102,7 +6102,7 @@
                 <a:ea typeface="Calibri" pitchFamily="34" charset="-122"/>
                 <a:cs typeface="Calibri" pitchFamily="34" charset="-120"/>
               </a:rPr>
-              <a:t> forward could take a rest.</a:t>
+              <a:t> runner had already crossed the finish line.</a:t>
             </a:r>
             <a:endParaRPr lang="en-US" sz="1800" dirty="0"/>
           </a:p>
@@ -6716,7 +6716,7 @@
                 <a:ea typeface="Calibri" pitchFamily="34" charset="-122"/>
                 <a:cs typeface="Calibri" pitchFamily="34" charset="-120"/>
               </a:rPr>
-              <a:t>Word Labs  •  wordlabs.app  •  Root: 'stop' = cease, block, or halt</a:t>
+              <a:t>Word Labs  •  wordlabs.app  •  Root: 'stop' = cease, halt, block movement</a:t>
             </a:r>
             <a:endParaRPr lang="en-US" sz="800" dirty="0"/>
           </a:p>
@@ -7543,7 +7543,7 @@
                 <a:ea typeface="Calibri" pitchFamily="34" charset="-122"/>
                 <a:cs typeface="Calibri" pitchFamily="34" charset="-120"/>
               </a:rPr>
-              <a:t>Word Labs  •  wordlabs.app  •  Root: 'stop' = cease, block, or halt</a:t>
+              <a:t>Word Labs  •  wordlabs.app  •  Root: 'stop' = cease, halt, block movement</a:t>
             </a:r>
             <a:endParaRPr lang="en-US" sz="800" dirty="0"/>
           </a:p>
@@ -7972,7 +7972,7 @@
                 <a:ea typeface="Calibri" pitchFamily="34" charset="-122"/>
                 <a:cs typeface="Calibri" pitchFamily="34" charset="-120"/>
               </a:rPr>
-              <a:t>state or result of</a:t>
+              <a:t>result or state of</a:t>
             </a:r>
             <a:endParaRPr lang="en-US" sz="850" dirty="0"/>
           </a:p>
@@ -8528,7 +8528,7 @@
                 <a:ea typeface="Calibri" pitchFamily="34" charset="-122"/>
                 <a:cs typeface="Calibri" pitchFamily="34" charset="-120"/>
               </a:rPr>
-              <a:t>Word Labs  •  wordlabs.app  •  Root: 'stop' = cease, block, or halt</a:t>
+              <a:t>Word Labs  •  wordlabs.app  •  Root: 'stop' = cease, halt, block movement</a:t>
             </a:r>
             <a:endParaRPr lang="en-US" sz="800" dirty="0"/>
           </a:p>
@@ -8957,7 +8957,7 @@
                 <a:ea typeface="Calibri" pitchFamily="34" charset="-122"/>
                 <a:cs typeface="Calibri" pitchFamily="34" charset="-120"/>
               </a:rPr>
-              <a:t>state or result of</a:t>
+              <a:t>result or state of</a:t>
             </a:r>
             <a:endParaRPr lang="en-US" sz="850" dirty="0"/>
           </a:p>
@@ -9645,7 +9645,7 @@
                 <a:ea typeface="Calibri" pitchFamily="34" charset="-122"/>
                 <a:cs typeface="Calibri" pitchFamily="34" charset="-120"/>
               </a:rPr>
-              <a:t>Word Labs  •  wordlabs.app  •  Root: 'stop' = cease, block, or halt</a:t>
+              <a:t>Word Labs  •  wordlabs.app  •  Root: 'stop' = cease, halt, block movement</a:t>
             </a:r>
             <a:endParaRPr lang="en-US" sz="800" dirty="0"/>
           </a:p>
@@ -10074,7 +10074,7 @@
                 <a:ea typeface="Calibri" pitchFamily="34" charset="-122"/>
                 <a:cs typeface="Calibri" pitchFamily="34" charset="-120"/>
               </a:rPr>
-              <a:t>state or result of</a:t>
+              <a:t>result or state of</a:t>
             </a:r>
             <a:endParaRPr lang="en-US" sz="850" dirty="0"/>
           </a:p>
@@ -11158,7 +11158,7 @@
                 <a:ea typeface="Calibri" pitchFamily="34" charset="-122"/>
                 <a:cs typeface="Calibri" pitchFamily="34" charset="-120"/>
               </a:rPr>
-              <a:t>Word Labs  •  wordlabs.app  •  Root: 'stop' = cease, block, or halt</a:t>
+              <a:t>Word Labs  •  wordlabs.app  •  Root: 'stop' = cease, halt, block movement</a:t>
             </a:r>
             <a:endParaRPr lang="en-US" sz="800" dirty="0"/>
           </a:p>
@@ -11985,7 +11985,7 @@
                 <a:ea typeface="Calibri" pitchFamily="34" charset="-122"/>
                 <a:cs typeface="Calibri" pitchFamily="34" charset="-120"/>
               </a:rPr>
-              <a:t>Word Labs  •  wordlabs.app  •  Root: 'stop' = cease, block, or halt</a:t>
+              <a:t>Word Labs  •  wordlabs.app  •  Root: 'stop' = cease, halt, block movement</a:t>
             </a:r>
             <a:endParaRPr lang="en-US" sz="800" dirty="0"/>
           </a:p>
@@ -12526,7 +12526,7 @@
                 <a:ea typeface="Calibri" pitchFamily="34" charset="-122"/>
                 <a:cs typeface="Calibri" pitchFamily="34" charset="-120"/>
               </a:rPr>
-              <a:t>doubled consonant before suffix</a:t>
+              <a:t>doubled consonant</a:t>
             </a:r>
             <a:endParaRPr lang="en-US" sz="850" dirty="0"/>
           </a:p>
@@ -12565,7 +12565,7 @@
                 <a:ea typeface="Calibri" pitchFamily="34" charset="-122"/>
                 <a:cs typeface="Calibri" pitchFamily="34" charset="-120"/>
               </a:rPr>
-              <a:t>final consonant doubled before vowel suffix</a:t>
+              <a:t>p doubled before vowel suffix</a:t>
             </a:r>
             <a:endParaRPr lang="en-US" sz="700" dirty="0"/>
           </a:p>
@@ -12677,7 +12677,7 @@
                 <a:ea typeface="Calibri" pitchFamily="34" charset="-122"/>
                 <a:cs typeface="Calibri" pitchFamily="34" charset="-120"/>
               </a:rPr>
-              <a:t>capable of being</a:t>
+              <a:t>able to be</a:t>
             </a:r>
             <a:endParaRPr lang="en-US" sz="850" dirty="0"/>
           </a:p>
@@ -13233,7 +13233,7 @@
                 <a:ea typeface="Calibri" pitchFamily="34" charset="-122"/>
                 <a:cs typeface="Calibri" pitchFamily="34" charset="-120"/>
               </a:rPr>
-              <a:t>Word Labs  •  wordlabs.app  •  Root: 'stop' = cease, block, or halt</a:t>
+              <a:t>Word Labs  •  wordlabs.app  •  Root: 'stop' = cease, halt, block movement</a:t>
             </a:r>
             <a:endParaRPr lang="en-US" sz="800" dirty="0"/>
           </a:p>
@@ -13774,7 +13774,7 @@
                 <a:ea typeface="Calibri" pitchFamily="34" charset="-122"/>
                 <a:cs typeface="Calibri" pitchFamily="34" charset="-120"/>
               </a:rPr>
-              <a:t>doubled consonant before suffix</a:t>
+              <a:t>doubled consonant</a:t>
             </a:r>
             <a:endParaRPr lang="en-US" sz="850" dirty="0"/>
           </a:p>
@@ -13813,7 +13813,7 @@
                 <a:ea typeface="Calibri" pitchFamily="34" charset="-122"/>
                 <a:cs typeface="Calibri" pitchFamily="34" charset="-120"/>
               </a:rPr>
-              <a:t>final consonant doubled before vowel suffix</a:t>
+              <a:t>p doubled before vowel suffix</a:t>
             </a:r>
             <a:endParaRPr lang="en-US" sz="700" dirty="0"/>
           </a:p>
@@ -13925,7 +13925,7 @@
                 <a:ea typeface="Calibri" pitchFamily="34" charset="-122"/>
                 <a:cs typeface="Calibri" pitchFamily="34" charset="-120"/>
               </a:rPr>
-              <a:t>capable of being</a:t>
+              <a:t>able to be</a:t>
             </a:r>
             <a:endParaRPr lang="en-US" sz="850" dirty="0"/>
           </a:p>
@@ -14732,7 +14732,7 @@
                 <a:ea typeface="Calibri" pitchFamily="34" charset="-122"/>
                 <a:cs typeface="Calibri" pitchFamily="34" charset="-120"/>
               </a:rPr>
-              <a:t>Root 'stop' — cease, block, or halt</a:t>
+              <a:t>Root 'stop' — cease, halt, block movement</a:t>
             </a:r>
             <a:endParaRPr lang="en-US" sz="1600" dirty="0"/>
           </a:p>
@@ -15088,7 +15088,7 @@
                 <a:ea typeface="Calibri" pitchFamily="34" charset="-122"/>
                 <a:cs typeface="Calibri" pitchFamily="34" charset="-120"/>
               </a:rPr>
-              <a:t>Word Labs  •  wordlabs.app  •  Root: 'stop' = cease, block, or halt</a:t>
+              <a:t>Word Labs  •  wordlabs.app  •  Root: 'stop' = cease, halt, block movement</a:t>
             </a:r>
             <a:endParaRPr lang="en-US" sz="800" dirty="0"/>
           </a:p>
@@ -15629,7 +15629,7 @@
                 <a:ea typeface="Calibri" pitchFamily="34" charset="-122"/>
                 <a:cs typeface="Calibri" pitchFamily="34" charset="-120"/>
               </a:rPr>
-              <a:t>doubled consonant before suffix</a:t>
+              <a:t>doubled consonant</a:t>
             </a:r>
             <a:endParaRPr lang="en-US" sz="850" dirty="0"/>
           </a:p>
@@ -15668,7 +15668,7 @@
                 <a:ea typeface="Calibri" pitchFamily="34" charset="-122"/>
                 <a:cs typeface="Calibri" pitchFamily="34" charset="-120"/>
               </a:rPr>
-              <a:t>final consonant doubled before vowel suffix</a:t>
+              <a:t>p doubled before vowel suffix</a:t>
             </a:r>
             <a:endParaRPr lang="en-US" sz="700" dirty="0"/>
           </a:p>
@@ -15780,7 +15780,7 @@
                 <a:ea typeface="Calibri" pitchFamily="34" charset="-122"/>
                 <a:cs typeface="Calibri" pitchFamily="34" charset="-120"/>
               </a:rPr>
-              <a:t>capable of being</a:t>
+              <a:t>able to be</a:t>
             </a:r>
             <a:endParaRPr lang="en-US" sz="850" dirty="0"/>
           </a:p>
@@ -17515,7 +17515,7 @@
                 <a:ea typeface="Calibri" pitchFamily="34" charset="-122"/>
                 <a:cs typeface="Calibri" pitchFamily="34" charset="-120"/>
               </a:rPr>
-              <a:t>Word Labs  •  wordlabs.app  •  Root: 'stop' = cease, block, or halt</a:t>
+              <a:t>Word Labs  •  wordlabs.app  •  Root: 'stop' = cease, halt, block movement</a:t>
             </a:r>
             <a:endParaRPr lang="en-US" sz="800" dirty="0"/>
           </a:p>
@@ -17849,7 +17849,7 @@
                 <a:ea typeface="Trebuchet MS" pitchFamily="34" charset="-122"/>
                 <a:cs typeface="Trebuchet MS" pitchFamily="34" charset="-120"/>
               </a:rPr>
-              <a:t>1</a:t>
+              <a:t>2</a:t>
             </a:r>
             <a:pPr algn="ctr" indent="0" marL="0">
               <a:buNone/>
@@ -17863,7 +17863,7 @@
                 <a:ea typeface="Trebuchet MS" pitchFamily="34" charset="-122"/>
                 <a:cs typeface="Trebuchet MS" pitchFamily="34" charset="-120"/>
               </a:rPr>
-              <a:t>  punctuation mark</a:t>
+              <a:t>  punctuation marks</a:t>
             </a:r>
             <a:endParaRPr lang="en-US" sz="2800" dirty="0"/>
           </a:p>
@@ -18155,7 +18155,7 @@
                 <a:ea typeface="Calibri" pitchFamily="34" charset="-122"/>
                 <a:cs typeface="Calibri" pitchFamily="34" charset="-120"/>
               </a:rPr>
-              <a:t>Word Labs  •  wordlabs.app  •  Root: 'stop' = cease, block, or halt</a:t>
+              <a:t>Word Labs  •  wordlabs.app  •  Root: 'stop' = cease, halt, block movement</a:t>
             </a:r>
             <a:endParaRPr lang="en-US" sz="800" dirty="0"/>
           </a:p>
@@ -18267,7 +18267,7 @@
                 <a:ea typeface="Calibri" pitchFamily="34" charset="-122"/>
                 <a:cs typeface="Calibri" pitchFamily="34" charset="-120"/>
               </a:rPr>
-              <a:t>The </a:t>
+              <a:t>At the </a:t>
             </a:r>
             <a:pPr algn="l" indent="0" marL="0">
               <a:buNone/>
@@ -18284,7 +18284,7 @@
                 <a:ea typeface="Calibri" pitchFamily="34" charset="-122"/>
                 <a:cs typeface="Calibri" pitchFamily="34" charset="-120"/>
               </a:rPr>
-              <a:t>nonstop</a:t>
+              <a:t>pitstop</a:t>
             </a:r>
             <a:pPr algn="l" indent="0" marL="0">
               <a:buNone/>
@@ -18298,7 +18298,7 @@
                 <a:ea typeface="Calibri" pitchFamily="34" charset="-122"/>
                 <a:cs typeface="Calibri" pitchFamily="34" charset="-120"/>
               </a:rPr>
-              <a:t> rain caused a </a:t>
+              <a:t>, the crew worked </a:t>
             </a:r>
             <a:pPr algn="l" indent="0" marL="0">
               <a:buNone/>
@@ -18315,7 +18315,7 @@
                 <a:ea typeface="Calibri" pitchFamily="34" charset="-122"/>
                 <a:cs typeface="Calibri" pitchFamily="34" charset="-120"/>
               </a:rPr>
-              <a:t>stoppage</a:t>
+              <a:t>nonstop</a:t>
             </a:r>
             <a:pPr algn="l" indent="0" marL="0">
               <a:buNone/>
@@ -18329,7 +18329,7 @@
                 <a:ea typeface="Calibri" pitchFamily="34" charset="-122"/>
                 <a:cs typeface="Calibri" pitchFamily="34" charset="-120"/>
               </a:rPr>
-              <a:t> at the oval, but the </a:t>
+              <a:t>, and the driver watched the </a:t>
             </a:r>
             <a:pPr algn="l" indent="0" marL="0">
               <a:buNone/>
@@ -18346,7 +18346,7 @@
                 <a:ea typeface="Calibri" pitchFamily="34" charset="-122"/>
                 <a:cs typeface="Calibri" pitchFamily="34" charset="-120"/>
               </a:rPr>
-              <a:t>unstoppable</a:t>
+              <a:t>stoplight</a:t>
             </a:r>
             <a:pPr algn="l" indent="0" marL="0">
               <a:buNone/>
@@ -18360,7 +18360,7 @@
                 <a:ea typeface="Calibri" pitchFamily="34" charset="-122"/>
                 <a:cs typeface="Calibri" pitchFamily="34" charset="-120"/>
               </a:rPr>
-              <a:t> team still trained inside.</a:t>
+              <a:t> carefully before racing back onto the track.</a:t>
             </a:r>
             <a:endParaRPr lang="en-US" sz="1800" dirty="0"/>
           </a:p>
@@ -18515,7 +18515,7 @@
                 <a:ea typeface="Trebuchet MS" pitchFamily="34" charset="-122"/>
                 <a:cs typeface="Trebuchet MS" pitchFamily="34" charset="-120"/>
               </a:rPr>
-              <a:t>nonstop</a:t>
+              <a:t>pitstop</a:t>
             </a:r>
             <a:endParaRPr lang="en-US" sz="1400" dirty="0"/>
           </a:p>
@@ -18643,7 +18643,7 @@
                 <a:ea typeface="Trebuchet MS" pitchFamily="34" charset="-122"/>
                 <a:cs typeface="Trebuchet MS" pitchFamily="34" charset="-120"/>
               </a:rPr>
-              <a:t>stoppage</a:t>
+              <a:t>nonstop</a:t>
             </a:r>
             <a:endParaRPr lang="en-US" sz="1400" dirty="0"/>
           </a:p>
@@ -18771,7 +18771,7 @@
                 <a:ea typeface="Trebuchet MS" pitchFamily="34" charset="-122"/>
                 <a:cs typeface="Trebuchet MS" pitchFamily="34" charset="-120"/>
               </a:rPr>
-              <a:t>unstoppable</a:t>
+              <a:t>stoplight</a:t>
             </a:r>
             <a:endParaRPr lang="en-US" sz="1400" dirty="0"/>
           </a:p>
@@ -19102,7 +19102,7 @@
                 <a:ea typeface="Calibri" pitchFamily="34" charset="-122"/>
                 <a:cs typeface="Calibri" pitchFamily="34" charset="-120"/>
               </a:rPr>
-              <a:t>Word Labs  •  wordlabs.app  •  Root: 'stop' = cease, block, or halt</a:t>
+              <a:t>Word Labs  •  wordlabs.app  •  Root: 'stop' = cease, halt, block movement</a:t>
             </a:r>
             <a:endParaRPr lang="en-US" sz="800" dirty="0"/>
           </a:p>
@@ -19241,7 +19241,7 @@
                 <a:ea typeface="Trebuchet MS" pitchFamily="34" charset="-122"/>
                 <a:cs typeface="Trebuchet MS" pitchFamily="34" charset="-120"/>
               </a:rPr>
-              <a:t>nonstop</a:t>
+              <a:t>pitstop</a:t>
             </a:r>
             <a:endParaRPr lang="en-US" sz="2800" dirty="0"/>
           </a:p>
@@ -19929,7 +19929,7 @@
                 <a:ea typeface="Calibri" pitchFamily="34" charset="-122"/>
                 <a:cs typeface="Calibri" pitchFamily="34" charset="-120"/>
               </a:rPr>
-              <a:t>Word Labs  •  wordlabs.app  •  Root: 'stop' = cease, block, or halt</a:t>
+              <a:t>Word Labs  •  wordlabs.app  •  Root: 'stop' = cease, halt, block movement</a:t>
             </a:r>
             <a:endParaRPr lang="en-US" sz="800" dirty="0"/>
           </a:p>
@@ -20068,7 +20068,7 @@
                 <a:ea typeface="Trebuchet MS" pitchFamily="34" charset="-122"/>
                 <a:cs typeface="Trebuchet MS" pitchFamily="34" charset="-120"/>
               </a:rPr>
-              <a:t>nonstop</a:t>
+              <a:t>pitstop</a:t>
             </a:r>
             <a:endParaRPr lang="en-US" sz="2800" dirty="0"/>
           </a:p>
@@ -20207,7 +20207,7 @@
                 <a:ea typeface="Trebuchet MS" pitchFamily="34" charset="-122"/>
                 <a:cs typeface="Trebuchet MS" pitchFamily="34" charset="-120"/>
               </a:rPr>
-              <a:t>non</a:t>
+              <a:t>pit</a:t>
             </a:r>
             <a:endParaRPr lang="en-US" sz="1300" dirty="0"/>
           </a:p>
@@ -20246,7 +20246,7 @@
                 <a:ea typeface="Calibri" pitchFamily="34" charset="-122"/>
                 <a:cs typeface="Calibri" pitchFamily="34" charset="-120"/>
               </a:rPr>
-              <a:t>not or without</a:t>
+              <a:t>a sunken area or bay</a:t>
             </a:r>
             <a:endParaRPr lang="en-US" sz="850" dirty="0"/>
           </a:p>
@@ -20914,7 +20914,7 @@
                 <a:ea typeface="Calibri" pitchFamily="34" charset="-122"/>
                 <a:cs typeface="Calibri" pitchFamily="34" charset="-120"/>
               </a:rPr>
-              <a:t>Word Labs  •  wordlabs.app  •  Root: 'stop' = cease, block, or halt</a:t>
+              <a:t>Word Labs  •  wordlabs.app  •  Root: 'stop' = cease, halt, block movement</a:t>
             </a:r>
             <a:endParaRPr lang="en-US" sz="800" dirty="0"/>
           </a:p>
@@ -21053,7 +21053,7 @@
                 <a:ea typeface="Trebuchet MS" pitchFamily="34" charset="-122"/>
                 <a:cs typeface="Trebuchet MS" pitchFamily="34" charset="-120"/>
               </a:rPr>
-              <a:t>nonstop</a:t>
+              <a:t>pitstop</a:t>
             </a:r>
             <a:endParaRPr lang="en-US" sz="2800" dirty="0"/>
           </a:p>
@@ -21192,7 +21192,7 @@
                 <a:ea typeface="Trebuchet MS" pitchFamily="34" charset="-122"/>
                 <a:cs typeface="Trebuchet MS" pitchFamily="34" charset="-120"/>
               </a:rPr>
-              <a:t>non</a:t>
+              <a:t>pit</a:t>
             </a:r>
             <a:endParaRPr lang="en-US" sz="1300" dirty="0"/>
           </a:p>
@@ -21231,7 +21231,7 @@
                 <a:ea typeface="Calibri" pitchFamily="34" charset="-122"/>
                 <a:cs typeface="Calibri" pitchFamily="34" charset="-120"/>
               </a:rPr>
-              <a:t>not or without</a:t>
+              <a:t>a sunken area or bay</a:t>
             </a:r>
             <a:endParaRPr lang="en-US" sz="850" dirty="0"/>
           </a:p>
@@ -21502,7 +21502,7 @@
                 <a:ea typeface="Trebuchet MS" pitchFamily="34" charset="-122"/>
                 <a:cs typeface="Trebuchet MS" pitchFamily="34" charset="-120"/>
               </a:rPr>
-              <a:t>non</a:t>
+              <a:t>pit</a:t>
             </a:r>
             <a:endParaRPr lang="en-US" sz="1400" dirty="0"/>
           </a:p>
@@ -22031,7 +22031,7 @@
                 <a:ea typeface="Calibri" pitchFamily="34" charset="-122"/>
                 <a:cs typeface="Calibri" pitchFamily="34" charset="-120"/>
               </a:rPr>
-              <a:t>Word Labs  •  wordlabs.app  •  Root: 'stop' = cease, block, or halt</a:t>
+              <a:t>Word Labs  •  wordlabs.app  •  Root: 'stop' = cease, halt, block movement</a:t>
             </a:r>
             <a:endParaRPr lang="en-US" sz="800" dirty="0"/>
           </a:p>
@@ -22170,7 +22170,7 @@
                 <a:ea typeface="Trebuchet MS" pitchFamily="34" charset="-122"/>
                 <a:cs typeface="Trebuchet MS" pitchFamily="34" charset="-120"/>
               </a:rPr>
-              <a:t>nonstop</a:t>
+              <a:t>pitstop</a:t>
             </a:r>
             <a:endParaRPr lang="en-US" sz="2800" dirty="0"/>
           </a:p>
@@ -22309,7 +22309,7 @@
                 <a:ea typeface="Trebuchet MS" pitchFamily="34" charset="-122"/>
                 <a:cs typeface="Trebuchet MS" pitchFamily="34" charset="-120"/>
               </a:rPr>
-              <a:t>non</a:t>
+              <a:t>pit</a:t>
             </a:r>
             <a:endParaRPr lang="en-US" sz="1300" dirty="0"/>
           </a:p>
@@ -22348,7 +22348,7 @@
                 <a:ea typeface="Calibri" pitchFamily="34" charset="-122"/>
                 <a:cs typeface="Calibri" pitchFamily="34" charset="-120"/>
               </a:rPr>
-              <a:t>not or without</a:t>
+              <a:t>a sunken area or bay</a:t>
             </a:r>
             <a:endParaRPr lang="en-US" sz="850" dirty="0"/>
           </a:p>
@@ -22619,7 +22619,7 @@
                 <a:ea typeface="Trebuchet MS" pitchFamily="34" charset="-122"/>
                 <a:cs typeface="Trebuchet MS" pitchFamily="34" charset="-120"/>
               </a:rPr>
-              <a:t>non</a:t>
+              <a:t>pit</a:t>
             </a:r>
             <a:endParaRPr lang="en-US" sz="1400" dirty="0"/>
           </a:p>
@@ -22883,7 +22883,7 @@
                 <a:ea typeface="Trebuchet MS" pitchFamily="34" charset="-122"/>
                 <a:cs typeface="Trebuchet MS" pitchFamily="34" charset="-120"/>
               </a:rPr>
-              <a:t>n</a:t>
+              <a:t>p</a:t>
             </a:r>
             <a:endParaRPr lang="en-US" sz="900" dirty="0"/>
           </a:p>
@@ -22949,7 +22949,7 @@
                 <a:ea typeface="Trebuchet MS" pitchFamily="34" charset="-122"/>
                 <a:cs typeface="Trebuchet MS" pitchFamily="34" charset="-120"/>
               </a:rPr>
-              <a:t>o</a:t>
+              <a:t>i</a:t>
             </a:r>
             <a:endParaRPr lang="en-US" sz="900" dirty="0"/>
           </a:p>
@@ -23015,7 +23015,7 @@
                 <a:ea typeface="Trebuchet MS" pitchFamily="34" charset="-122"/>
                 <a:cs typeface="Trebuchet MS" pitchFamily="34" charset="-120"/>
               </a:rPr>
-              <a:t>n</a:t>
+              <a:t>t</a:t>
             </a:r>
             <a:endParaRPr lang="en-US" sz="900" dirty="0"/>
           </a:p>
@@ -23571,7 +23571,7 @@
                 <a:ea typeface="Calibri" pitchFamily="34" charset="-122"/>
                 <a:cs typeface="Calibri" pitchFamily="34" charset="-120"/>
               </a:rPr>
-              <a:t>Word Labs  •  wordlabs.app  •  Root: 'stop' = cease, block, or halt</a:t>
+              <a:t>Word Labs  •  wordlabs.app  •  Root: 'stop' = cease, halt, block movement</a:t>
             </a:r>
             <a:endParaRPr lang="en-US" sz="800" dirty="0"/>
           </a:p>
@@ -23710,7 +23710,7 @@
                 <a:ea typeface="Trebuchet MS" pitchFamily="34" charset="-122"/>
                 <a:cs typeface="Trebuchet MS" pitchFamily="34" charset="-120"/>
               </a:rPr>
-              <a:t>stoppage</a:t>
+              <a:t>nonstop</a:t>
             </a:r>
             <a:endParaRPr lang="en-US" sz="2800" dirty="0"/>
           </a:p>
@@ -24398,7 +24398,7 @@
                 <a:ea typeface="Calibri" pitchFamily="34" charset="-122"/>
                 <a:cs typeface="Calibri" pitchFamily="34" charset="-120"/>
               </a:rPr>
-              <a:t>Word Labs  •  wordlabs.app  •  Root: 'stop' = cease, block, or halt</a:t>
+              <a:t>Word Labs  •  wordlabs.app  •  Root: 'stop' = cease, halt, block movement</a:t>
             </a:r>
             <a:endParaRPr lang="en-US" sz="800" dirty="0"/>
           </a:p>
@@ -24537,7 +24537,7 @@
                 <a:ea typeface="Trebuchet MS" pitchFamily="34" charset="-122"/>
                 <a:cs typeface="Trebuchet MS" pitchFamily="34" charset="-120"/>
               </a:rPr>
-              <a:t>stoppage</a:t>
+              <a:t>nonstop</a:t>
             </a:r>
             <a:endParaRPr lang="en-US" sz="2800" dirty="0"/>
           </a:p>
@@ -24626,11 +24626,11 @@
             </a:avLst>
           </a:prstGeom>
           <a:solidFill>
-            <a:srgbClr val="CCFBF1"/>
+            <a:srgbClr val="DDD6FE"/>
           </a:solidFill>
           <a:ln w="19050">
             <a:solidFill>
-              <a:srgbClr val="0D9488"/>
+              <a:srgbClr val="7C3AED"/>
             </a:solidFill>
             <a:prstDash val="solid"/>
           </a:ln>
@@ -24670,13 +24670,13 @@
             <a:r>
               <a:rPr lang="en-US" sz="1300" b="1" dirty="0">
                 <a:solidFill>
-                  <a:srgbClr val="0F766E"/>
+                  <a:srgbClr val="4C1D95"/>
                 </a:solidFill>
                 <a:latin typeface="Trebuchet MS" pitchFamily="34" charset="0"/>
                 <a:ea typeface="Trebuchet MS" pitchFamily="34" charset="-122"/>
                 <a:cs typeface="Trebuchet MS" pitchFamily="34" charset="-120"/>
               </a:rPr>
-              <a:t>stop</a:t>
+              <a:t>non</a:t>
             </a:r>
             <a:endParaRPr lang="en-US" sz="1300" dirty="0"/>
           </a:p>
@@ -24715,7 +24715,7 @@
                 <a:ea typeface="Calibri" pitchFamily="34" charset="-122"/>
                 <a:cs typeface="Calibri" pitchFamily="34" charset="-120"/>
               </a:rPr>
-              <a:t>to halt or cease</a:t>
+              <a:t>not or without</a:t>
             </a:r>
             <a:endParaRPr lang="en-US" sz="850" dirty="0"/>
           </a:p>
@@ -24738,11 +24738,11 @@
             </a:avLst>
           </a:prstGeom>
           <a:solidFill>
-            <a:srgbClr val="FCE7F3"/>
+            <a:srgbClr val="CCFBF1"/>
           </a:solidFill>
           <a:ln w="19050">
             <a:solidFill>
-              <a:srgbClr val="DB2777"/>
+              <a:srgbClr val="0D9488"/>
             </a:solidFill>
             <a:prstDash val="solid"/>
           </a:ln>
@@ -24782,13 +24782,13 @@
             <a:r>
               <a:rPr lang="en-US" sz="1300" b="1" dirty="0">
                 <a:solidFill>
-                  <a:srgbClr val="9D174D"/>
+                  <a:srgbClr val="0F766E"/>
                 </a:solidFill>
                 <a:latin typeface="Trebuchet MS" pitchFamily="34" charset="0"/>
                 <a:ea typeface="Trebuchet MS" pitchFamily="34" charset="-122"/>
                 <a:cs typeface="Trebuchet MS" pitchFamily="34" charset="-120"/>
               </a:rPr>
-              <a:t>age</a:t>
+              <a:t>stop</a:t>
             </a:r>
             <a:endParaRPr lang="en-US" sz="1300" dirty="0"/>
           </a:p>
@@ -24827,7 +24827,7 @@
                 <a:ea typeface="Calibri" pitchFamily="34" charset="-122"/>
                 <a:cs typeface="Calibri" pitchFamily="34" charset="-120"/>
               </a:rPr>
-              <a:t>state or result of</a:t>
+              <a:t>to halt or cease</a:t>
             </a:r>
             <a:endParaRPr lang="en-US" sz="850" dirty="0"/>
           </a:p>
@@ -25383,7 +25383,7 @@
                 <a:ea typeface="Calibri" pitchFamily="34" charset="-122"/>
                 <a:cs typeface="Calibri" pitchFamily="34" charset="-120"/>
               </a:rPr>
-              <a:t>Word Labs  •  wordlabs.app  •  Root: 'stop' = cease, block, or halt</a:t>
+              <a:t>Word Labs  •  wordlabs.app  •  Root: 'stop' = cease, halt, block movement</a:t>
             </a:r>
             <a:endParaRPr lang="en-US" sz="800" dirty="0"/>
           </a:p>
@@ -25456,7 +25456,7 @@
                 <a:ea typeface="Trebuchet MS" pitchFamily="34" charset="-122"/>
                 <a:cs typeface="Trebuchet MS" pitchFamily="34" charset="-120"/>
               </a:rPr>
-              <a:t>We are learning that the root 'stop' means 'cease, block, or halt'.</a:t>
+              <a:t>We are learning that the root 'stop' means 'cease, halt, block movement'.</a:t>
             </a:r>
             <a:endParaRPr lang="en-US" sz="2000" dirty="0"/>
           </a:p>
@@ -26102,7 +26102,7 @@
                 <a:ea typeface="Calibri" pitchFamily="34" charset="-122"/>
                 <a:cs typeface="Calibri" pitchFamily="34" charset="-120"/>
               </a:rPr>
-              <a:t>Word Labs  •  wordlabs.app  •  Root: 'stop' = cease, block, or halt</a:t>
+              <a:t>Word Labs  •  wordlabs.app  •  Root: 'stop' = cease, halt, block movement</a:t>
             </a:r>
             <a:endParaRPr lang="en-US" sz="800" dirty="0"/>
           </a:p>
@@ -26241,7 +26241,7 @@
                 <a:ea typeface="Trebuchet MS" pitchFamily="34" charset="-122"/>
                 <a:cs typeface="Trebuchet MS" pitchFamily="34" charset="-120"/>
               </a:rPr>
-              <a:t>stoppage</a:t>
+              <a:t>nonstop</a:t>
             </a:r>
             <a:endParaRPr lang="en-US" sz="2800" dirty="0"/>
           </a:p>
@@ -26330,11 +26330,11 @@
             </a:avLst>
           </a:prstGeom>
           <a:solidFill>
-            <a:srgbClr val="CCFBF1"/>
+            <a:srgbClr val="DDD6FE"/>
           </a:solidFill>
           <a:ln w="19050">
             <a:solidFill>
-              <a:srgbClr val="0D9488"/>
+              <a:srgbClr val="7C3AED"/>
             </a:solidFill>
             <a:prstDash val="solid"/>
           </a:ln>
@@ -26374,13 +26374,13 @@
             <a:r>
               <a:rPr lang="en-US" sz="1300" b="1" dirty="0">
                 <a:solidFill>
-                  <a:srgbClr val="0F766E"/>
+                  <a:srgbClr val="4C1D95"/>
                 </a:solidFill>
                 <a:latin typeface="Trebuchet MS" pitchFamily="34" charset="0"/>
                 <a:ea typeface="Trebuchet MS" pitchFamily="34" charset="-122"/>
                 <a:cs typeface="Trebuchet MS" pitchFamily="34" charset="-120"/>
               </a:rPr>
-              <a:t>stop</a:t>
+              <a:t>non</a:t>
             </a:r>
             <a:endParaRPr lang="en-US" sz="1300" dirty="0"/>
           </a:p>
@@ -26419,7 +26419,7 @@
                 <a:ea typeface="Calibri" pitchFamily="34" charset="-122"/>
                 <a:cs typeface="Calibri" pitchFamily="34" charset="-120"/>
               </a:rPr>
-              <a:t>to halt or cease</a:t>
+              <a:t>not or without</a:t>
             </a:r>
             <a:endParaRPr lang="en-US" sz="850" dirty="0"/>
           </a:p>
@@ -26442,11 +26442,11 @@
             </a:avLst>
           </a:prstGeom>
           <a:solidFill>
-            <a:srgbClr val="FCE7F3"/>
+            <a:srgbClr val="CCFBF1"/>
           </a:solidFill>
           <a:ln w="19050">
             <a:solidFill>
-              <a:srgbClr val="DB2777"/>
+              <a:srgbClr val="0D9488"/>
             </a:solidFill>
             <a:prstDash val="solid"/>
           </a:ln>
@@ -26486,13 +26486,13 @@
             <a:r>
               <a:rPr lang="en-US" sz="1300" b="1" dirty="0">
                 <a:solidFill>
-                  <a:srgbClr val="9D174D"/>
+                  <a:srgbClr val="0F766E"/>
                 </a:solidFill>
                 <a:latin typeface="Trebuchet MS" pitchFamily="34" charset="0"/>
                 <a:ea typeface="Trebuchet MS" pitchFamily="34" charset="-122"/>
                 <a:cs typeface="Trebuchet MS" pitchFamily="34" charset="-120"/>
               </a:rPr>
-              <a:t>age</a:t>
+              <a:t>stop</a:t>
             </a:r>
             <a:endParaRPr lang="en-US" sz="1300" dirty="0"/>
           </a:p>
@@ -26531,7 +26531,7 @@
                 <a:ea typeface="Calibri" pitchFamily="34" charset="-122"/>
                 <a:cs typeface="Calibri" pitchFamily="34" charset="-120"/>
               </a:rPr>
-              <a:t>state or result of</a:t>
+              <a:t>to halt or cease</a:t>
             </a:r>
             <a:endParaRPr lang="en-US" sz="850" dirty="0"/>
           </a:p>
@@ -26690,7 +26690,7 @@
                 <a:ea typeface="Trebuchet MS" pitchFamily="34" charset="-122"/>
                 <a:cs typeface="Trebuchet MS" pitchFamily="34" charset="-120"/>
               </a:rPr>
-              <a:t>stop</a:t>
+              <a:t>non</a:t>
             </a:r>
             <a:endParaRPr lang="en-US" sz="1400" dirty="0"/>
           </a:p>
@@ -26795,7 +26795,7 @@
                 <a:ea typeface="Trebuchet MS" pitchFamily="34" charset="-122"/>
                 <a:cs typeface="Trebuchet MS" pitchFamily="34" charset="-120"/>
               </a:rPr>
-              <a:t>page</a:t>
+              <a:t>stop</a:t>
             </a:r>
             <a:endParaRPr lang="en-US" sz="1400" dirty="0"/>
           </a:p>
@@ -27219,7 +27219,7 @@
                 <a:ea typeface="Calibri" pitchFamily="34" charset="-122"/>
                 <a:cs typeface="Calibri" pitchFamily="34" charset="-120"/>
               </a:rPr>
-              <a:t>Word Labs  •  wordlabs.app  •  Root: 'stop' = cease, block, or halt</a:t>
+              <a:t>Word Labs  •  wordlabs.app  •  Root: 'stop' = cease, halt, block movement</a:t>
             </a:r>
             <a:endParaRPr lang="en-US" sz="800" dirty="0"/>
           </a:p>
@@ -27358,7 +27358,7 @@
                 <a:ea typeface="Trebuchet MS" pitchFamily="34" charset="-122"/>
                 <a:cs typeface="Trebuchet MS" pitchFamily="34" charset="-120"/>
               </a:rPr>
-              <a:t>stoppage</a:t>
+              <a:t>nonstop</a:t>
             </a:r>
             <a:endParaRPr lang="en-US" sz="2800" dirty="0"/>
           </a:p>
@@ -27447,11 +27447,11 @@
             </a:avLst>
           </a:prstGeom>
           <a:solidFill>
-            <a:srgbClr val="CCFBF1"/>
+            <a:srgbClr val="DDD6FE"/>
           </a:solidFill>
           <a:ln w="19050">
             <a:solidFill>
-              <a:srgbClr val="0D9488"/>
+              <a:srgbClr val="7C3AED"/>
             </a:solidFill>
             <a:prstDash val="solid"/>
           </a:ln>
@@ -27491,13 +27491,13 @@
             <a:r>
               <a:rPr lang="en-US" sz="1300" b="1" dirty="0">
                 <a:solidFill>
-                  <a:srgbClr val="0F766E"/>
+                  <a:srgbClr val="4C1D95"/>
                 </a:solidFill>
                 <a:latin typeface="Trebuchet MS" pitchFamily="34" charset="0"/>
                 <a:ea typeface="Trebuchet MS" pitchFamily="34" charset="-122"/>
                 <a:cs typeface="Trebuchet MS" pitchFamily="34" charset="-120"/>
               </a:rPr>
-              <a:t>stop</a:t>
+              <a:t>non</a:t>
             </a:r>
             <a:endParaRPr lang="en-US" sz="1300" dirty="0"/>
           </a:p>
@@ -27536,7 +27536,7 @@
                 <a:ea typeface="Calibri" pitchFamily="34" charset="-122"/>
                 <a:cs typeface="Calibri" pitchFamily="34" charset="-120"/>
               </a:rPr>
-              <a:t>to halt or cease</a:t>
+              <a:t>not or without</a:t>
             </a:r>
             <a:endParaRPr lang="en-US" sz="850" dirty="0"/>
           </a:p>
@@ -27559,11 +27559,11 @@
             </a:avLst>
           </a:prstGeom>
           <a:solidFill>
-            <a:srgbClr val="FCE7F3"/>
+            <a:srgbClr val="CCFBF1"/>
           </a:solidFill>
           <a:ln w="19050">
             <a:solidFill>
-              <a:srgbClr val="DB2777"/>
+              <a:srgbClr val="0D9488"/>
             </a:solidFill>
             <a:prstDash val="solid"/>
           </a:ln>
@@ -27603,13 +27603,13 @@
             <a:r>
               <a:rPr lang="en-US" sz="1300" b="1" dirty="0">
                 <a:solidFill>
-                  <a:srgbClr val="9D174D"/>
+                  <a:srgbClr val="0F766E"/>
                 </a:solidFill>
                 <a:latin typeface="Trebuchet MS" pitchFamily="34" charset="0"/>
                 <a:ea typeface="Trebuchet MS" pitchFamily="34" charset="-122"/>
                 <a:cs typeface="Trebuchet MS" pitchFamily="34" charset="-120"/>
               </a:rPr>
-              <a:t>age</a:t>
+              <a:t>stop</a:t>
             </a:r>
             <a:endParaRPr lang="en-US" sz="1300" dirty="0"/>
           </a:p>
@@ -27648,7 +27648,7 @@
                 <a:ea typeface="Calibri" pitchFamily="34" charset="-122"/>
                 <a:cs typeface="Calibri" pitchFamily="34" charset="-120"/>
               </a:rPr>
-              <a:t>state or result of</a:t>
+              <a:t>to halt or cease</a:t>
             </a:r>
             <a:endParaRPr lang="en-US" sz="850" dirty="0"/>
           </a:p>
@@ -27807,7 +27807,7 @@
                 <a:ea typeface="Trebuchet MS" pitchFamily="34" charset="-122"/>
                 <a:cs typeface="Trebuchet MS" pitchFamily="34" charset="-120"/>
               </a:rPr>
-              <a:t>stop</a:t>
+              <a:t>non</a:t>
             </a:r>
             <a:endParaRPr lang="en-US" sz="1400" dirty="0"/>
           </a:p>
@@ -27912,7 +27912,7 @@
                 <a:ea typeface="Trebuchet MS" pitchFamily="34" charset="-122"/>
                 <a:cs typeface="Trebuchet MS" pitchFamily="34" charset="-120"/>
               </a:rPr>
-              <a:t>page</a:t>
+              <a:t>stop</a:t>
             </a:r>
             <a:endParaRPr lang="en-US" sz="1400" dirty="0"/>
           </a:p>
@@ -27993,11 +27993,11 @@
         <p:spPr>
           <a:xfrm>
             <a:off x="1874520" y="4096512"/>
-            <a:ext cx="6903720" cy="804672"/>
+            <a:ext cx="6903720" cy="658368"/>
           </a:xfrm>
           <a:prstGeom prst="rect">
             <a:avLst>
-              <a:gd name="adj" fmla="val 6818"/>
+              <a:gd name="adj" fmla="val 8333"/>
             </a:avLst>
           </a:prstGeom>
           <a:solidFill>
@@ -28019,12 +28019,12 @@
         </p:nvSpPr>
         <p:spPr>
           <a:xfrm>
-            <a:off x="2254649" y="4169664"/>
-            <a:ext cx="685800" cy="384048"/>
+            <a:off x="2124837" y="4169664"/>
+            <a:ext cx="685800" cy="475488"/>
           </a:xfrm>
           <a:prstGeom prst="rect">
             <a:avLst>
-              <a:gd name="adj" fmla="val 9524"/>
+              <a:gd name="adj" fmla="val 7692"/>
             </a:avLst>
           </a:prstGeom>
           <a:solidFill>
@@ -28046,8 +28046,8 @@
         </p:nvSpPr>
         <p:spPr>
           <a:xfrm>
-            <a:off x="2254649" y="4169664"/>
-            <a:ext cx="685800" cy="384048"/>
+            <a:off x="2124837" y="4169664"/>
+            <a:ext cx="685800" cy="475488"/>
           </a:xfrm>
           <a:prstGeom prst="rect">
             <a:avLst/>
@@ -28071,7 +28071,7 @@
                 <a:ea typeface="Trebuchet MS" pitchFamily="34" charset="-122"/>
                 <a:cs typeface="Trebuchet MS" pitchFamily="34" charset="-120"/>
               </a:rPr>
-              <a:t>s</a:t>
+              <a:t>n</a:t>
             </a:r>
             <a:endParaRPr lang="en-US" sz="900" dirty="0"/>
           </a:p>
@@ -28085,12 +28085,12 @@
         </p:nvSpPr>
         <p:spPr>
           <a:xfrm>
-            <a:off x="3293146" y="4169664"/>
-            <a:ext cx="685800" cy="384048"/>
+            <a:off x="3033522" y="4169664"/>
+            <a:ext cx="685800" cy="475488"/>
           </a:xfrm>
           <a:prstGeom prst="rect">
             <a:avLst>
-              <a:gd name="adj" fmla="val 9524"/>
+              <a:gd name="adj" fmla="val 7692"/>
             </a:avLst>
           </a:prstGeom>
           <a:solidFill>
@@ -28112,8 +28112,8 @@
         </p:nvSpPr>
         <p:spPr>
           <a:xfrm>
-            <a:off x="3293146" y="4169664"/>
-            <a:ext cx="685800" cy="384048"/>
+            <a:off x="3033522" y="4169664"/>
+            <a:ext cx="685800" cy="475488"/>
           </a:xfrm>
           <a:prstGeom prst="rect">
             <a:avLst/>
@@ -28137,7 +28137,7 @@
                 <a:ea typeface="Trebuchet MS" pitchFamily="34" charset="-122"/>
                 <a:cs typeface="Trebuchet MS" pitchFamily="34" charset="-120"/>
               </a:rPr>
-              <a:t>t</a:t>
+              <a:t>o</a:t>
             </a:r>
             <a:endParaRPr lang="en-US" sz="900" dirty="0"/>
           </a:p>
@@ -28151,12 +28151,12 @@
         </p:nvSpPr>
         <p:spPr>
           <a:xfrm>
-            <a:off x="4331643" y="4169664"/>
-            <a:ext cx="685800" cy="384048"/>
+            <a:off x="3942207" y="4169664"/>
+            <a:ext cx="685800" cy="475488"/>
           </a:xfrm>
           <a:prstGeom prst="rect">
             <a:avLst>
-              <a:gd name="adj" fmla="val 9524"/>
+              <a:gd name="adj" fmla="val 7692"/>
             </a:avLst>
           </a:prstGeom>
           <a:solidFill>
@@ -28178,8 +28178,8 @@
         </p:nvSpPr>
         <p:spPr>
           <a:xfrm>
-            <a:off x="4331643" y="4169664"/>
-            <a:ext cx="685800" cy="384048"/>
+            <a:off x="3942207" y="4169664"/>
+            <a:ext cx="685800" cy="475488"/>
           </a:xfrm>
           <a:prstGeom prst="rect">
             <a:avLst/>
@@ -28203,7 +28203,7 @@
                 <a:ea typeface="Trebuchet MS" pitchFamily="34" charset="-122"/>
                 <a:cs typeface="Trebuchet MS" pitchFamily="34" charset="-120"/>
               </a:rPr>
-              <a:t>o</a:t>
+              <a:t>n</a:t>
             </a:r>
             <a:endParaRPr lang="en-US" sz="900" dirty="0"/>
           </a:p>
@@ -28217,12 +28217,12 @@
         </p:nvSpPr>
         <p:spPr>
           <a:xfrm>
-            <a:off x="5370141" y="4169664"/>
-            <a:ext cx="685800" cy="384048"/>
+            <a:off x="4850892" y="4169664"/>
+            <a:ext cx="685800" cy="475488"/>
           </a:xfrm>
           <a:prstGeom prst="rect">
             <a:avLst>
-              <a:gd name="adj" fmla="val 9524"/>
+              <a:gd name="adj" fmla="val 7692"/>
             </a:avLst>
           </a:prstGeom>
           <a:solidFill>
@@ -28244,8 +28244,8 @@
         </p:nvSpPr>
         <p:spPr>
           <a:xfrm>
-            <a:off x="5370141" y="4169664"/>
-            <a:ext cx="685800" cy="384048"/>
+            <a:off x="4850892" y="4169664"/>
+            <a:ext cx="685800" cy="475488"/>
           </a:xfrm>
           <a:prstGeom prst="rect">
             <a:avLst/>
@@ -28269,7 +28269,7 @@
                 <a:ea typeface="Trebuchet MS" pitchFamily="34" charset="-122"/>
                 <a:cs typeface="Trebuchet MS" pitchFamily="34" charset="-120"/>
               </a:rPr>
-              <a:t>pp</a:t>
+              <a:t>s</a:t>
             </a:r>
             <a:endParaRPr lang="en-US" sz="900" dirty="0"/>
           </a:p>
@@ -28283,12 +28283,12 @@
         </p:nvSpPr>
         <p:spPr>
           <a:xfrm>
-            <a:off x="6408638" y="4169664"/>
-            <a:ext cx="685800" cy="384048"/>
+            <a:off x="5759577" y="4169664"/>
+            <a:ext cx="685800" cy="475488"/>
           </a:xfrm>
           <a:prstGeom prst="rect">
             <a:avLst>
-              <a:gd name="adj" fmla="val 9524"/>
+              <a:gd name="adj" fmla="val 7692"/>
             </a:avLst>
           </a:prstGeom>
           <a:solidFill>
@@ -28310,8 +28310,8 @@
         </p:nvSpPr>
         <p:spPr>
           <a:xfrm>
-            <a:off x="6408638" y="4169664"/>
-            <a:ext cx="685800" cy="384048"/>
+            <a:off x="5759577" y="4169664"/>
+            <a:ext cx="685800" cy="475488"/>
           </a:xfrm>
           <a:prstGeom prst="rect">
             <a:avLst/>
@@ -28335,7 +28335,7 @@
                 <a:ea typeface="Trebuchet MS" pitchFamily="34" charset="-122"/>
                 <a:cs typeface="Trebuchet MS" pitchFamily="34" charset="-120"/>
               </a:rPr>
-              <a:t>a</a:t>
+              <a:t>t</a:t>
             </a:r>
             <a:endParaRPr lang="en-US" sz="900" dirty="0"/>
           </a:p>
@@ -28349,12 +28349,12 @@
         </p:nvSpPr>
         <p:spPr>
           <a:xfrm>
-            <a:off x="7447135" y="4169664"/>
-            <a:ext cx="685800" cy="384048"/>
+            <a:off x="6668262" y="4169664"/>
+            <a:ext cx="685800" cy="475488"/>
           </a:xfrm>
           <a:prstGeom prst="rect">
             <a:avLst>
-              <a:gd name="adj" fmla="val 9524"/>
+              <a:gd name="adj" fmla="val 7692"/>
             </a:avLst>
           </a:prstGeom>
           <a:solidFill>
@@ -28376,8 +28376,8 @@
         </p:nvSpPr>
         <p:spPr>
           <a:xfrm>
-            <a:off x="7447135" y="4169664"/>
-            <a:ext cx="685800" cy="384048"/>
+            <a:off x="6668262" y="4169664"/>
+            <a:ext cx="685800" cy="475488"/>
           </a:xfrm>
           <a:prstGeom prst="rect">
             <a:avLst/>
@@ -28401,7 +28401,7 @@
                 <a:ea typeface="Trebuchet MS" pitchFamily="34" charset="-122"/>
                 <a:cs typeface="Trebuchet MS" pitchFamily="34" charset="-120"/>
               </a:rPr>
-              <a:t>ge</a:t>
+              <a:t>o</a:t>
             </a:r>
             <a:endParaRPr lang="en-US" sz="900" dirty="0"/>
           </a:p>
@@ -28409,40 +28409,67 @@
       </p:sp>
       <p:sp>
         <p:nvSpPr>
-          <p:cNvPr id="45" name="Text 43"/>
-          <p:cNvSpPr/>
-          <p:nvPr/>
-        </p:nvSpPr>
-        <p:spPr>
-          <a:xfrm>
-            <a:off x="7447135" y="4572000"/>
-            <a:ext cx="685800" cy="219456"/>
-          </a:xfrm>
-          <a:prstGeom prst="rect">
-            <a:avLst/>
-          </a:prstGeom>
-          <a:noFill/>
-          <a:ln/>
-        </p:spPr>
-        <p:txBody>
-          <a:bodyPr wrap="square" lIns="0" tIns="0" rIns="0" bIns="0" rtlCol="0" anchor="t"/>
-          <a:lstStyle/>
-          <a:p>
-            <a:pPr algn="ctr" indent="0" marL="0">
-              <a:buNone/>
-            </a:pPr>
-            <a:r>
-              <a:rPr lang="en-US" sz="750" i="1" dirty="0">
-                <a:solidFill>
-                  <a:srgbClr val="94A3B8"/>
-                </a:solidFill>
-                <a:latin typeface="Calibri" pitchFamily="34" charset="0"/>
-                <a:ea typeface="Calibri" pitchFamily="34" charset="-122"/>
-                <a:cs typeface="Calibri" pitchFamily="34" charset="-120"/>
-              </a:rPr>
-              <a:t>/j/</a:t>
-            </a:r>
-            <a:endParaRPr lang="en-US" sz="750" dirty="0"/>
+          <p:cNvPr id="45" name="Shape 43"/>
+          <p:cNvSpPr/>
+          <p:nvPr/>
+        </p:nvSpPr>
+        <p:spPr>
+          <a:xfrm>
+            <a:off x="7576947" y="4169664"/>
+            <a:ext cx="685800" cy="475488"/>
+          </a:xfrm>
+          <a:prstGeom prst="rect">
+            <a:avLst>
+              <a:gd name="adj" fmla="val 7692"/>
+            </a:avLst>
+          </a:prstGeom>
+          <a:solidFill>
+            <a:srgbClr val="FFFFFF"/>
+          </a:solidFill>
+          <a:ln w="12700">
+            <a:solidFill>
+              <a:srgbClr val="DB2777"/>
+            </a:solidFill>
+            <a:prstDash val="solid"/>
+          </a:ln>
+        </p:spPr>
+      </p:sp>
+      <p:sp>
+        <p:nvSpPr>
+          <p:cNvPr id="46" name="Text 44"/>
+          <p:cNvSpPr/>
+          <p:nvPr/>
+        </p:nvSpPr>
+        <p:spPr>
+          <a:xfrm>
+            <a:off x="7576947" y="4169664"/>
+            <a:ext cx="685800" cy="475488"/>
+          </a:xfrm>
+          <a:prstGeom prst="rect">
+            <a:avLst/>
+          </a:prstGeom>
+          <a:noFill/>
+          <a:ln/>
+        </p:spPr>
+        <p:txBody>
+          <a:bodyPr wrap="square" lIns="0" tIns="0" rIns="0" bIns="0" rtlCol="0" anchor="ctr"/>
+          <a:lstStyle/>
+          <a:p>
+            <a:pPr algn="ctr" indent="0" marL="0">
+              <a:buNone/>
+            </a:pPr>
+            <a:r>
+              <a:rPr lang="en-US" sz="900" b="1" dirty="0">
+                <a:solidFill>
+                  <a:srgbClr val="9D174D"/>
+                </a:solidFill>
+                <a:latin typeface="Trebuchet MS" pitchFamily="34" charset="0"/>
+                <a:ea typeface="Trebuchet MS" pitchFamily="34" charset="-122"/>
+                <a:cs typeface="Trebuchet MS" pitchFamily="34" charset="-120"/>
+              </a:rPr>
+              <a:t>p</a:t>
+            </a:r>
+            <a:endParaRPr lang="en-US" sz="900" dirty="0"/>
           </a:p>
         </p:txBody>
       </p:sp>
@@ -28732,7 +28759,7 @@
                 <a:ea typeface="Calibri" pitchFamily="34" charset="-122"/>
                 <a:cs typeface="Calibri" pitchFamily="34" charset="-120"/>
               </a:rPr>
-              <a:t>Word Labs  •  wordlabs.app  •  Root: 'stop' = cease, block, or halt</a:t>
+              <a:t>Word Labs  •  wordlabs.app  •  Root: 'stop' = cease, halt, block movement</a:t>
             </a:r>
             <a:endParaRPr lang="en-US" sz="800" dirty="0"/>
           </a:p>
@@ -28871,7 +28898,7 @@
                 <a:ea typeface="Trebuchet MS" pitchFamily="34" charset="-122"/>
                 <a:cs typeface="Trebuchet MS" pitchFamily="34" charset="-120"/>
               </a:rPr>
-              <a:t>unstoppable</a:t>
+              <a:t>stoplight</a:t>
             </a:r>
             <a:endParaRPr lang="en-US" sz="2800" dirty="0"/>
           </a:p>
@@ -29559,7 +29586,7 @@
                 <a:ea typeface="Calibri" pitchFamily="34" charset="-122"/>
                 <a:cs typeface="Calibri" pitchFamily="34" charset="-120"/>
               </a:rPr>
-              <a:t>Word Labs  •  wordlabs.app  •  Root: 'stop' = cease, block, or halt</a:t>
+              <a:t>Word Labs  •  wordlabs.app  •  Root: 'stop' = cease, halt, block movement</a:t>
             </a:r>
             <a:endParaRPr lang="en-US" sz="800" dirty="0"/>
           </a:p>
@@ -29698,7 +29725,7 @@
                 <a:ea typeface="Trebuchet MS" pitchFamily="34" charset="-122"/>
                 <a:cs typeface="Trebuchet MS" pitchFamily="34" charset="-120"/>
               </a:rPr>
-              <a:t>unstoppable</a:t>
+              <a:t>stoplight</a:t>
             </a:r>
             <a:endParaRPr lang="en-US" sz="2800" dirty="0"/>
           </a:p>
@@ -29778,7 +29805,7 @@
         </p:nvSpPr>
         <p:spPr>
           <a:xfrm>
-            <a:off x="2221992" y="2258568"/>
+            <a:off x="2938272" y="2258568"/>
             <a:ext cx="1828800" cy="292608"/>
           </a:xfrm>
           <a:prstGeom prst="rect">
@@ -29787,11 +29814,11 @@
             </a:avLst>
           </a:prstGeom>
           <a:solidFill>
-            <a:srgbClr val="DDD6FE"/>
+            <a:srgbClr val="CCFBF1"/>
           </a:solidFill>
           <a:ln w="19050">
             <a:solidFill>
-              <a:srgbClr val="7C3AED"/>
+              <a:srgbClr val="0D9488"/>
             </a:solidFill>
             <a:prstDash val="solid"/>
           </a:ln>
@@ -29812,7 +29839,7 @@
         </p:nvSpPr>
         <p:spPr>
           <a:xfrm>
-            <a:off x="2221992" y="2258568"/>
+            <a:off x="2938272" y="2258568"/>
             <a:ext cx="1828800" cy="292608"/>
           </a:xfrm>
           <a:prstGeom prst="rect">
@@ -29831,13 +29858,13 @@
             <a:r>
               <a:rPr lang="en-US" sz="1300" b="1" dirty="0">
                 <a:solidFill>
-                  <a:srgbClr val="4C1D95"/>
+                  <a:srgbClr val="0F766E"/>
                 </a:solidFill>
                 <a:latin typeface="Trebuchet MS" pitchFamily="34" charset="0"/>
                 <a:ea typeface="Trebuchet MS" pitchFamily="34" charset="-122"/>
                 <a:cs typeface="Trebuchet MS" pitchFamily="34" charset="-120"/>
               </a:rPr>
-              <a:t>un</a:t>
+              <a:t>stop</a:t>
             </a:r>
             <a:endParaRPr lang="en-US" sz="1300" dirty="0"/>
           </a:p>
@@ -29851,7 +29878,7 @@
         </p:nvSpPr>
         <p:spPr>
           <a:xfrm>
-            <a:off x="2221992" y="2569464"/>
+            <a:off x="2938272" y="2569464"/>
             <a:ext cx="1828800" cy="201168"/>
           </a:xfrm>
           <a:prstGeom prst="rect">
@@ -29876,7 +29903,7 @@
                 <a:ea typeface="Calibri" pitchFamily="34" charset="-122"/>
                 <a:cs typeface="Calibri" pitchFamily="34" charset="-120"/>
               </a:rPr>
-              <a:t>not</a:t>
+              <a:t>to halt or cease</a:t>
             </a:r>
             <a:endParaRPr lang="en-US" sz="850" dirty="0"/>
           </a:p>
@@ -29890,7 +29917,7 @@
         </p:nvSpPr>
         <p:spPr>
           <a:xfrm>
-            <a:off x="4370832" y="2258568"/>
+            <a:off x="5803392" y="2258568"/>
             <a:ext cx="1828800" cy="292608"/>
           </a:xfrm>
           <a:prstGeom prst="rect">
@@ -29899,11 +29926,11 @@
             </a:avLst>
           </a:prstGeom>
           <a:solidFill>
-            <a:srgbClr val="CCFBF1"/>
+            <a:srgbClr val="FCE7F3"/>
           </a:solidFill>
           <a:ln w="19050">
             <a:solidFill>
-              <a:srgbClr val="0D9488"/>
+              <a:srgbClr val="DB2777"/>
             </a:solidFill>
             <a:prstDash val="solid"/>
           </a:ln>
@@ -29924,7 +29951,7 @@
         </p:nvSpPr>
         <p:spPr>
           <a:xfrm>
-            <a:off x="4370832" y="2258568"/>
+            <a:off x="5803392" y="2258568"/>
             <a:ext cx="1828800" cy="292608"/>
           </a:xfrm>
           <a:prstGeom prst="rect">
@@ -29943,13 +29970,13 @@
             <a:r>
               <a:rPr lang="en-US" sz="1300" b="1" dirty="0">
                 <a:solidFill>
-                  <a:srgbClr val="0F766E"/>
+                  <a:srgbClr val="9D174D"/>
                 </a:solidFill>
                 <a:latin typeface="Trebuchet MS" pitchFamily="34" charset="0"/>
                 <a:ea typeface="Trebuchet MS" pitchFamily="34" charset="-122"/>
                 <a:cs typeface="Trebuchet MS" pitchFamily="34" charset="-120"/>
               </a:rPr>
-              <a:t>stop</a:t>
+              <a:t>light</a:t>
             </a:r>
             <a:endParaRPr lang="en-US" sz="1300" dirty="0"/>
           </a:p>
@@ -29963,7 +29990,7 @@
         </p:nvSpPr>
         <p:spPr>
           <a:xfrm>
-            <a:off x="4370832" y="2569464"/>
+            <a:off x="5803392" y="2569464"/>
             <a:ext cx="1828800" cy="201168"/>
           </a:xfrm>
           <a:prstGeom prst="rect">
@@ -29988,7 +30015,7 @@
                 <a:ea typeface="Calibri" pitchFamily="34" charset="-122"/>
                 <a:cs typeface="Calibri" pitchFamily="34" charset="-120"/>
               </a:rPr>
-              <a:t>to halt or cease</a:t>
+              <a:t>a source of brightness or signal</a:t>
             </a:r>
             <a:endParaRPr lang="en-US" sz="850" dirty="0"/>
           </a:p>
@@ -30002,30 +30029,23 @@
         </p:nvSpPr>
         <p:spPr>
           <a:xfrm>
-            <a:off x="6519672" y="2258568"/>
-            <a:ext cx="1828800" cy="292608"/>
+            <a:off x="365760" y="3273552"/>
+            <a:ext cx="1371600" cy="658368"/>
           </a:xfrm>
           <a:prstGeom prst="rect">
             <a:avLst>
-              <a:gd name="adj" fmla="val 25000"/>
+              <a:gd name="adj" fmla="val 8333"/>
             </a:avLst>
           </a:prstGeom>
           <a:solidFill>
-            <a:srgbClr val="FCE7F3"/>
-          </a:solidFill>
-          <a:ln w="19050">
-            <a:solidFill>
-              <a:srgbClr val="DB2777"/>
-            </a:solidFill>
-            <a:prstDash val="solid"/>
-          </a:ln>
-          <a:effectLst>
-            <a:outerShdw sx="100000" sy="100000" kx="0" ky="0" algn="bl" rotWithShape="0" blurRad="101600" dist="38100" dir="8100000">
-              <a:srgbClr val="000000">
-                <a:alpha val="12000"/>
-              </a:srgbClr>
-            </a:outerShdw>
-          </a:effectLst>
+            <a:srgbClr val="E2E8F0"/>
+          </a:solidFill>
+          <a:ln w="12700">
+            <a:solidFill>
+              <a:srgbClr val="E2E8F0"/>
+            </a:solidFill>
+            <a:prstDash val="solid"/>
+          </a:ln>
         </p:spPr>
       </p:sp>
       <p:sp>
@@ -30036,8 +30056,8 @@
         </p:nvSpPr>
         <p:spPr>
           <a:xfrm>
-            <a:off x="6519672" y="2258568"/>
-            <a:ext cx="1828800" cy="292608"/>
+            <a:off x="365760" y="3273552"/>
+            <a:ext cx="1371600" cy="658368"/>
           </a:xfrm>
           <a:prstGeom prst="rect">
             <a:avLst/>
@@ -30053,95 +30073,83 @@
               <a:buNone/>
             </a:pPr>
             <a:r>
-              <a:rPr lang="en-US" sz="1300" b="1" dirty="0">
-                <a:solidFill>
-                  <a:srgbClr val="9D174D"/>
+              <a:rPr lang="en-US" sz="1100" b="1" dirty="0">
+                <a:solidFill>
+                  <a:srgbClr val="475569"/>
                 </a:solidFill>
                 <a:latin typeface="Trebuchet MS" pitchFamily="34" charset="0"/>
                 <a:ea typeface="Trebuchet MS" pitchFamily="34" charset="-122"/>
                 <a:cs typeface="Trebuchet MS" pitchFamily="34" charset="-120"/>
               </a:rPr>
-              <a:t>able</a:t>
-            </a:r>
-            <a:endParaRPr lang="en-US" sz="1300" dirty="0"/>
-          </a:p>
-        </p:txBody>
-      </p:sp>
-      <p:sp>
-        <p:nvSpPr>
-          <p:cNvPr id="24" name="Text 22"/>
-          <p:cNvSpPr/>
-          <p:nvPr/>
-        </p:nvSpPr>
-        <p:spPr>
-          <a:xfrm>
-            <a:off x="6519672" y="2569464"/>
-            <a:ext cx="1828800" cy="201168"/>
-          </a:xfrm>
-          <a:prstGeom prst="rect">
-            <a:avLst/>
-          </a:prstGeom>
-          <a:noFill/>
-          <a:ln/>
-        </p:spPr>
-        <p:txBody>
-          <a:bodyPr wrap="square" lIns="0" tIns="0" rIns="0" bIns="0" rtlCol="0" anchor="t"/>
-          <a:lstStyle/>
-          <a:p>
-            <a:pPr algn="ctr" indent="0" marL="0">
-              <a:buNone/>
-            </a:pPr>
-            <a:r>
-              <a:rPr lang="en-US" sz="850" dirty="0">
-                <a:solidFill>
-                  <a:srgbClr val="475569"/>
+              <a:t>Syllables</a:t>
+            </a:r>
+            <a:endParaRPr lang="en-US" sz="1100" dirty="0"/>
+          </a:p>
+        </p:txBody>
+      </p:sp>
+      <p:sp>
+        <p:nvSpPr>
+          <p:cNvPr id="24" name="Shape 22"/>
+          <p:cNvSpPr/>
+          <p:nvPr/>
+        </p:nvSpPr>
+        <p:spPr>
+          <a:xfrm>
+            <a:off x="1874520" y="3273552"/>
+            <a:ext cx="6903720" cy="658368"/>
+          </a:xfrm>
+          <a:prstGeom prst="rect">
+            <a:avLst>
+              <a:gd name="adj" fmla="val 8333"/>
+            </a:avLst>
+          </a:prstGeom>
+          <a:solidFill>
+            <a:srgbClr val="F8FAFC"/>
+          </a:solidFill>
+          <a:ln w="12700">
+            <a:solidFill>
+              <a:srgbClr val="E2E8F0"/>
+            </a:solidFill>
+            <a:prstDash val="dash"/>
+          </a:ln>
+        </p:spPr>
+      </p:sp>
+      <p:sp>
+        <p:nvSpPr>
+          <p:cNvPr id="25" name="Text 23"/>
+          <p:cNvSpPr/>
+          <p:nvPr/>
+        </p:nvSpPr>
+        <p:spPr>
+          <a:xfrm>
+            <a:off x="1874520" y="3273552"/>
+            <a:ext cx="6903720" cy="658368"/>
+          </a:xfrm>
+          <a:prstGeom prst="rect">
+            <a:avLst/>
+          </a:prstGeom>
+          <a:noFill/>
+          <a:ln/>
+        </p:spPr>
+        <p:txBody>
+          <a:bodyPr wrap="square" rtlCol="0" anchor="ctr"/>
+          <a:lstStyle/>
+          <a:p>
+            <a:pPr algn="ctr" indent="0" marL="0">
+              <a:buNone/>
+            </a:pPr>
+            <a:r>
+              <a:rPr lang="en-US" sz="1100" i="1" dirty="0">
+                <a:solidFill>
+                  <a:srgbClr val="CBD5E1"/>
                 </a:solidFill>
                 <a:latin typeface="Calibri" pitchFamily="34" charset="0"/>
                 <a:ea typeface="Calibri" pitchFamily="34" charset="-122"/>
                 <a:cs typeface="Calibri" pitchFamily="34" charset="-120"/>
               </a:rPr>
-              <a:t>capable of being</a:t>
-            </a:r>
-            <a:endParaRPr lang="en-US" sz="850" dirty="0"/>
-          </a:p>
-        </p:txBody>
-      </p:sp>
-      <p:sp>
-        <p:nvSpPr>
-          <p:cNvPr id="25" name="Text 23"/>
-          <p:cNvSpPr/>
-          <p:nvPr/>
-        </p:nvSpPr>
-        <p:spPr>
-          <a:xfrm>
-            <a:off x="6519672" y="2752344"/>
-            <a:ext cx="1828800" cy="182880"/>
-          </a:xfrm>
-          <a:prstGeom prst="rect">
-            <a:avLst/>
-          </a:prstGeom>
-          <a:noFill/>
-          <a:ln/>
-        </p:spPr>
-        <p:txBody>
-          <a:bodyPr wrap="square" lIns="0" tIns="0" rIns="0" bIns="0" rtlCol="0" anchor="t"/>
-          <a:lstStyle/>
-          <a:p>
-            <a:pPr algn="ctr" indent="0" marL="0">
-              <a:buNone/>
-            </a:pPr>
-            <a:r>
-              <a:rPr lang="en-US" sz="700" i="1" dirty="0">
-                <a:solidFill>
-                  <a:srgbClr val="94A3B8"/>
-                </a:solidFill>
-                <a:latin typeface="Calibri" pitchFamily="34" charset="0"/>
-                <a:ea typeface="Calibri" pitchFamily="34" charset="-122"/>
-                <a:cs typeface="Calibri" pitchFamily="34" charset="-120"/>
-              </a:rPr>
-              <a:t>final consonant doubled before vowel suffix</a:t>
-            </a:r>
-            <a:endParaRPr lang="en-US" sz="700" dirty="0"/>
+              <a:t>Write here...</a:t>
+            </a:r>
+            <a:endParaRPr lang="en-US" sz="1100" dirty="0"/>
           </a:p>
         </p:txBody>
       </p:sp>
@@ -30153,12 +30161,12 @@
         </p:nvSpPr>
         <p:spPr>
           <a:xfrm>
-            <a:off x="365760" y="3273552"/>
-            <a:ext cx="1371600" cy="658368"/>
+            <a:off x="365760" y="4096512"/>
+            <a:ext cx="1371600" cy="804672"/>
           </a:xfrm>
           <a:prstGeom prst="rect">
             <a:avLst>
-              <a:gd name="adj" fmla="val 8333"/>
+              <a:gd name="adj" fmla="val 6818"/>
             </a:avLst>
           </a:prstGeom>
           <a:solidFill>
@@ -30180,8 +30188,8 @@
         </p:nvSpPr>
         <p:spPr>
           <a:xfrm>
-            <a:off x="365760" y="3273552"/>
-            <a:ext cx="1371600" cy="658368"/>
+            <a:off x="365760" y="4096512"/>
+            <a:ext cx="1371600" cy="804672"/>
           </a:xfrm>
           <a:prstGeom prst="rect">
             <a:avLst/>
@@ -30205,7 +30213,7 @@
                 <a:ea typeface="Trebuchet MS" pitchFamily="34" charset="-122"/>
                 <a:cs typeface="Trebuchet MS" pitchFamily="34" charset="-120"/>
               </a:rPr>
-              <a:t>Syllables</a:t>
+              <a:t>Phonemes</a:t>
             </a:r>
             <a:endParaRPr lang="en-US" sz="1100" dirty="0"/>
           </a:p>
@@ -30219,74 +30227,8 @@
         </p:nvSpPr>
         <p:spPr>
           <a:xfrm>
-            <a:off x="1874520" y="3273552"/>
-            <a:ext cx="6903720" cy="658368"/>
-          </a:xfrm>
-          <a:prstGeom prst="rect">
-            <a:avLst>
-              <a:gd name="adj" fmla="val 8333"/>
-            </a:avLst>
-          </a:prstGeom>
-          <a:solidFill>
-            <a:srgbClr val="F8FAFC"/>
-          </a:solidFill>
-          <a:ln w="12700">
-            <a:solidFill>
-              <a:srgbClr val="E2E8F0"/>
-            </a:solidFill>
-            <a:prstDash val="dash"/>
-          </a:ln>
-        </p:spPr>
-      </p:sp>
-      <p:sp>
-        <p:nvSpPr>
-          <p:cNvPr id="29" name="Text 27"/>
-          <p:cNvSpPr/>
-          <p:nvPr/>
-        </p:nvSpPr>
-        <p:spPr>
-          <a:xfrm>
-            <a:off x="1874520" y="3273552"/>
-            <a:ext cx="6903720" cy="658368"/>
-          </a:xfrm>
-          <a:prstGeom prst="rect">
-            <a:avLst/>
-          </a:prstGeom>
-          <a:noFill/>
-          <a:ln/>
-        </p:spPr>
-        <p:txBody>
-          <a:bodyPr wrap="square" rtlCol="0" anchor="ctr"/>
-          <a:lstStyle/>
-          <a:p>
-            <a:pPr algn="ctr" indent="0" marL="0">
-              <a:buNone/>
-            </a:pPr>
-            <a:r>
-              <a:rPr lang="en-US" sz="1100" i="1" dirty="0">
-                <a:solidFill>
-                  <a:srgbClr val="CBD5E1"/>
-                </a:solidFill>
-                <a:latin typeface="Calibri" pitchFamily="34" charset="0"/>
-                <a:ea typeface="Calibri" pitchFamily="34" charset="-122"/>
-                <a:cs typeface="Calibri" pitchFamily="34" charset="-120"/>
-              </a:rPr>
-              <a:t>Write here...</a:t>
-            </a:r>
-            <a:endParaRPr lang="en-US" sz="1100" dirty="0"/>
-          </a:p>
-        </p:txBody>
-      </p:sp>
-      <p:sp>
-        <p:nvSpPr>
-          <p:cNvPr id="30" name="Shape 28"/>
-          <p:cNvSpPr/>
-          <p:nvPr/>
-        </p:nvSpPr>
-        <p:spPr>
-          <a:xfrm>
-            <a:off x="365760" y="4096512"/>
-            <a:ext cx="1371600" cy="804672"/>
+            <a:off x="1874520" y="4096512"/>
+            <a:ext cx="6903720" cy="804672"/>
           </a:xfrm>
           <a:prstGeom prst="rect">
             <a:avLst>
@@ -30294,85 +30236,19 @@
             </a:avLst>
           </a:prstGeom>
           <a:solidFill>
-            <a:srgbClr val="E2E8F0"/>
+            <a:srgbClr val="F8FAFC"/>
           </a:solidFill>
           <a:ln w="12700">
             <a:solidFill>
               <a:srgbClr val="E2E8F0"/>
             </a:solidFill>
-            <a:prstDash val="solid"/>
-          </a:ln>
-        </p:spPr>
-      </p:sp>
-      <p:sp>
-        <p:nvSpPr>
-          <p:cNvPr id="31" name="Text 29"/>
-          <p:cNvSpPr/>
-          <p:nvPr/>
-        </p:nvSpPr>
-        <p:spPr>
-          <a:xfrm>
-            <a:off x="365760" y="4096512"/>
-            <a:ext cx="1371600" cy="804672"/>
-          </a:xfrm>
-          <a:prstGeom prst="rect">
-            <a:avLst/>
-          </a:prstGeom>
-          <a:noFill/>
-          <a:ln/>
-        </p:spPr>
-        <p:txBody>
-          <a:bodyPr wrap="square" lIns="0" tIns="0" rIns="0" bIns="0" rtlCol="0" anchor="ctr"/>
-          <a:lstStyle/>
-          <a:p>
-            <a:pPr algn="ctr" indent="0" marL="0">
-              <a:buNone/>
-            </a:pPr>
-            <a:r>
-              <a:rPr lang="en-US" sz="1100" b="1" dirty="0">
-                <a:solidFill>
-                  <a:srgbClr val="475569"/>
-                </a:solidFill>
-                <a:latin typeface="Trebuchet MS" pitchFamily="34" charset="0"/>
-                <a:ea typeface="Trebuchet MS" pitchFamily="34" charset="-122"/>
-                <a:cs typeface="Trebuchet MS" pitchFamily="34" charset="-120"/>
-              </a:rPr>
-              <a:t>Phonemes</a:t>
-            </a:r>
-            <a:endParaRPr lang="en-US" sz="1100" dirty="0"/>
-          </a:p>
-        </p:txBody>
-      </p:sp>
-      <p:sp>
-        <p:nvSpPr>
-          <p:cNvPr id="32" name="Shape 30"/>
-          <p:cNvSpPr/>
-          <p:nvPr/>
-        </p:nvSpPr>
-        <p:spPr>
-          <a:xfrm>
-            <a:off x="1874520" y="4096512"/>
-            <a:ext cx="6903720" cy="804672"/>
-          </a:xfrm>
-          <a:prstGeom prst="rect">
-            <a:avLst>
-              <a:gd name="adj" fmla="val 6818"/>
-            </a:avLst>
-          </a:prstGeom>
-          <a:solidFill>
-            <a:srgbClr val="F8FAFC"/>
-          </a:solidFill>
-          <a:ln w="12700">
-            <a:solidFill>
-              <a:srgbClr val="E2E8F0"/>
-            </a:solidFill>
             <a:prstDash val="dash"/>
           </a:ln>
         </p:spPr>
       </p:sp>
       <p:sp>
         <p:nvSpPr>
-          <p:cNvPr id="33" name="Text 31"/>
+          <p:cNvPr id="29" name="Text 27"/>
           <p:cNvSpPr/>
           <p:nvPr/>
         </p:nvSpPr>
@@ -30695,7 +30571,7 @@
                 <a:ea typeface="Calibri" pitchFamily="34" charset="-122"/>
                 <a:cs typeface="Calibri" pitchFamily="34" charset="-120"/>
               </a:rPr>
-              <a:t>Word Labs  •  wordlabs.app  •  Root: 'stop' = cease, block, or halt</a:t>
+              <a:t>Word Labs  •  wordlabs.app  •  Root: 'stop' = cease, halt, block movement</a:t>
             </a:r>
             <a:endParaRPr lang="en-US" sz="800" dirty="0"/>
           </a:p>
@@ -30834,7 +30710,7 @@
                 <a:ea typeface="Trebuchet MS" pitchFamily="34" charset="-122"/>
                 <a:cs typeface="Trebuchet MS" pitchFamily="34" charset="-120"/>
               </a:rPr>
-              <a:t>unstoppable</a:t>
+              <a:t>stoplight</a:t>
             </a:r>
             <a:endParaRPr lang="en-US" sz="2800" dirty="0"/>
           </a:p>
@@ -30914,7 +30790,7 @@
         </p:nvSpPr>
         <p:spPr>
           <a:xfrm>
-            <a:off x="2221992" y="2258568"/>
+            <a:off x="2938272" y="2258568"/>
             <a:ext cx="1828800" cy="292608"/>
           </a:xfrm>
           <a:prstGeom prst="rect">
@@ -30923,11 +30799,11 @@
             </a:avLst>
           </a:prstGeom>
           <a:solidFill>
-            <a:srgbClr val="DDD6FE"/>
+            <a:srgbClr val="CCFBF1"/>
           </a:solidFill>
           <a:ln w="19050">
             <a:solidFill>
-              <a:srgbClr val="7C3AED"/>
+              <a:srgbClr val="0D9488"/>
             </a:solidFill>
             <a:prstDash val="solid"/>
           </a:ln>
@@ -30948,7 +30824,7 @@
         </p:nvSpPr>
         <p:spPr>
           <a:xfrm>
-            <a:off x="2221992" y="2258568"/>
+            <a:off x="2938272" y="2258568"/>
             <a:ext cx="1828800" cy="292608"/>
           </a:xfrm>
           <a:prstGeom prst="rect">
@@ -30967,13 +30843,13 @@
             <a:r>
               <a:rPr lang="en-US" sz="1300" b="1" dirty="0">
                 <a:solidFill>
-                  <a:srgbClr val="4C1D95"/>
+                  <a:srgbClr val="0F766E"/>
                 </a:solidFill>
                 <a:latin typeface="Trebuchet MS" pitchFamily="34" charset="0"/>
                 <a:ea typeface="Trebuchet MS" pitchFamily="34" charset="-122"/>
                 <a:cs typeface="Trebuchet MS" pitchFamily="34" charset="-120"/>
               </a:rPr>
-              <a:t>un</a:t>
+              <a:t>stop</a:t>
             </a:r>
             <a:endParaRPr lang="en-US" sz="1300" dirty="0"/>
           </a:p>
@@ -30987,7 +30863,7 @@
         </p:nvSpPr>
         <p:spPr>
           <a:xfrm>
-            <a:off x="2221992" y="2569464"/>
+            <a:off x="2938272" y="2569464"/>
             <a:ext cx="1828800" cy="201168"/>
           </a:xfrm>
           <a:prstGeom prst="rect">
@@ -31012,7 +30888,7 @@
                 <a:ea typeface="Calibri" pitchFamily="34" charset="-122"/>
                 <a:cs typeface="Calibri" pitchFamily="34" charset="-120"/>
               </a:rPr>
-              <a:t>not</a:t>
+              <a:t>to halt or cease</a:t>
             </a:r>
             <a:endParaRPr lang="en-US" sz="850" dirty="0"/>
           </a:p>
@@ -31026,7 +30902,7 @@
         </p:nvSpPr>
         <p:spPr>
           <a:xfrm>
-            <a:off x="4370832" y="2258568"/>
+            <a:off x="5803392" y="2258568"/>
             <a:ext cx="1828800" cy="292608"/>
           </a:xfrm>
           <a:prstGeom prst="rect">
@@ -31035,11 +30911,11 @@
             </a:avLst>
           </a:prstGeom>
           <a:solidFill>
-            <a:srgbClr val="CCFBF1"/>
+            <a:srgbClr val="FCE7F3"/>
           </a:solidFill>
           <a:ln w="19050">
             <a:solidFill>
-              <a:srgbClr val="0D9488"/>
+              <a:srgbClr val="DB2777"/>
             </a:solidFill>
             <a:prstDash val="solid"/>
           </a:ln>
@@ -31060,7 +30936,7 @@
         </p:nvSpPr>
         <p:spPr>
           <a:xfrm>
-            <a:off x="4370832" y="2258568"/>
+            <a:off x="5803392" y="2258568"/>
             <a:ext cx="1828800" cy="292608"/>
           </a:xfrm>
           <a:prstGeom prst="rect">
@@ -31079,13 +30955,13 @@
             <a:r>
               <a:rPr lang="en-US" sz="1300" b="1" dirty="0">
                 <a:solidFill>
-                  <a:srgbClr val="0F766E"/>
+                  <a:srgbClr val="9D174D"/>
                 </a:solidFill>
                 <a:latin typeface="Trebuchet MS" pitchFamily="34" charset="0"/>
                 <a:ea typeface="Trebuchet MS" pitchFamily="34" charset="-122"/>
                 <a:cs typeface="Trebuchet MS" pitchFamily="34" charset="-120"/>
               </a:rPr>
-              <a:t>stop</a:t>
+              <a:t>light</a:t>
             </a:r>
             <a:endParaRPr lang="en-US" sz="1300" dirty="0"/>
           </a:p>
@@ -31099,7 +30975,7 @@
         </p:nvSpPr>
         <p:spPr>
           <a:xfrm>
-            <a:off x="4370832" y="2569464"/>
+            <a:off x="5803392" y="2569464"/>
             <a:ext cx="1828800" cy="201168"/>
           </a:xfrm>
           <a:prstGeom prst="rect">
@@ -31124,7 +31000,7 @@
                 <a:ea typeface="Calibri" pitchFamily="34" charset="-122"/>
                 <a:cs typeface="Calibri" pitchFamily="34" charset="-120"/>
               </a:rPr>
-              <a:t>to halt or cease</a:t>
+              <a:t>a source of brightness or signal</a:t>
             </a:r>
             <a:endParaRPr lang="en-US" sz="850" dirty="0"/>
           </a:p>
@@ -31138,30 +31014,23 @@
         </p:nvSpPr>
         <p:spPr>
           <a:xfrm>
-            <a:off x="6519672" y="2258568"/>
-            <a:ext cx="1828800" cy="292608"/>
+            <a:off x="365760" y="3273552"/>
+            <a:ext cx="1371600" cy="658368"/>
           </a:xfrm>
           <a:prstGeom prst="rect">
             <a:avLst>
-              <a:gd name="adj" fmla="val 25000"/>
+              <a:gd name="adj" fmla="val 8333"/>
             </a:avLst>
           </a:prstGeom>
           <a:solidFill>
-            <a:srgbClr val="FCE7F3"/>
-          </a:solidFill>
-          <a:ln w="19050">
-            <a:solidFill>
-              <a:srgbClr val="DB2777"/>
-            </a:solidFill>
-            <a:prstDash val="solid"/>
-          </a:ln>
-          <a:effectLst>
-            <a:outerShdw sx="100000" sy="100000" kx="0" ky="0" algn="bl" rotWithShape="0" blurRad="101600" dist="38100" dir="8100000">
-              <a:srgbClr val="000000">
-                <a:alpha val="12000"/>
-              </a:srgbClr>
-            </a:outerShdw>
-          </a:effectLst>
+            <a:srgbClr val="E2E8F0"/>
+          </a:solidFill>
+          <a:ln w="12700">
+            <a:solidFill>
+              <a:srgbClr val="E2E8F0"/>
+            </a:solidFill>
+            <a:prstDash val="solid"/>
+          </a:ln>
         </p:spPr>
       </p:sp>
       <p:sp>
@@ -31172,8 +31041,8 @@
         </p:nvSpPr>
         <p:spPr>
           <a:xfrm>
-            <a:off x="6519672" y="2258568"/>
-            <a:ext cx="1828800" cy="292608"/>
+            <a:off x="365760" y="3273552"/>
+            <a:ext cx="1371600" cy="658368"/>
           </a:xfrm>
           <a:prstGeom prst="rect">
             <a:avLst/>
@@ -31189,108 +31058,30 @@
               <a:buNone/>
             </a:pPr>
             <a:r>
-              <a:rPr lang="en-US" sz="1300" b="1" dirty="0">
-                <a:solidFill>
-                  <a:srgbClr val="9D174D"/>
+              <a:rPr lang="en-US" sz="1100" b="1" dirty="0">
+                <a:solidFill>
+                  <a:srgbClr val="475569"/>
                 </a:solidFill>
                 <a:latin typeface="Trebuchet MS" pitchFamily="34" charset="0"/>
                 <a:ea typeface="Trebuchet MS" pitchFamily="34" charset="-122"/>
                 <a:cs typeface="Trebuchet MS" pitchFamily="34" charset="-120"/>
               </a:rPr>
-              <a:t>able</a:t>
-            </a:r>
-            <a:endParaRPr lang="en-US" sz="1300" dirty="0"/>
-          </a:p>
-        </p:txBody>
-      </p:sp>
-      <p:sp>
-        <p:nvSpPr>
-          <p:cNvPr id="24" name="Text 22"/>
-          <p:cNvSpPr/>
-          <p:nvPr/>
-        </p:nvSpPr>
-        <p:spPr>
-          <a:xfrm>
-            <a:off x="6519672" y="2569464"/>
-            <a:ext cx="1828800" cy="201168"/>
-          </a:xfrm>
-          <a:prstGeom prst="rect">
-            <a:avLst/>
-          </a:prstGeom>
-          <a:noFill/>
-          <a:ln/>
-        </p:spPr>
-        <p:txBody>
-          <a:bodyPr wrap="square" lIns="0" tIns="0" rIns="0" bIns="0" rtlCol="0" anchor="t"/>
-          <a:lstStyle/>
-          <a:p>
-            <a:pPr algn="ctr" indent="0" marL="0">
-              <a:buNone/>
-            </a:pPr>
-            <a:r>
-              <a:rPr lang="en-US" sz="850" dirty="0">
-                <a:solidFill>
-                  <a:srgbClr val="475569"/>
-                </a:solidFill>
-                <a:latin typeface="Calibri" pitchFamily="34" charset="0"/>
-                <a:ea typeface="Calibri" pitchFamily="34" charset="-122"/>
-                <a:cs typeface="Calibri" pitchFamily="34" charset="-120"/>
-              </a:rPr>
-              <a:t>capable of being</a:t>
-            </a:r>
-            <a:endParaRPr lang="en-US" sz="850" dirty="0"/>
-          </a:p>
-        </p:txBody>
-      </p:sp>
-      <p:sp>
-        <p:nvSpPr>
-          <p:cNvPr id="25" name="Text 23"/>
-          <p:cNvSpPr/>
-          <p:nvPr/>
-        </p:nvSpPr>
-        <p:spPr>
-          <a:xfrm>
-            <a:off x="6519672" y="2752344"/>
-            <a:ext cx="1828800" cy="182880"/>
-          </a:xfrm>
-          <a:prstGeom prst="rect">
-            <a:avLst/>
-          </a:prstGeom>
-          <a:noFill/>
-          <a:ln/>
-        </p:spPr>
-        <p:txBody>
-          <a:bodyPr wrap="square" lIns="0" tIns="0" rIns="0" bIns="0" rtlCol="0" anchor="t"/>
-          <a:lstStyle/>
-          <a:p>
-            <a:pPr algn="ctr" indent="0" marL="0">
-              <a:buNone/>
-            </a:pPr>
-            <a:r>
-              <a:rPr lang="en-US" sz="700" i="1" dirty="0">
-                <a:solidFill>
-                  <a:srgbClr val="94A3B8"/>
-                </a:solidFill>
-                <a:latin typeface="Calibri" pitchFamily="34" charset="0"/>
-                <a:ea typeface="Calibri" pitchFamily="34" charset="-122"/>
-                <a:cs typeface="Calibri" pitchFamily="34" charset="-120"/>
-              </a:rPr>
-              <a:t>final consonant doubled before vowel suffix</a:t>
-            </a:r>
-            <a:endParaRPr lang="en-US" sz="700" dirty="0"/>
-          </a:p>
-        </p:txBody>
-      </p:sp>
-      <p:sp>
-        <p:nvSpPr>
-          <p:cNvPr id="26" name="Shape 24"/>
-          <p:cNvSpPr/>
-          <p:nvPr/>
-        </p:nvSpPr>
-        <p:spPr>
-          <a:xfrm>
-            <a:off x="365760" y="3273552"/>
-            <a:ext cx="1371600" cy="658368"/>
+              <a:t>Syllables</a:t>
+            </a:r>
+            <a:endParaRPr lang="en-US" sz="1100" dirty="0"/>
+          </a:p>
+        </p:txBody>
+      </p:sp>
+      <p:sp>
+        <p:nvSpPr>
+          <p:cNvPr id="24" name="Shape 22"/>
+          <p:cNvSpPr/>
+          <p:nvPr/>
+        </p:nvSpPr>
+        <p:spPr>
+          <a:xfrm>
+            <a:off x="1874520" y="3273552"/>
+            <a:ext cx="6903720" cy="658368"/>
           </a:xfrm>
           <a:prstGeom prst="rect">
             <a:avLst>
@@ -31298,26 +31089,53 @@
             </a:avLst>
           </a:prstGeom>
           <a:solidFill>
-            <a:srgbClr val="E2E8F0"/>
-          </a:solidFill>
-          <a:ln w="12700">
-            <a:solidFill>
-              <a:srgbClr val="E2E8F0"/>
-            </a:solidFill>
-            <a:prstDash val="solid"/>
-          </a:ln>
-        </p:spPr>
-      </p:sp>
-      <p:sp>
-        <p:nvSpPr>
-          <p:cNvPr id="27" name="Text 25"/>
-          <p:cNvSpPr/>
-          <p:nvPr/>
-        </p:nvSpPr>
-        <p:spPr>
-          <a:xfrm>
-            <a:off x="365760" y="3273552"/>
-            <a:ext cx="1371600" cy="658368"/>
+            <a:srgbClr val="CCFBF1"/>
+          </a:solidFill>
+          <a:ln w="12700">
+            <a:solidFill>
+              <a:srgbClr val="0D9488"/>
+            </a:solidFill>
+            <a:prstDash val="solid"/>
+          </a:ln>
+        </p:spPr>
+      </p:sp>
+      <p:sp>
+        <p:nvSpPr>
+          <p:cNvPr id="25" name="Shape 23"/>
+          <p:cNvSpPr/>
+          <p:nvPr/>
+        </p:nvSpPr>
+        <p:spPr>
+          <a:xfrm>
+            <a:off x="2999232" y="3364992"/>
+            <a:ext cx="1645920" cy="475488"/>
+          </a:xfrm>
+          <a:prstGeom prst="rect">
+            <a:avLst>
+              <a:gd name="adj" fmla="val 9615"/>
+            </a:avLst>
+          </a:prstGeom>
+          <a:solidFill>
+            <a:srgbClr val="FFFFFF"/>
+          </a:solidFill>
+          <a:ln w="12700">
+            <a:solidFill>
+              <a:srgbClr val="0D9488"/>
+            </a:solidFill>
+            <a:prstDash val="solid"/>
+          </a:ln>
+        </p:spPr>
+      </p:sp>
+      <p:sp>
+        <p:nvSpPr>
+          <p:cNvPr id="26" name="Text 24"/>
+          <p:cNvSpPr/>
+          <p:nvPr/>
+        </p:nvSpPr>
+        <p:spPr>
+          <a:xfrm>
+            <a:off x="2999232" y="3364992"/>
+            <a:ext cx="1645920" cy="475488"/>
           </a:xfrm>
           <a:prstGeom prst="rect">
             <a:avLst/>
@@ -31333,17 +31151,56 @@
               <a:buNone/>
             </a:pPr>
             <a:r>
-              <a:rPr lang="en-US" sz="1100" b="1" dirty="0">
-                <a:solidFill>
-                  <a:srgbClr val="475569"/>
+              <a:rPr lang="en-US" sz="1400" b="1" dirty="0">
+                <a:solidFill>
+                  <a:srgbClr val="0D9488"/>
                 </a:solidFill>
                 <a:latin typeface="Trebuchet MS" pitchFamily="34" charset="0"/>
                 <a:ea typeface="Trebuchet MS" pitchFamily="34" charset="-122"/>
                 <a:cs typeface="Trebuchet MS" pitchFamily="34" charset="-120"/>
               </a:rPr>
-              <a:t>Syllables</a:t>
-            </a:r>
-            <a:endParaRPr lang="en-US" sz="1100" dirty="0"/>
+              <a:t>stop</a:t>
+            </a:r>
+            <a:endParaRPr lang="en-US" sz="1400" dirty="0"/>
+          </a:p>
+        </p:txBody>
+      </p:sp>
+      <p:sp>
+        <p:nvSpPr>
+          <p:cNvPr id="27" name="Text 25"/>
+          <p:cNvSpPr/>
+          <p:nvPr/>
+        </p:nvSpPr>
+        <p:spPr>
+          <a:xfrm>
+            <a:off x="4645152" y="3364992"/>
+            <a:ext cx="1097280" cy="475488"/>
+          </a:xfrm>
+          <a:prstGeom prst="rect">
+            <a:avLst/>
+          </a:prstGeom>
+          <a:noFill/>
+          <a:ln/>
+        </p:spPr>
+        <p:txBody>
+          <a:bodyPr wrap="square" lIns="0" tIns="0" rIns="0" bIns="0" rtlCol="0" anchor="ctr"/>
+          <a:lstStyle/>
+          <a:p>
+            <a:pPr algn="ctr" indent="0" marL="0">
+              <a:buNone/>
+            </a:pPr>
+            <a:r>
+              <a:rPr lang="en-US" sz="1600" b="1" dirty="0">
+                <a:solidFill>
+                  <a:srgbClr val="0D9488"/>
+                </a:solidFill>
+                <a:latin typeface="Trebuchet MS" pitchFamily="34" charset="0"/>
+                <a:ea typeface="Trebuchet MS" pitchFamily="34" charset="-122"/>
+                <a:cs typeface="Trebuchet MS" pitchFamily="34" charset="-120"/>
+              </a:rPr>
+              <a:t>·</a:t>
+            </a:r>
+            <a:endParaRPr lang="en-US" sz="1600" dirty="0"/>
           </a:p>
         </p:txBody>
       </p:sp>
@@ -31355,35 +31212,8 @@
         </p:nvSpPr>
         <p:spPr>
           <a:xfrm>
-            <a:off x="1874520" y="3273552"/>
-            <a:ext cx="6903720" cy="658368"/>
-          </a:xfrm>
-          <a:prstGeom prst="rect">
-            <a:avLst>
-              <a:gd name="adj" fmla="val 8333"/>
-            </a:avLst>
-          </a:prstGeom>
-          <a:solidFill>
-            <a:srgbClr val="CCFBF1"/>
-          </a:solidFill>
-          <a:ln w="12700">
-            <a:solidFill>
-              <a:srgbClr val="0D9488"/>
-            </a:solidFill>
-            <a:prstDash val="solid"/>
-          </a:ln>
-        </p:spPr>
-      </p:sp>
-      <p:sp>
-        <p:nvSpPr>
-          <p:cNvPr id="29" name="Shape 27"/>
-          <p:cNvSpPr/>
-          <p:nvPr/>
-        </p:nvSpPr>
-        <p:spPr>
-          <a:xfrm>
-            <a:off x="1975104" y="3364992"/>
-            <a:ext cx="1554480" cy="475488"/>
+            <a:off x="5742432" y="3364992"/>
+            <a:ext cx="1645920" cy="475488"/>
           </a:xfrm>
           <a:prstGeom prst="rect">
             <a:avLst>
@@ -31403,14 +31233,14 @@
       </p:sp>
       <p:sp>
         <p:nvSpPr>
-          <p:cNvPr id="30" name="Text 28"/>
-          <p:cNvSpPr/>
-          <p:nvPr/>
-        </p:nvSpPr>
-        <p:spPr>
-          <a:xfrm>
-            <a:off x="1975104" y="3364992"/>
-            <a:ext cx="1554480" cy="475488"/>
+          <p:cNvPr id="29" name="Text 27"/>
+          <p:cNvSpPr/>
+          <p:nvPr/>
+        </p:nvSpPr>
+        <p:spPr>
+          <a:xfrm>
+            <a:off x="5742432" y="3364992"/>
+            <a:ext cx="1645920" cy="475488"/>
           </a:xfrm>
           <a:prstGeom prst="rect">
             <a:avLst/>
@@ -31434,7 +31264,7 @@
                 <a:ea typeface="Trebuchet MS" pitchFamily="34" charset="-122"/>
                 <a:cs typeface="Trebuchet MS" pitchFamily="34" charset="-120"/>
               </a:rPr>
-              <a:t>un</a:t>
+              <a:t>light</a:t>
             </a:r>
             <a:endParaRPr lang="en-US" sz="1400" dirty="0"/>
           </a:p>
@@ -31442,14 +31272,41 @@
       </p:sp>
       <p:sp>
         <p:nvSpPr>
+          <p:cNvPr id="30" name="Shape 28"/>
+          <p:cNvSpPr/>
+          <p:nvPr/>
+        </p:nvSpPr>
+        <p:spPr>
+          <a:xfrm>
+            <a:off x="365760" y="4096512"/>
+            <a:ext cx="1371600" cy="804672"/>
+          </a:xfrm>
+          <a:prstGeom prst="rect">
+            <a:avLst>
+              <a:gd name="adj" fmla="val 6818"/>
+            </a:avLst>
+          </a:prstGeom>
+          <a:solidFill>
+            <a:srgbClr val="E2E8F0"/>
+          </a:solidFill>
+          <a:ln w="12700">
+            <a:solidFill>
+              <a:srgbClr val="E2E8F0"/>
+            </a:solidFill>
+            <a:prstDash val="solid"/>
+          </a:ln>
+        </p:spPr>
+      </p:sp>
+      <p:sp>
+        <p:nvSpPr>
           <p:cNvPr id="31" name="Text 29"/>
           <p:cNvSpPr/>
           <p:nvPr/>
         </p:nvSpPr>
         <p:spPr>
           <a:xfrm>
-            <a:off x="3529584" y="3364992"/>
-            <a:ext cx="73152" cy="475488"/>
+            <a:off x="365760" y="4096512"/>
+            <a:ext cx="1371600" cy="804672"/>
           </a:xfrm>
           <a:prstGeom prst="rect">
             <a:avLst/>
@@ -31465,17 +31322,17 @@
               <a:buNone/>
             </a:pPr>
             <a:r>
-              <a:rPr lang="en-US" sz="1600" b="1" dirty="0">
-                <a:solidFill>
-                  <a:srgbClr val="0D9488"/>
+              <a:rPr lang="en-US" sz="1100" b="1" dirty="0">
+                <a:solidFill>
+                  <a:srgbClr val="475569"/>
                 </a:solidFill>
                 <a:latin typeface="Trebuchet MS" pitchFamily="34" charset="0"/>
                 <a:ea typeface="Trebuchet MS" pitchFamily="34" charset="-122"/>
                 <a:cs typeface="Trebuchet MS" pitchFamily="34" charset="-120"/>
               </a:rPr>
-              <a:t>·</a:t>
-            </a:r>
-            <a:endParaRPr lang="en-US" sz="1600" dirty="0"/>
+              <a:t>Phonemes</a:t>
+            </a:r>
+            <a:endParaRPr lang="en-US" sz="1100" dirty="0"/>
           </a:p>
         </p:txBody>
       </p:sp>
@@ -31487,284 +31344,8 @@
         </p:nvSpPr>
         <p:spPr>
           <a:xfrm>
-            <a:off x="3602736" y="3364992"/>
-            <a:ext cx="1554480" cy="475488"/>
-          </a:xfrm>
-          <a:prstGeom prst="rect">
-            <a:avLst>
-              <a:gd name="adj" fmla="val 9615"/>
-            </a:avLst>
-          </a:prstGeom>
-          <a:solidFill>
-            <a:srgbClr val="FFFFFF"/>
-          </a:solidFill>
-          <a:ln w="12700">
-            <a:solidFill>
-              <a:srgbClr val="0D9488"/>
-            </a:solidFill>
-            <a:prstDash val="solid"/>
-          </a:ln>
-        </p:spPr>
-      </p:sp>
-      <p:sp>
-        <p:nvSpPr>
-          <p:cNvPr id="33" name="Text 31"/>
-          <p:cNvSpPr/>
-          <p:nvPr/>
-        </p:nvSpPr>
-        <p:spPr>
-          <a:xfrm>
-            <a:off x="3602736" y="3364992"/>
-            <a:ext cx="1554480" cy="475488"/>
-          </a:xfrm>
-          <a:prstGeom prst="rect">
-            <a:avLst/>
-          </a:prstGeom>
-          <a:noFill/>
-          <a:ln/>
-        </p:spPr>
-        <p:txBody>
-          <a:bodyPr wrap="square" lIns="0" tIns="0" rIns="0" bIns="0" rtlCol="0" anchor="ctr"/>
-          <a:lstStyle/>
-          <a:p>
-            <a:pPr algn="ctr" indent="0" marL="0">
-              <a:buNone/>
-            </a:pPr>
-            <a:r>
-              <a:rPr lang="en-US" sz="1400" b="1" dirty="0">
-                <a:solidFill>
-                  <a:srgbClr val="0D9488"/>
-                </a:solidFill>
-                <a:latin typeface="Trebuchet MS" pitchFamily="34" charset="0"/>
-                <a:ea typeface="Trebuchet MS" pitchFamily="34" charset="-122"/>
-                <a:cs typeface="Trebuchet MS" pitchFamily="34" charset="-120"/>
-              </a:rPr>
-              <a:t>stop</a:t>
-            </a:r>
-            <a:endParaRPr lang="en-US" sz="1400" dirty="0"/>
-          </a:p>
-        </p:txBody>
-      </p:sp>
-      <p:sp>
-        <p:nvSpPr>
-          <p:cNvPr id="34" name="Text 32"/>
-          <p:cNvSpPr/>
-          <p:nvPr/>
-        </p:nvSpPr>
-        <p:spPr>
-          <a:xfrm>
-            <a:off x="5157216" y="3364992"/>
-            <a:ext cx="73152" cy="475488"/>
-          </a:xfrm>
-          <a:prstGeom prst="rect">
-            <a:avLst/>
-          </a:prstGeom>
-          <a:noFill/>
-          <a:ln/>
-        </p:spPr>
-        <p:txBody>
-          <a:bodyPr wrap="square" lIns="0" tIns="0" rIns="0" bIns="0" rtlCol="0" anchor="ctr"/>
-          <a:lstStyle/>
-          <a:p>
-            <a:pPr algn="ctr" indent="0" marL="0">
-              <a:buNone/>
-            </a:pPr>
-            <a:r>
-              <a:rPr lang="en-US" sz="1600" b="1" dirty="0">
-                <a:solidFill>
-                  <a:srgbClr val="0D9488"/>
-                </a:solidFill>
-                <a:latin typeface="Trebuchet MS" pitchFamily="34" charset="0"/>
-                <a:ea typeface="Trebuchet MS" pitchFamily="34" charset="-122"/>
-                <a:cs typeface="Trebuchet MS" pitchFamily="34" charset="-120"/>
-              </a:rPr>
-              <a:t>·</a:t>
-            </a:r>
-            <a:endParaRPr lang="en-US" sz="1600" dirty="0"/>
-          </a:p>
-        </p:txBody>
-      </p:sp>
-      <p:sp>
-        <p:nvSpPr>
-          <p:cNvPr id="35" name="Shape 33"/>
-          <p:cNvSpPr/>
-          <p:nvPr/>
-        </p:nvSpPr>
-        <p:spPr>
-          <a:xfrm>
-            <a:off x="5230368" y="3364992"/>
-            <a:ext cx="1554480" cy="475488"/>
-          </a:xfrm>
-          <a:prstGeom prst="rect">
-            <a:avLst>
-              <a:gd name="adj" fmla="val 9615"/>
-            </a:avLst>
-          </a:prstGeom>
-          <a:solidFill>
-            <a:srgbClr val="FFFFFF"/>
-          </a:solidFill>
-          <a:ln w="12700">
-            <a:solidFill>
-              <a:srgbClr val="0D9488"/>
-            </a:solidFill>
-            <a:prstDash val="solid"/>
-          </a:ln>
-        </p:spPr>
-      </p:sp>
-      <p:sp>
-        <p:nvSpPr>
-          <p:cNvPr id="36" name="Text 34"/>
-          <p:cNvSpPr/>
-          <p:nvPr/>
-        </p:nvSpPr>
-        <p:spPr>
-          <a:xfrm>
-            <a:off x="5230368" y="3364992"/>
-            <a:ext cx="1554480" cy="475488"/>
-          </a:xfrm>
-          <a:prstGeom prst="rect">
-            <a:avLst/>
-          </a:prstGeom>
-          <a:noFill/>
-          <a:ln/>
-        </p:spPr>
-        <p:txBody>
-          <a:bodyPr wrap="square" lIns="0" tIns="0" rIns="0" bIns="0" rtlCol="0" anchor="ctr"/>
-          <a:lstStyle/>
-          <a:p>
-            <a:pPr algn="ctr" indent="0" marL="0">
-              <a:buNone/>
-            </a:pPr>
-            <a:r>
-              <a:rPr lang="en-US" sz="1400" b="1" dirty="0">
-                <a:solidFill>
-                  <a:srgbClr val="0D9488"/>
-                </a:solidFill>
-                <a:latin typeface="Trebuchet MS" pitchFamily="34" charset="0"/>
-                <a:ea typeface="Trebuchet MS" pitchFamily="34" charset="-122"/>
-                <a:cs typeface="Trebuchet MS" pitchFamily="34" charset="-120"/>
-              </a:rPr>
-              <a:t>pa</a:t>
-            </a:r>
-            <a:endParaRPr lang="en-US" sz="1400" dirty="0"/>
-          </a:p>
-        </p:txBody>
-      </p:sp>
-      <p:sp>
-        <p:nvSpPr>
-          <p:cNvPr id="37" name="Text 35"/>
-          <p:cNvSpPr/>
-          <p:nvPr/>
-        </p:nvSpPr>
-        <p:spPr>
-          <a:xfrm>
-            <a:off x="6784848" y="3364992"/>
-            <a:ext cx="73152" cy="475488"/>
-          </a:xfrm>
-          <a:prstGeom prst="rect">
-            <a:avLst/>
-          </a:prstGeom>
-          <a:noFill/>
-          <a:ln/>
-        </p:spPr>
-        <p:txBody>
-          <a:bodyPr wrap="square" lIns="0" tIns="0" rIns="0" bIns="0" rtlCol="0" anchor="ctr"/>
-          <a:lstStyle/>
-          <a:p>
-            <a:pPr algn="ctr" indent="0" marL="0">
-              <a:buNone/>
-            </a:pPr>
-            <a:r>
-              <a:rPr lang="en-US" sz="1600" b="1" dirty="0">
-                <a:solidFill>
-                  <a:srgbClr val="0D9488"/>
-                </a:solidFill>
-                <a:latin typeface="Trebuchet MS" pitchFamily="34" charset="0"/>
-                <a:ea typeface="Trebuchet MS" pitchFamily="34" charset="-122"/>
-                <a:cs typeface="Trebuchet MS" pitchFamily="34" charset="-120"/>
-              </a:rPr>
-              <a:t>·</a:t>
-            </a:r>
-            <a:endParaRPr lang="en-US" sz="1600" dirty="0"/>
-          </a:p>
-        </p:txBody>
-      </p:sp>
-      <p:sp>
-        <p:nvSpPr>
-          <p:cNvPr id="38" name="Shape 36"/>
-          <p:cNvSpPr/>
-          <p:nvPr/>
-        </p:nvSpPr>
-        <p:spPr>
-          <a:xfrm>
-            <a:off x="6858000" y="3364992"/>
-            <a:ext cx="1554480" cy="475488"/>
-          </a:xfrm>
-          <a:prstGeom prst="rect">
-            <a:avLst>
-              <a:gd name="adj" fmla="val 9615"/>
-            </a:avLst>
-          </a:prstGeom>
-          <a:solidFill>
-            <a:srgbClr val="FFFFFF"/>
-          </a:solidFill>
-          <a:ln w="12700">
-            <a:solidFill>
-              <a:srgbClr val="0D9488"/>
-            </a:solidFill>
-            <a:prstDash val="solid"/>
-          </a:ln>
-        </p:spPr>
-      </p:sp>
-      <p:sp>
-        <p:nvSpPr>
-          <p:cNvPr id="39" name="Text 37"/>
-          <p:cNvSpPr/>
-          <p:nvPr/>
-        </p:nvSpPr>
-        <p:spPr>
-          <a:xfrm>
-            <a:off x="6858000" y="3364992"/>
-            <a:ext cx="1554480" cy="475488"/>
-          </a:xfrm>
-          <a:prstGeom prst="rect">
-            <a:avLst/>
-          </a:prstGeom>
-          <a:noFill/>
-          <a:ln/>
-        </p:spPr>
-        <p:txBody>
-          <a:bodyPr wrap="square" lIns="0" tIns="0" rIns="0" bIns="0" rtlCol="0" anchor="ctr"/>
-          <a:lstStyle/>
-          <a:p>
-            <a:pPr algn="ctr" indent="0" marL="0">
-              <a:buNone/>
-            </a:pPr>
-            <a:r>
-              <a:rPr lang="en-US" sz="1400" b="1" dirty="0">
-                <a:solidFill>
-                  <a:srgbClr val="0D9488"/>
-                </a:solidFill>
-                <a:latin typeface="Trebuchet MS" pitchFamily="34" charset="0"/>
-                <a:ea typeface="Trebuchet MS" pitchFamily="34" charset="-122"/>
-                <a:cs typeface="Trebuchet MS" pitchFamily="34" charset="-120"/>
-              </a:rPr>
-              <a:t>ble</a:t>
-            </a:r>
-            <a:endParaRPr lang="en-US" sz="1400" dirty="0"/>
-          </a:p>
-        </p:txBody>
-      </p:sp>
-      <p:sp>
-        <p:nvSpPr>
-          <p:cNvPr id="40" name="Shape 38"/>
-          <p:cNvSpPr/>
-          <p:nvPr/>
-        </p:nvSpPr>
-        <p:spPr>
-          <a:xfrm>
-            <a:off x="365760" y="4096512"/>
-            <a:ext cx="1371600" cy="804672"/>
+            <a:off x="1874520" y="4096512"/>
+            <a:ext cx="6903720" cy="804672"/>
           </a:xfrm>
           <a:prstGeom prst="rect">
             <a:avLst>
@@ -31772,85 +31353,19 @@
             </a:avLst>
           </a:prstGeom>
           <a:solidFill>
-            <a:srgbClr val="E2E8F0"/>
+            <a:srgbClr val="F8FAFC"/>
           </a:solidFill>
           <a:ln w="12700">
             <a:solidFill>
               <a:srgbClr val="E2E8F0"/>
             </a:solidFill>
-            <a:prstDash val="solid"/>
-          </a:ln>
-        </p:spPr>
-      </p:sp>
-      <p:sp>
-        <p:nvSpPr>
-          <p:cNvPr id="41" name="Text 39"/>
-          <p:cNvSpPr/>
-          <p:nvPr/>
-        </p:nvSpPr>
-        <p:spPr>
-          <a:xfrm>
-            <a:off x="365760" y="4096512"/>
-            <a:ext cx="1371600" cy="804672"/>
-          </a:xfrm>
-          <a:prstGeom prst="rect">
-            <a:avLst/>
-          </a:prstGeom>
-          <a:noFill/>
-          <a:ln/>
-        </p:spPr>
-        <p:txBody>
-          <a:bodyPr wrap="square" lIns="0" tIns="0" rIns="0" bIns="0" rtlCol="0" anchor="ctr"/>
-          <a:lstStyle/>
-          <a:p>
-            <a:pPr algn="ctr" indent="0" marL="0">
-              <a:buNone/>
-            </a:pPr>
-            <a:r>
-              <a:rPr lang="en-US" sz="1100" b="1" dirty="0">
-                <a:solidFill>
-                  <a:srgbClr val="475569"/>
-                </a:solidFill>
-                <a:latin typeface="Trebuchet MS" pitchFamily="34" charset="0"/>
-                <a:ea typeface="Trebuchet MS" pitchFamily="34" charset="-122"/>
-                <a:cs typeface="Trebuchet MS" pitchFamily="34" charset="-120"/>
-              </a:rPr>
-              <a:t>Phonemes</a:t>
-            </a:r>
-            <a:endParaRPr lang="en-US" sz="1100" dirty="0"/>
-          </a:p>
-        </p:txBody>
-      </p:sp>
-      <p:sp>
-        <p:nvSpPr>
-          <p:cNvPr id="42" name="Shape 40"/>
-          <p:cNvSpPr/>
-          <p:nvPr/>
-        </p:nvSpPr>
-        <p:spPr>
-          <a:xfrm>
-            <a:off x="1874520" y="4096512"/>
-            <a:ext cx="6903720" cy="804672"/>
-          </a:xfrm>
-          <a:prstGeom prst="rect">
-            <a:avLst>
-              <a:gd name="adj" fmla="val 6818"/>
-            </a:avLst>
-          </a:prstGeom>
-          <a:solidFill>
-            <a:srgbClr val="F8FAFC"/>
-          </a:solidFill>
-          <a:ln w="12700">
-            <a:solidFill>
-              <a:srgbClr val="E2E8F0"/>
-            </a:solidFill>
             <a:prstDash val="dash"/>
           </a:ln>
         </p:spPr>
       </p:sp>
       <p:sp>
         <p:nvSpPr>
-          <p:cNvPr id="43" name="Text 41"/>
+          <p:cNvPr id="33" name="Text 31"/>
           <p:cNvSpPr/>
           <p:nvPr/>
         </p:nvSpPr>
@@ -32173,7 +31688,7 @@
                 <a:ea typeface="Calibri" pitchFamily="34" charset="-122"/>
                 <a:cs typeface="Calibri" pitchFamily="34" charset="-120"/>
               </a:rPr>
-              <a:t>Word Labs  •  wordlabs.app  •  Root: 'stop' = cease, block, or halt</a:t>
+              <a:t>Word Labs  •  wordlabs.app  •  Root: 'stop' = cease, halt, block movement</a:t>
             </a:r>
             <a:endParaRPr lang="en-US" sz="800" dirty="0"/>
           </a:p>
@@ -32312,7 +31827,7 @@
                 <a:ea typeface="Trebuchet MS" pitchFamily="34" charset="-122"/>
                 <a:cs typeface="Trebuchet MS" pitchFamily="34" charset="-120"/>
               </a:rPr>
-              <a:t>unstoppable</a:t>
+              <a:t>stoplight</a:t>
             </a:r>
             <a:endParaRPr lang="en-US" sz="2800" dirty="0"/>
           </a:p>
@@ -32392,7 +31907,7 @@
         </p:nvSpPr>
         <p:spPr>
           <a:xfrm>
-            <a:off x="2221992" y="2258568"/>
+            <a:off x="2938272" y="2258568"/>
             <a:ext cx="1828800" cy="292608"/>
           </a:xfrm>
           <a:prstGeom prst="rect">
@@ -32401,11 +31916,11 @@
             </a:avLst>
           </a:prstGeom>
           <a:solidFill>
-            <a:srgbClr val="DDD6FE"/>
+            <a:srgbClr val="CCFBF1"/>
           </a:solidFill>
           <a:ln w="19050">
             <a:solidFill>
-              <a:srgbClr val="7C3AED"/>
+              <a:srgbClr val="0D9488"/>
             </a:solidFill>
             <a:prstDash val="solid"/>
           </a:ln>
@@ -32426,7 +31941,7 @@
         </p:nvSpPr>
         <p:spPr>
           <a:xfrm>
-            <a:off x="2221992" y="2258568"/>
+            <a:off x="2938272" y="2258568"/>
             <a:ext cx="1828800" cy="292608"/>
           </a:xfrm>
           <a:prstGeom prst="rect">
@@ -32445,13 +31960,13 @@
             <a:r>
               <a:rPr lang="en-US" sz="1300" b="1" dirty="0">
                 <a:solidFill>
-                  <a:srgbClr val="4C1D95"/>
+                  <a:srgbClr val="0F766E"/>
                 </a:solidFill>
                 <a:latin typeface="Trebuchet MS" pitchFamily="34" charset="0"/>
                 <a:ea typeface="Trebuchet MS" pitchFamily="34" charset="-122"/>
                 <a:cs typeface="Trebuchet MS" pitchFamily="34" charset="-120"/>
               </a:rPr>
-              <a:t>un</a:t>
+              <a:t>stop</a:t>
             </a:r>
             <a:endParaRPr lang="en-US" sz="1300" dirty="0"/>
           </a:p>
@@ -32465,7 +31980,7 @@
         </p:nvSpPr>
         <p:spPr>
           <a:xfrm>
-            <a:off x="2221992" y="2569464"/>
+            <a:off x="2938272" y="2569464"/>
             <a:ext cx="1828800" cy="201168"/>
           </a:xfrm>
           <a:prstGeom prst="rect">
@@ -32490,7 +32005,7 @@
                 <a:ea typeface="Calibri" pitchFamily="34" charset="-122"/>
                 <a:cs typeface="Calibri" pitchFamily="34" charset="-120"/>
               </a:rPr>
-              <a:t>not</a:t>
+              <a:t>to halt or cease</a:t>
             </a:r>
             <a:endParaRPr lang="en-US" sz="850" dirty="0"/>
           </a:p>
@@ -32504,7 +32019,7 @@
         </p:nvSpPr>
         <p:spPr>
           <a:xfrm>
-            <a:off x="4370832" y="2258568"/>
+            <a:off x="5803392" y="2258568"/>
             <a:ext cx="1828800" cy="292608"/>
           </a:xfrm>
           <a:prstGeom prst="rect">
@@ -32513,11 +32028,11 @@
             </a:avLst>
           </a:prstGeom>
           <a:solidFill>
-            <a:srgbClr val="CCFBF1"/>
+            <a:srgbClr val="FCE7F3"/>
           </a:solidFill>
           <a:ln w="19050">
             <a:solidFill>
-              <a:srgbClr val="0D9488"/>
+              <a:srgbClr val="DB2777"/>
             </a:solidFill>
             <a:prstDash val="solid"/>
           </a:ln>
@@ -32538,7 +32053,7 @@
         </p:nvSpPr>
         <p:spPr>
           <a:xfrm>
-            <a:off x="4370832" y="2258568"/>
+            <a:off x="5803392" y="2258568"/>
             <a:ext cx="1828800" cy="292608"/>
           </a:xfrm>
           <a:prstGeom prst="rect">
@@ -32557,13 +32072,13 @@
             <a:r>
               <a:rPr lang="en-US" sz="1300" b="1" dirty="0">
                 <a:solidFill>
-                  <a:srgbClr val="0F766E"/>
+                  <a:srgbClr val="9D174D"/>
                 </a:solidFill>
                 <a:latin typeface="Trebuchet MS" pitchFamily="34" charset="0"/>
                 <a:ea typeface="Trebuchet MS" pitchFamily="34" charset="-122"/>
                 <a:cs typeface="Trebuchet MS" pitchFamily="34" charset="-120"/>
               </a:rPr>
-              <a:t>stop</a:t>
+              <a:t>light</a:t>
             </a:r>
             <a:endParaRPr lang="en-US" sz="1300" dirty="0"/>
           </a:p>
@@ -32577,7 +32092,7 @@
         </p:nvSpPr>
         <p:spPr>
           <a:xfrm>
-            <a:off x="4370832" y="2569464"/>
+            <a:off x="5803392" y="2569464"/>
             <a:ext cx="1828800" cy="201168"/>
           </a:xfrm>
           <a:prstGeom prst="rect">
@@ -32602,7 +32117,7 @@
                 <a:ea typeface="Calibri" pitchFamily="34" charset="-122"/>
                 <a:cs typeface="Calibri" pitchFamily="34" charset="-120"/>
               </a:rPr>
-              <a:t>to halt or cease</a:t>
+              <a:t>a source of brightness or signal</a:t>
             </a:r>
             <a:endParaRPr lang="en-US" sz="850" dirty="0"/>
           </a:p>
@@ -32616,30 +32131,23 @@
         </p:nvSpPr>
         <p:spPr>
           <a:xfrm>
-            <a:off x="6519672" y="2258568"/>
-            <a:ext cx="1828800" cy="292608"/>
+            <a:off x="365760" y="3273552"/>
+            <a:ext cx="1371600" cy="658368"/>
           </a:xfrm>
           <a:prstGeom prst="rect">
             <a:avLst>
-              <a:gd name="adj" fmla="val 25000"/>
+              <a:gd name="adj" fmla="val 8333"/>
             </a:avLst>
           </a:prstGeom>
           <a:solidFill>
-            <a:srgbClr val="FCE7F3"/>
-          </a:solidFill>
-          <a:ln w="19050">
-            <a:solidFill>
-              <a:srgbClr val="DB2777"/>
-            </a:solidFill>
-            <a:prstDash val="solid"/>
-          </a:ln>
-          <a:effectLst>
-            <a:outerShdw sx="100000" sy="100000" kx="0" ky="0" algn="bl" rotWithShape="0" blurRad="101600" dist="38100" dir="8100000">
-              <a:srgbClr val="000000">
-                <a:alpha val="12000"/>
-              </a:srgbClr>
-            </a:outerShdw>
-          </a:effectLst>
+            <a:srgbClr val="E2E8F0"/>
+          </a:solidFill>
+          <a:ln w="12700">
+            <a:solidFill>
+              <a:srgbClr val="E2E8F0"/>
+            </a:solidFill>
+            <a:prstDash val="solid"/>
+          </a:ln>
         </p:spPr>
       </p:sp>
       <p:sp>
@@ -32650,8 +32158,8 @@
         </p:nvSpPr>
         <p:spPr>
           <a:xfrm>
-            <a:off x="6519672" y="2258568"/>
-            <a:ext cx="1828800" cy="292608"/>
+            <a:off x="365760" y="3273552"/>
+            <a:ext cx="1371600" cy="658368"/>
           </a:xfrm>
           <a:prstGeom prst="rect">
             <a:avLst/>
@@ -32667,30 +32175,717 @@
               <a:buNone/>
             </a:pPr>
             <a:r>
-              <a:rPr lang="en-US" sz="1300" b="1" dirty="0">
-                <a:solidFill>
-                  <a:srgbClr val="9D174D"/>
+              <a:rPr lang="en-US" sz="1100" b="1" dirty="0">
+                <a:solidFill>
+                  <a:srgbClr val="475569"/>
                 </a:solidFill>
                 <a:latin typeface="Trebuchet MS" pitchFamily="34" charset="0"/>
                 <a:ea typeface="Trebuchet MS" pitchFamily="34" charset="-122"/>
                 <a:cs typeface="Trebuchet MS" pitchFamily="34" charset="-120"/>
               </a:rPr>
-              <a:t>able</a:t>
-            </a:r>
-            <a:endParaRPr lang="en-US" sz="1300" dirty="0"/>
-          </a:p>
-        </p:txBody>
-      </p:sp>
-      <p:sp>
-        <p:nvSpPr>
-          <p:cNvPr id="24" name="Text 22"/>
-          <p:cNvSpPr/>
-          <p:nvPr/>
-        </p:nvSpPr>
-        <p:spPr>
-          <a:xfrm>
-            <a:off x="6519672" y="2569464"/>
-            <a:ext cx="1828800" cy="201168"/>
+              <a:t>Syllables</a:t>
+            </a:r>
+            <a:endParaRPr lang="en-US" sz="1100" dirty="0"/>
+          </a:p>
+        </p:txBody>
+      </p:sp>
+      <p:sp>
+        <p:nvSpPr>
+          <p:cNvPr id="24" name="Shape 22"/>
+          <p:cNvSpPr/>
+          <p:nvPr/>
+        </p:nvSpPr>
+        <p:spPr>
+          <a:xfrm>
+            <a:off x="1874520" y="3273552"/>
+            <a:ext cx="6903720" cy="658368"/>
+          </a:xfrm>
+          <a:prstGeom prst="rect">
+            <a:avLst>
+              <a:gd name="adj" fmla="val 8333"/>
+            </a:avLst>
+          </a:prstGeom>
+          <a:solidFill>
+            <a:srgbClr val="CCFBF1"/>
+          </a:solidFill>
+          <a:ln w="12700">
+            <a:solidFill>
+              <a:srgbClr val="0D9488"/>
+            </a:solidFill>
+            <a:prstDash val="solid"/>
+          </a:ln>
+        </p:spPr>
+      </p:sp>
+      <p:sp>
+        <p:nvSpPr>
+          <p:cNvPr id="25" name="Shape 23"/>
+          <p:cNvSpPr/>
+          <p:nvPr/>
+        </p:nvSpPr>
+        <p:spPr>
+          <a:xfrm>
+            <a:off x="2999232" y="3364992"/>
+            <a:ext cx="1645920" cy="475488"/>
+          </a:xfrm>
+          <a:prstGeom prst="rect">
+            <a:avLst>
+              <a:gd name="adj" fmla="val 9615"/>
+            </a:avLst>
+          </a:prstGeom>
+          <a:solidFill>
+            <a:srgbClr val="FFFFFF"/>
+          </a:solidFill>
+          <a:ln w="12700">
+            <a:solidFill>
+              <a:srgbClr val="0D9488"/>
+            </a:solidFill>
+            <a:prstDash val="solid"/>
+          </a:ln>
+        </p:spPr>
+      </p:sp>
+      <p:sp>
+        <p:nvSpPr>
+          <p:cNvPr id="26" name="Text 24"/>
+          <p:cNvSpPr/>
+          <p:nvPr/>
+        </p:nvSpPr>
+        <p:spPr>
+          <a:xfrm>
+            <a:off x="2999232" y="3364992"/>
+            <a:ext cx="1645920" cy="475488"/>
+          </a:xfrm>
+          <a:prstGeom prst="rect">
+            <a:avLst/>
+          </a:prstGeom>
+          <a:noFill/>
+          <a:ln/>
+        </p:spPr>
+        <p:txBody>
+          <a:bodyPr wrap="square" lIns="0" tIns="0" rIns="0" bIns="0" rtlCol="0" anchor="ctr"/>
+          <a:lstStyle/>
+          <a:p>
+            <a:pPr algn="ctr" indent="0" marL="0">
+              <a:buNone/>
+            </a:pPr>
+            <a:r>
+              <a:rPr lang="en-US" sz="1400" b="1" dirty="0">
+                <a:solidFill>
+                  <a:srgbClr val="0D9488"/>
+                </a:solidFill>
+                <a:latin typeface="Trebuchet MS" pitchFamily="34" charset="0"/>
+                <a:ea typeface="Trebuchet MS" pitchFamily="34" charset="-122"/>
+                <a:cs typeface="Trebuchet MS" pitchFamily="34" charset="-120"/>
+              </a:rPr>
+              <a:t>stop</a:t>
+            </a:r>
+            <a:endParaRPr lang="en-US" sz="1400" dirty="0"/>
+          </a:p>
+        </p:txBody>
+      </p:sp>
+      <p:sp>
+        <p:nvSpPr>
+          <p:cNvPr id="27" name="Text 25"/>
+          <p:cNvSpPr/>
+          <p:nvPr/>
+        </p:nvSpPr>
+        <p:spPr>
+          <a:xfrm>
+            <a:off x="4645152" y="3364992"/>
+            <a:ext cx="1097280" cy="475488"/>
+          </a:xfrm>
+          <a:prstGeom prst="rect">
+            <a:avLst/>
+          </a:prstGeom>
+          <a:noFill/>
+          <a:ln/>
+        </p:spPr>
+        <p:txBody>
+          <a:bodyPr wrap="square" lIns="0" tIns="0" rIns="0" bIns="0" rtlCol="0" anchor="ctr"/>
+          <a:lstStyle/>
+          <a:p>
+            <a:pPr algn="ctr" indent="0" marL="0">
+              <a:buNone/>
+            </a:pPr>
+            <a:r>
+              <a:rPr lang="en-US" sz="1600" b="1" dirty="0">
+                <a:solidFill>
+                  <a:srgbClr val="0D9488"/>
+                </a:solidFill>
+                <a:latin typeface="Trebuchet MS" pitchFamily="34" charset="0"/>
+                <a:ea typeface="Trebuchet MS" pitchFamily="34" charset="-122"/>
+                <a:cs typeface="Trebuchet MS" pitchFamily="34" charset="-120"/>
+              </a:rPr>
+              <a:t>·</a:t>
+            </a:r>
+            <a:endParaRPr lang="en-US" sz="1600" dirty="0"/>
+          </a:p>
+        </p:txBody>
+      </p:sp>
+      <p:sp>
+        <p:nvSpPr>
+          <p:cNvPr id="28" name="Shape 26"/>
+          <p:cNvSpPr/>
+          <p:nvPr/>
+        </p:nvSpPr>
+        <p:spPr>
+          <a:xfrm>
+            <a:off x="5742432" y="3364992"/>
+            <a:ext cx="1645920" cy="475488"/>
+          </a:xfrm>
+          <a:prstGeom prst="rect">
+            <a:avLst>
+              <a:gd name="adj" fmla="val 9615"/>
+            </a:avLst>
+          </a:prstGeom>
+          <a:solidFill>
+            <a:srgbClr val="FFFFFF"/>
+          </a:solidFill>
+          <a:ln w="12700">
+            <a:solidFill>
+              <a:srgbClr val="0D9488"/>
+            </a:solidFill>
+            <a:prstDash val="solid"/>
+          </a:ln>
+        </p:spPr>
+      </p:sp>
+      <p:sp>
+        <p:nvSpPr>
+          <p:cNvPr id="29" name="Text 27"/>
+          <p:cNvSpPr/>
+          <p:nvPr/>
+        </p:nvSpPr>
+        <p:spPr>
+          <a:xfrm>
+            <a:off x="5742432" y="3364992"/>
+            <a:ext cx="1645920" cy="475488"/>
+          </a:xfrm>
+          <a:prstGeom prst="rect">
+            <a:avLst/>
+          </a:prstGeom>
+          <a:noFill/>
+          <a:ln/>
+        </p:spPr>
+        <p:txBody>
+          <a:bodyPr wrap="square" lIns="0" tIns="0" rIns="0" bIns="0" rtlCol="0" anchor="ctr"/>
+          <a:lstStyle/>
+          <a:p>
+            <a:pPr algn="ctr" indent="0" marL="0">
+              <a:buNone/>
+            </a:pPr>
+            <a:r>
+              <a:rPr lang="en-US" sz="1400" b="1" dirty="0">
+                <a:solidFill>
+                  <a:srgbClr val="0D9488"/>
+                </a:solidFill>
+                <a:latin typeface="Trebuchet MS" pitchFamily="34" charset="0"/>
+                <a:ea typeface="Trebuchet MS" pitchFamily="34" charset="-122"/>
+                <a:cs typeface="Trebuchet MS" pitchFamily="34" charset="-120"/>
+              </a:rPr>
+              <a:t>light</a:t>
+            </a:r>
+            <a:endParaRPr lang="en-US" sz="1400" dirty="0"/>
+          </a:p>
+        </p:txBody>
+      </p:sp>
+      <p:sp>
+        <p:nvSpPr>
+          <p:cNvPr id="30" name="Shape 28"/>
+          <p:cNvSpPr/>
+          <p:nvPr/>
+        </p:nvSpPr>
+        <p:spPr>
+          <a:xfrm>
+            <a:off x="365760" y="4096512"/>
+            <a:ext cx="1371600" cy="804672"/>
+          </a:xfrm>
+          <a:prstGeom prst="rect">
+            <a:avLst>
+              <a:gd name="adj" fmla="val 6818"/>
+            </a:avLst>
+          </a:prstGeom>
+          <a:solidFill>
+            <a:srgbClr val="E2E8F0"/>
+          </a:solidFill>
+          <a:ln w="12700">
+            <a:solidFill>
+              <a:srgbClr val="E2E8F0"/>
+            </a:solidFill>
+            <a:prstDash val="solid"/>
+          </a:ln>
+        </p:spPr>
+      </p:sp>
+      <p:sp>
+        <p:nvSpPr>
+          <p:cNvPr id="31" name="Text 29"/>
+          <p:cNvSpPr/>
+          <p:nvPr/>
+        </p:nvSpPr>
+        <p:spPr>
+          <a:xfrm>
+            <a:off x="365760" y="4096512"/>
+            <a:ext cx="1371600" cy="804672"/>
+          </a:xfrm>
+          <a:prstGeom prst="rect">
+            <a:avLst/>
+          </a:prstGeom>
+          <a:noFill/>
+          <a:ln/>
+        </p:spPr>
+        <p:txBody>
+          <a:bodyPr wrap="square" lIns="0" tIns="0" rIns="0" bIns="0" rtlCol="0" anchor="ctr"/>
+          <a:lstStyle/>
+          <a:p>
+            <a:pPr algn="ctr" indent="0" marL="0">
+              <a:buNone/>
+            </a:pPr>
+            <a:r>
+              <a:rPr lang="en-US" sz="1100" b="1" dirty="0">
+                <a:solidFill>
+                  <a:srgbClr val="475569"/>
+                </a:solidFill>
+                <a:latin typeface="Trebuchet MS" pitchFamily="34" charset="0"/>
+                <a:ea typeface="Trebuchet MS" pitchFamily="34" charset="-122"/>
+                <a:cs typeface="Trebuchet MS" pitchFamily="34" charset="-120"/>
+              </a:rPr>
+              <a:t>Phonemes</a:t>
+            </a:r>
+            <a:endParaRPr lang="en-US" sz="1100" dirty="0"/>
+          </a:p>
+        </p:txBody>
+      </p:sp>
+      <p:sp>
+        <p:nvSpPr>
+          <p:cNvPr id="32" name="Shape 30"/>
+          <p:cNvSpPr/>
+          <p:nvPr/>
+        </p:nvSpPr>
+        <p:spPr>
+          <a:xfrm>
+            <a:off x="1874520" y="4096512"/>
+            <a:ext cx="6903720" cy="804672"/>
+          </a:xfrm>
+          <a:prstGeom prst="rect">
+            <a:avLst>
+              <a:gd name="adj" fmla="val 6818"/>
+            </a:avLst>
+          </a:prstGeom>
+          <a:solidFill>
+            <a:srgbClr val="FCE7F3"/>
+          </a:solidFill>
+          <a:ln w="12700">
+            <a:solidFill>
+              <a:srgbClr val="DB2777"/>
+            </a:solidFill>
+            <a:prstDash val="solid"/>
+          </a:ln>
+        </p:spPr>
+      </p:sp>
+      <p:sp>
+        <p:nvSpPr>
+          <p:cNvPr id="33" name="Shape 31"/>
+          <p:cNvSpPr/>
+          <p:nvPr/>
+        </p:nvSpPr>
+        <p:spPr>
+          <a:xfrm>
+            <a:off x="2124837" y="4169664"/>
+            <a:ext cx="685800" cy="384048"/>
+          </a:xfrm>
+          <a:prstGeom prst="rect">
+            <a:avLst>
+              <a:gd name="adj" fmla="val 9524"/>
+            </a:avLst>
+          </a:prstGeom>
+          <a:solidFill>
+            <a:srgbClr val="FFFFFF"/>
+          </a:solidFill>
+          <a:ln w="12700">
+            <a:solidFill>
+              <a:srgbClr val="DB2777"/>
+            </a:solidFill>
+            <a:prstDash val="solid"/>
+          </a:ln>
+        </p:spPr>
+      </p:sp>
+      <p:sp>
+        <p:nvSpPr>
+          <p:cNvPr id="34" name="Text 32"/>
+          <p:cNvSpPr/>
+          <p:nvPr/>
+        </p:nvSpPr>
+        <p:spPr>
+          <a:xfrm>
+            <a:off x="2124837" y="4169664"/>
+            <a:ext cx="685800" cy="384048"/>
+          </a:xfrm>
+          <a:prstGeom prst="rect">
+            <a:avLst/>
+          </a:prstGeom>
+          <a:noFill/>
+          <a:ln/>
+        </p:spPr>
+        <p:txBody>
+          <a:bodyPr wrap="square" lIns="0" tIns="0" rIns="0" bIns="0" rtlCol="0" anchor="ctr"/>
+          <a:lstStyle/>
+          <a:p>
+            <a:pPr algn="ctr" indent="0" marL="0">
+              <a:buNone/>
+            </a:pPr>
+            <a:r>
+              <a:rPr lang="en-US" sz="900" b="1" dirty="0">
+                <a:solidFill>
+                  <a:srgbClr val="9D174D"/>
+                </a:solidFill>
+                <a:latin typeface="Trebuchet MS" pitchFamily="34" charset="0"/>
+                <a:ea typeface="Trebuchet MS" pitchFamily="34" charset="-122"/>
+                <a:cs typeface="Trebuchet MS" pitchFamily="34" charset="-120"/>
+              </a:rPr>
+              <a:t>s</a:t>
+            </a:r>
+            <a:endParaRPr lang="en-US" sz="900" dirty="0"/>
+          </a:p>
+        </p:txBody>
+      </p:sp>
+      <p:sp>
+        <p:nvSpPr>
+          <p:cNvPr id="35" name="Shape 33"/>
+          <p:cNvSpPr/>
+          <p:nvPr/>
+        </p:nvSpPr>
+        <p:spPr>
+          <a:xfrm>
+            <a:off x="3033522" y="4169664"/>
+            <a:ext cx="685800" cy="384048"/>
+          </a:xfrm>
+          <a:prstGeom prst="rect">
+            <a:avLst>
+              <a:gd name="adj" fmla="val 9524"/>
+            </a:avLst>
+          </a:prstGeom>
+          <a:solidFill>
+            <a:srgbClr val="FFFFFF"/>
+          </a:solidFill>
+          <a:ln w="12700">
+            <a:solidFill>
+              <a:srgbClr val="DB2777"/>
+            </a:solidFill>
+            <a:prstDash val="solid"/>
+          </a:ln>
+        </p:spPr>
+      </p:sp>
+      <p:sp>
+        <p:nvSpPr>
+          <p:cNvPr id="36" name="Text 34"/>
+          <p:cNvSpPr/>
+          <p:nvPr/>
+        </p:nvSpPr>
+        <p:spPr>
+          <a:xfrm>
+            <a:off x="3033522" y="4169664"/>
+            <a:ext cx="685800" cy="384048"/>
+          </a:xfrm>
+          <a:prstGeom prst="rect">
+            <a:avLst/>
+          </a:prstGeom>
+          <a:noFill/>
+          <a:ln/>
+        </p:spPr>
+        <p:txBody>
+          <a:bodyPr wrap="square" lIns="0" tIns="0" rIns="0" bIns="0" rtlCol="0" anchor="ctr"/>
+          <a:lstStyle/>
+          <a:p>
+            <a:pPr algn="ctr" indent="0" marL="0">
+              <a:buNone/>
+            </a:pPr>
+            <a:r>
+              <a:rPr lang="en-US" sz="900" b="1" dirty="0">
+                <a:solidFill>
+                  <a:srgbClr val="9D174D"/>
+                </a:solidFill>
+                <a:latin typeface="Trebuchet MS" pitchFamily="34" charset="0"/>
+                <a:ea typeface="Trebuchet MS" pitchFamily="34" charset="-122"/>
+                <a:cs typeface="Trebuchet MS" pitchFamily="34" charset="-120"/>
+              </a:rPr>
+              <a:t>t</a:t>
+            </a:r>
+            <a:endParaRPr lang="en-US" sz="900" dirty="0"/>
+          </a:p>
+        </p:txBody>
+      </p:sp>
+      <p:sp>
+        <p:nvSpPr>
+          <p:cNvPr id="37" name="Shape 35"/>
+          <p:cNvSpPr/>
+          <p:nvPr/>
+        </p:nvSpPr>
+        <p:spPr>
+          <a:xfrm>
+            <a:off x="3942207" y="4169664"/>
+            <a:ext cx="685800" cy="384048"/>
+          </a:xfrm>
+          <a:prstGeom prst="rect">
+            <a:avLst>
+              <a:gd name="adj" fmla="val 9524"/>
+            </a:avLst>
+          </a:prstGeom>
+          <a:solidFill>
+            <a:srgbClr val="FFFFFF"/>
+          </a:solidFill>
+          <a:ln w="12700">
+            <a:solidFill>
+              <a:srgbClr val="DB2777"/>
+            </a:solidFill>
+            <a:prstDash val="solid"/>
+          </a:ln>
+        </p:spPr>
+      </p:sp>
+      <p:sp>
+        <p:nvSpPr>
+          <p:cNvPr id="38" name="Text 36"/>
+          <p:cNvSpPr/>
+          <p:nvPr/>
+        </p:nvSpPr>
+        <p:spPr>
+          <a:xfrm>
+            <a:off x="3942207" y="4169664"/>
+            <a:ext cx="685800" cy="384048"/>
+          </a:xfrm>
+          <a:prstGeom prst="rect">
+            <a:avLst/>
+          </a:prstGeom>
+          <a:noFill/>
+          <a:ln/>
+        </p:spPr>
+        <p:txBody>
+          <a:bodyPr wrap="square" lIns="0" tIns="0" rIns="0" bIns="0" rtlCol="0" anchor="ctr"/>
+          <a:lstStyle/>
+          <a:p>
+            <a:pPr algn="ctr" indent="0" marL="0">
+              <a:buNone/>
+            </a:pPr>
+            <a:r>
+              <a:rPr lang="en-US" sz="900" b="1" dirty="0">
+                <a:solidFill>
+                  <a:srgbClr val="9D174D"/>
+                </a:solidFill>
+                <a:latin typeface="Trebuchet MS" pitchFamily="34" charset="0"/>
+                <a:ea typeface="Trebuchet MS" pitchFamily="34" charset="-122"/>
+                <a:cs typeface="Trebuchet MS" pitchFamily="34" charset="-120"/>
+              </a:rPr>
+              <a:t>o</a:t>
+            </a:r>
+            <a:endParaRPr lang="en-US" sz="900" dirty="0"/>
+          </a:p>
+        </p:txBody>
+      </p:sp>
+      <p:sp>
+        <p:nvSpPr>
+          <p:cNvPr id="39" name="Shape 37"/>
+          <p:cNvSpPr/>
+          <p:nvPr/>
+        </p:nvSpPr>
+        <p:spPr>
+          <a:xfrm>
+            <a:off x="4850892" y="4169664"/>
+            <a:ext cx="685800" cy="384048"/>
+          </a:xfrm>
+          <a:prstGeom prst="rect">
+            <a:avLst>
+              <a:gd name="adj" fmla="val 9524"/>
+            </a:avLst>
+          </a:prstGeom>
+          <a:solidFill>
+            <a:srgbClr val="FFFFFF"/>
+          </a:solidFill>
+          <a:ln w="12700">
+            <a:solidFill>
+              <a:srgbClr val="DB2777"/>
+            </a:solidFill>
+            <a:prstDash val="solid"/>
+          </a:ln>
+        </p:spPr>
+      </p:sp>
+      <p:sp>
+        <p:nvSpPr>
+          <p:cNvPr id="40" name="Text 38"/>
+          <p:cNvSpPr/>
+          <p:nvPr/>
+        </p:nvSpPr>
+        <p:spPr>
+          <a:xfrm>
+            <a:off x="4850892" y="4169664"/>
+            <a:ext cx="685800" cy="384048"/>
+          </a:xfrm>
+          <a:prstGeom prst="rect">
+            <a:avLst/>
+          </a:prstGeom>
+          <a:noFill/>
+          <a:ln/>
+        </p:spPr>
+        <p:txBody>
+          <a:bodyPr wrap="square" lIns="0" tIns="0" rIns="0" bIns="0" rtlCol="0" anchor="ctr"/>
+          <a:lstStyle/>
+          <a:p>
+            <a:pPr algn="ctr" indent="0" marL="0">
+              <a:buNone/>
+            </a:pPr>
+            <a:r>
+              <a:rPr lang="en-US" sz="900" b="1" dirty="0">
+                <a:solidFill>
+                  <a:srgbClr val="9D174D"/>
+                </a:solidFill>
+                <a:latin typeface="Trebuchet MS" pitchFamily="34" charset="0"/>
+                <a:ea typeface="Trebuchet MS" pitchFamily="34" charset="-122"/>
+                <a:cs typeface="Trebuchet MS" pitchFamily="34" charset="-120"/>
+              </a:rPr>
+              <a:t>p</a:t>
+            </a:r>
+            <a:endParaRPr lang="en-US" sz="900" dirty="0"/>
+          </a:p>
+        </p:txBody>
+      </p:sp>
+      <p:sp>
+        <p:nvSpPr>
+          <p:cNvPr id="41" name="Shape 39"/>
+          <p:cNvSpPr/>
+          <p:nvPr/>
+        </p:nvSpPr>
+        <p:spPr>
+          <a:xfrm>
+            <a:off x="5759577" y="4169664"/>
+            <a:ext cx="685800" cy="384048"/>
+          </a:xfrm>
+          <a:prstGeom prst="rect">
+            <a:avLst>
+              <a:gd name="adj" fmla="val 9524"/>
+            </a:avLst>
+          </a:prstGeom>
+          <a:solidFill>
+            <a:srgbClr val="FFFFFF"/>
+          </a:solidFill>
+          <a:ln w="12700">
+            <a:solidFill>
+              <a:srgbClr val="DB2777"/>
+            </a:solidFill>
+            <a:prstDash val="solid"/>
+          </a:ln>
+        </p:spPr>
+      </p:sp>
+      <p:sp>
+        <p:nvSpPr>
+          <p:cNvPr id="42" name="Text 40"/>
+          <p:cNvSpPr/>
+          <p:nvPr/>
+        </p:nvSpPr>
+        <p:spPr>
+          <a:xfrm>
+            <a:off x="5759577" y="4169664"/>
+            <a:ext cx="685800" cy="384048"/>
+          </a:xfrm>
+          <a:prstGeom prst="rect">
+            <a:avLst/>
+          </a:prstGeom>
+          <a:noFill/>
+          <a:ln/>
+        </p:spPr>
+        <p:txBody>
+          <a:bodyPr wrap="square" lIns="0" tIns="0" rIns="0" bIns="0" rtlCol="0" anchor="ctr"/>
+          <a:lstStyle/>
+          <a:p>
+            <a:pPr algn="ctr" indent="0" marL="0">
+              <a:buNone/>
+            </a:pPr>
+            <a:r>
+              <a:rPr lang="en-US" sz="900" b="1" dirty="0">
+                <a:solidFill>
+                  <a:srgbClr val="9D174D"/>
+                </a:solidFill>
+                <a:latin typeface="Trebuchet MS" pitchFamily="34" charset="0"/>
+                <a:ea typeface="Trebuchet MS" pitchFamily="34" charset="-122"/>
+                <a:cs typeface="Trebuchet MS" pitchFamily="34" charset="-120"/>
+              </a:rPr>
+              <a:t>l</a:t>
+            </a:r>
+            <a:endParaRPr lang="en-US" sz="900" dirty="0"/>
+          </a:p>
+        </p:txBody>
+      </p:sp>
+      <p:sp>
+        <p:nvSpPr>
+          <p:cNvPr id="43" name="Shape 41"/>
+          <p:cNvSpPr/>
+          <p:nvPr/>
+        </p:nvSpPr>
+        <p:spPr>
+          <a:xfrm>
+            <a:off x="6668262" y="4169664"/>
+            <a:ext cx="685800" cy="384048"/>
+          </a:xfrm>
+          <a:prstGeom prst="rect">
+            <a:avLst>
+              <a:gd name="adj" fmla="val 9524"/>
+            </a:avLst>
+          </a:prstGeom>
+          <a:solidFill>
+            <a:srgbClr val="FFFFFF"/>
+          </a:solidFill>
+          <a:ln w="12700">
+            <a:solidFill>
+              <a:srgbClr val="DB2777"/>
+            </a:solidFill>
+            <a:prstDash val="solid"/>
+          </a:ln>
+        </p:spPr>
+      </p:sp>
+      <p:sp>
+        <p:nvSpPr>
+          <p:cNvPr id="44" name="Text 42"/>
+          <p:cNvSpPr/>
+          <p:nvPr/>
+        </p:nvSpPr>
+        <p:spPr>
+          <a:xfrm>
+            <a:off x="6668262" y="4169664"/>
+            <a:ext cx="685800" cy="384048"/>
+          </a:xfrm>
+          <a:prstGeom prst="rect">
+            <a:avLst/>
+          </a:prstGeom>
+          <a:noFill/>
+          <a:ln/>
+        </p:spPr>
+        <p:txBody>
+          <a:bodyPr wrap="square" lIns="0" tIns="0" rIns="0" bIns="0" rtlCol="0" anchor="ctr"/>
+          <a:lstStyle/>
+          <a:p>
+            <a:pPr algn="ctr" indent="0" marL="0">
+              <a:buNone/>
+            </a:pPr>
+            <a:r>
+              <a:rPr lang="en-US" sz="900" b="1" dirty="0">
+                <a:solidFill>
+                  <a:srgbClr val="9D174D"/>
+                </a:solidFill>
+                <a:latin typeface="Trebuchet MS" pitchFamily="34" charset="0"/>
+                <a:ea typeface="Trebuchet MS" pitchFamily="34" charset="-122"/>
+                <a:cs typeface="Trebuchet MS" pitchFamily="34" charset="-120"/>
+              </a:rPr>
+              <a:t>igh</a:t>
+            </a:r>
+            <a:endParaRPr lang="en-US" sz="900" dirty="0"/>
+          </a:p>
+        </p:txBody>
+      </p:sp>
+      <p:sp>
+        <p:nvSpPr>
+          <p:cNvPr id="45" name="Text 43"/>
+          <p:cNvSpPr/>
+          <p:nvPr/>
+        </p:nvSpPr>
+        <p:spPr>
+          <a:xfrm>
+            <a:off x="6668262" y="4572000"/>
+            <a:ext cx="685800" cy="219456"/>
           </a:xfrm>
           <a:prstGeom prst="rect">
             <a:avLst/>
@@ -32706,96 +32901,57 @@
               <a:buNone/>
             </a:pPr>
             <a:r>
-              <a:rPr lang="en-US" sz="850" dirty="0">
-                <a:solidFill>
-                  <a:srgbClr val="475569"/>
+              <a:rPr lang="en-US" sz="750" i="1" dirty="0">
+                <a:solidFill>
+                  <a:srgbClr val="94A3B8"/>
                 </a:solidFill>
                 <a:latin typeface="Calibri" pitchFamily="34" charset="0"/>
                 <a:ea typeface="Calibri" pitchFamily="34" charset="-122"/>
                 <a:cs typeface="Calibri" pitchFamily="34" charset="-120"/>
               </a:rPr>
-              <a:t>capable of being</a:t>
-            </a:r>
-            <a:endParaRPr lang="en-US" sz="850" dirty="0"/>
-          </a:p>
-        </p:txBody>
-      </p:sp>
-      <p:sp>
-        <p:nvSpPr>
-          <p:cNvPr id="25" name="Text 23"/>
-          <p:cNvSpPr/>
-          <p:nvPr/>
-        </p:nvSpPr>
-        <p:spPr>
-          <a:xfrm>
-            <a:off x="6519672" y="2752344"/>
-            <a:ext cx="1828800" cy="182880"/>
-          </a:xfrm>
-          <a:prstGeom prst="rect">
-            <a:avLst/>
-          </a:prstGeom>
-          <a:noFill/>
-          <a:ln/>
-        </p:spPr>
-        <p:txBody>
-          <a:bodyPr wrap="square" lIns="0" tIns="0" rIns="0" bIns="0" rtlCol="0" anchor="t"/>
-          <a:lstStyle/>
-          <a:p>
-            <a:pPr algn="ctr" indent="0" marL="0">
-              <a:buNone/>
-            </a:pPr>
-            <a:r>
-              <a:rPr lang="en-US" sz="700" i="1" dirty="0">
-                <a:solidFill>
-                  <a:srgbClr val="94A3B8"/>
-                </a:solidFill>
-                <a:latin typeface="Calibri" pitchFamily="34" charset="0"/>
-                <a:ea typeface="Calibri" pitchFamily="34" charset="-122"/>
-                <a:cs typeface="Calibri" pitchFamily="34" charset="-120"/>
-              </a:rPr>
-              <a:t>final consonant doubled before vowel suffix</a:t>
-            </a:r>
-            <a:endParaRPr lang="en-US" sz="700" dirty="0"/>
-          </a:p>
-        </p:txBody>
-      </p:sp>
-      <p:sp>
-        <p:nvSpPr>
-          <p:cNvPr id="26" name="Shape 24"/>
-          <p:cNvSpPr/>
-          <p:nvPr/>
-        </p:nvSpPr>
-        <p:spPr>
-          <a:xfrm>
-            <a:off x="365760" y="3273552"/>
-            <a:ext cx="1371600" cy="658368"/>
+              <a:t>/ie/</a:t>
+            </a:r>
+            <a:endParaRPr lang="en-US" sz="750" dirty="0"/>
+          </a:p>
+        </p:txBody>
+      </p:sp>
+      <p:sp>
+        <p:nvSpPr>
+          <p:cNvPr id="46" name="Shape 44"/>
+          <p:cNvSpPr/>
+          <p:nvPr/>
+        </p:nvSpPr>
+        <p:spPr>
+          <a:xfrm>
+            <a:off x="7576947" y="4169664"/>
+            <a:ext cx="685800" cy="384048"/>
           </a:xfrm>
           <a:prstGeom prst="rect">
             <a:avLst>
-              <a:gd name="adj" fmla="val 8333"/>
+              <a:gd name="adj" fmla="val 9524"/>
             </a:avLst>
           </a:prstGeom>
           <a:solidFill>
-            <a:srgbClr val="E2E8F0"/>
-          </a:solidFill>
-          <a:ln w="12700">
-            <a:solidFill>
-              <a:srgbClr val="E2E8F0"/>
-            </a:solidFill>
-            <a:prstDash val="solid"/>
-          </a:ln>
-        </p:spPr>
-      </p:sp>
-      <p:sp>
-        <p:nvSpPr>
-          <p:cNvPr id="27" name="Text 25"/>
-          <p:cNvSpPr/>
-          <p:nvPr/>
-        </p:nvSpPr>
-        <p:spPr>
-          <a:xfrm>
-            <a:off x="365760" y="3273552"/>
-            <a:ext cx="1371600" cy="658368"/>
+            <a:srgbClr val="FFFFFF"/>
+          </a:solidFill>
+          <a:ln w="12700">
+            <a:solidFill>
+              <a:srgbClr val="DB2777"/>
+            </a:solidFill>
+            <a:prstDash val="solid"/>
+          </a:ln>
+        </p:spPr>
+      </p:sp>
+      <p:sp>
+        <p:nvSpPr>
+          <p:cNvPr id="47" name="Text 45"/>
+          <p:cNvSpPr/>
+          <p:nvPr/>
+        </p:nvSpPr>
+        <p:spPr>
+          <a:xfrm>
+            <a:off x="7576947" y="4169664"/>
+            <a:ext cx="685800" cy="384048"/>
           </a:xfrm>
           <a:prstGeom prst="rect">
             <a:avLst/>
@@ -32811,1110 +32967,15 @@
               <a:buNone/>
             </a:pPr>
             <a:r>
-              <a:rPr lang="en-US" sz="1100" b="1" dirty="0">
-                <a:solidFill>
-                  <a:srgbClr val="475569"/>
+              <a:rPr lang="en-US" sz="900" b="1" dirty="0">
+                <a:solidFill>
+                  <a:srgbClr val="9D174D"/>
                 </a:solidFill>
                 <a:latin typeface="Trebuchet MS" pitchFamily="34" charset="0"/>
                 <a:ea typeface="Trebuchet MS" pitchFamily="34" charset="-122"/>
                 <a:cs typeface="Trebuchet MS" pitchFamily="34" charset="-120"/>
               </a:rPr>
-              <a:t>Syllables</a:t>
-            </a:r>
-            <a:endParaRPr lang="en-US" sz="1100" dirty="0"/>
-          </a:p>
-        </p:txBody>
-      </p:sp>
-      <p:sp>
-        <p:nvSpPr>
-          <p:cNvPr id="28" name="Shape 26"/>
-          <p:cNvSpPr/>
-          <p:nvPr/>
-        </p:nvSpPr>
-        <p:spPr>
-          <a:xfrm>
-            <a:off x="1874520" y="3273552"/>
-            <a:ext cx="6903720" cy="658368"/>
-          </a:xfrm>
-          <a:prstGeom prst="rect">
-            <a:avLst>
-              <a:gd name="adj" fmla="val 8333"/>
-            </a:avLst>
-          </a:prstGeom>
-          <a:solidFill>
-            <a:srgbClr val="CCFBF1"/>
-          </a:solidFill>
-          <a:ln w="12700">
-            <a:solidFill>
-              <a:srgbClr val="0D9488"/>
-            </a:solidFill>
-            <a:prstDash val="solid"/>
-          </a:ln>
-        </p:spPr>
-      </p:sp>
-      <p:sp>
-        <p:nvSpPr>
-          <p:cNvPr id="29" name="Shape 27"/>
-          <p:cNvSpPr/>
-          <p:nvPr/>
-        </p:nvSpPr>
-        <p:spPr>
-          <a:xfrm>
-            <a:off x="1975104" y="3364992"/>
-            <a:ext cx="1554480" cy="475488"/>
-          </a:xfrm>
-          <a:prstGeom prst="rect">
-            <a:avLst>
-              <a:gd name="adj" fmla="val 9615"/>
-            </a:avLst>
-          </a:prstGeom>
-          <a:solidFill>
-            <a:srgbClr val="FFFFFF"/>
-          </a:solidFill>
-          <a:ln w="12700">
-            <a:solidFill>
-              <a:srgbClr val="0D9488"/>
-            </a:solidFill>
-            <a:prstDash val="solid"/>
-          </a:ln>
-        </p:spPr>
-      </p:sp>
-      <p:sp>
-        <p:nvSpPr>
-          <p:cNvPr id="30" name="Text 28"/>
-          <p:cNvSpPr/>
-          <p:nvPr/>
-        </p:nvSpPr>
-        <p:spPr>
-          <a:xfrm>
-            <a:off x="1975104" y="3364992"/>
-            <a:ext cx="1554480" cy="475488"/>
-          </a:xfrm>
-          <a:prstGeom prst="rect">
-            <a:avLst/>
-          </a:prstGeom>
-          <a:noFill/>
-          <a:ln/>
-        </p:spPr>
-        <p:txBody>
-          <a:bodyPr wrap="square" lIns="0" tIns="0" rIns="0" bIns="0" rtlCol="0" anchor="ctr"/>
-          <a:lstStyle/>
-          <a:p>
-            <a:pPr algn="ctr" indent="0" marL="0">
-              <a:buNone/>
-            </a:pPr>
-            <a:r>
-              <a:rPr lang="en-US" sz="1400" b="1" dirty="0">
-                <a:solidFill>
-                  <a:srgbClr val="0D9488"/>
-                </a:solidFill>
-                <a:latin typeface="Trebuchet MS" pitchFamily="34" charset="0"/>
-                <a:ea typeface="Trebuchet MS" pitchFamily="34" charset="-122"/>
-                <a:cs typeface="Trebuchet MS" pitchFamily="34" charset="-120"/>
-              </a:rPr>
-              <a:t>un</a:t>
-            </a:r>
-            <a:endParaRPr lang="en-US" sz="1400" dirty="0"/>
-          </a:p>
-        </p:txBody>
-      </p:sp>
-      <p:sp>
-        <p:nvSpPr>
-          <p:cNvPr id="31" name="Text 29"/>
-          <p:cNvSpPr/>
-          <p:nvPr/>
-        </p:nvSpPr>
-        <p:spPr>
-          <a:xfrm>
-            <a:off x="3529584" y="3364992"/>
-            <a:ext cx="73152" cy="475488"/>
-          </a:xfrm>
-          <a:prstGeom prst="rect">
-            <a:avLst/>
-          </a:prstGeom>
-          <a:noFill/>
-          <a:ln/>
-        </p:spPr>
-        <p:txBody>
-          <a:bodyPr wrap="square" lIns="0" tIns="0" rIns="0" bIns="0" rtlCol="0" anchor="ctr"/>
-          <a:lstStyle/>
-          <a:p>
-            <a:pPr algn="ctr" indent="0" marL="0">
-              <a:buNone/>
-            </a:pPr>
-            <a:r>
-              <a:rPr lang="en-US" sz="1600" b="1" dirty="0">
-                <a:solidFill>
-                  <a:srgbClr val="0D9488"/>
-                </a:solidFill>
-                <a:latin typeface="Trebuchet MS" pitchFamily="34" charset="0"/>
-                <a:ea typeface="Trebuchet MS" pitchFamily="34" charset="-122"/>
-                <a:cs typeface="Trebuchet MS" pitchFamily="34" charset="-120"/>
-              </a:rPr>
-              <a:t>·</a:t>
-            </a:r>
-            <a:endParaRPr lang="en-US" sz="1600" dirty="0"/>
-          </a:p>
-        </p:txBody>
-      </p:sp>
-      <p:sp>
-        <p:nvSpPr>
-          <p:cNvPr id="32" name="Shape 30"/>
-          <p:cNvSpPr/>
-          <p:nvPr/>
-        </p:nvSpPr>
-        <p:spPr>
-          <a:xfrm>
-            <a:off x="3602736" y="3364992"/>
-            <a:ext cx="1554480" cy="475488"/>
-          </a:xfrm>
-          <a:prstGeom prst="rect">
-            <a:avLst>
-              <a:gd name="adj" fmla="val 9615"/>
-            </a:avLst>
-          </a:prstGeom>
-          <a:solidFill>
-            <a:srgbClr val="FFFFFF"/>
-          </a:solidFill>
-          <a:ln w="12700">
-            <a:solidFill>
-              <a:srgbClr val="0D9488"/>
-            </a:solidFill>
-            <a:prstDash val="solid"/>
-          </a:ln>
-        </p:spPr>
-      </p:sp>
-      <p:sp>
-        <p:nvSpPr>
-          <p:cNvPr id="33" name="Text 31"/>
-          <p:cNvSpPr/>
-          <p:nvPr/>
-        </p:nvSpPr>
-        <p:spPr>
-          <a:xfrm>
-            <a:off x="3602736" y="3364992"/>
-            <a:ext cx="1554480" cy="475488"/>
-          </a:xfrm>
-          <a:prstGeom prst="rect">
-            <a:avLst/>
-          </a:prstGeom>
-          <a:noFill/>
-          <a:ln/>
-        </p:spPr>
-        <p:txBody>
-          <a:bodyPr wrap="square" lIns="0" tIns="0" rIns="0" bIns="0" rtlCol="0" anchor="ctr"/>
-          <a:lstStyle/>
-          <a:p>
-            <a:pPr algn="ctr" indent="0" marL="0">
-              <a:buNone/>
-            </a:pPr>
-            <a:r>
-              <a:rPr lang="en-US" sz="1400" b="1" dirty="0">
-                <a:solidFill>
-                  <a:srgbClr val="0D9488"/>
-                </a:solidFill>
-                <a:latin typeface="Trebuchet MS" pitchFamily="34" charset="0"/>
-                <a:ea typeface="Trebuchet MS" pitchFamily="34" charset="-122"/>
-                <a:cs typeface="Trebuchet MS" pitchFamily="34" charset="-120"/>
-              </a:rPr>
-              <a:t>stop</a:t>
-            </a:r>
-            <a:endParaRPr lang="en-US" sz="1400" dirty="0"/>
-          </a:p>
-        </p:txBody>
-      </p:sp>
-      <p:sp>
-        <p:nvSpPr>
-          <p:cNvPr id="34" name="Text 32"/>
-          <p:cNvSpPr/>
-          <p:nvPr/>
-        </p:nvSpPr>
-        <p:spPr>
-          <a:xfrm>
-            <a:off x="5157216" y="3364992"/>
-            <a:ext cx="73152" cy="475488"/>
-          </a:xfrm>
-          <a:prstGeom prst="rect">
-            <a:avLst/>
-          </a:prstGeom>
-          <a:noFill/>
-          <a:ln/>
-        </p:spPr>
-        <p:txBody>
-          <a:bodyPr wrap="square" lIns="0" tIns="0" rIns="0" bIns="0" rtlCol="0" anchor="ctr"/>
-          <a:lstStyle/>
-          <a:p>
-            <a:pPr algn="ctr" indent="0" marL="0">
-              <a:buNone/>
-            </a:pPr>
-            <a:r>
-              <a:rPr lang="en-US" sz="1600" b="1" dirty="0">
-                <a:solidFill>
-                  <a:srgbClr val="0D9488"/>
-                </a:solidFill>
-                <a:latin typeface="Trebuchet MS" pitchFamily="34" charset="0"/>
-                <a:ea typeface="Trebuchet MS" pitchFamily="34" charset="-122"/>
-                <a:cs typeface="Trebuchet MS" pitchFamily="34" charset="-120"/>
-              </a:rPr>
-              <a:t>·</a:t>
-            </a:r>
-            <a:endParaRPr lang="en-US" sz="1600" dirty="0"/>
-          </a:p>
-        </p:txBody>
-      </p:sp>
-      <p:sp>
-        <p:nvSpPr>
-          <p:cNvPr id="35" name="Shape 33"/>
-          <p:cNvSpPr/>
-          <p:nvPr/>
-        </p:nvSpPr>
-        <p:spPr>
-          <a:xfrm>
-            <a:off x="5230368" y="3364992"/>
-            <a:ext cx="1554480" cy="475488"/>
-          </a:xfrm>
-          <a:prstGeom prst="rect">
-            <a:avLst>
-              <a:gd name="adj" fmla="val 9615"/>
-            </a:avLst>
-          </a:prstGeom>
-          <a:solidFill>
-            <a:srgbClr val="FFFFFF"/>
-          </a:solidFill>
-          <a:ln w="12700">
-            <a:solidFill>
-              <a:srgbClr val="0D9488"/>
-            </a:solidFill>
-            <a:prstDash val="solid"/>
-          </a:ln>
-        </p:spPr>
-      </p:sp>
-      <p:sp>
-        <p:nvSpPr>
-          <p:cNvPr id="36" name="Text 34"/>
-          <p:cNvSpPr/>
-          <p:nvPr/>
-        </p:nvSpPr>
-        <p:spPr>
-          <a:xfrm>
-            <a:off x="5230368" y="3364992"/>
-            <a:ext cx="1554480" cy="475488"/>
-          </a:xfrm>
-          <a:prstGeom prst="rect">
-            <a:avLst/>
-          </a:prstGeom>
-          <a:noFill/>
-          <a:ln/>
-        </p:spPr>
-        <p:txBody>
-          <a:bodyPr wrap="square" lIns="0" tIns="0" rIns="0" bIns="0" rtlCol="0" anchor="ctr"/>
-          <a:lstStyle/>
-          <a:p>
-            <a:pPr algn="ctr" indent="0" marL="0">
-              <a:buNone/>
-            </a:pPr>
-            <a:r>
-              <a:rPr lang="en-US" sz="1400" b="1" dirty="0">
-                <a:solidFill>
-                  <a:srgbClr val="0D9488"/>
-                </a:solidFill>
-                <a:latin typeface="Trebuchet MS" pitchFamily="34" charset="0"/>
-                <a:ea typeface="Trebuchet MS" pitchFamily="34" charset="-122"/>
-                <a:cs typeface="Trebuchet MS" pitchFamily="34" charset="-120"/>
-              </a:rPr>
-              <a:t>pa</a:t>
-            </a:r>
-            <a:endParaRPr lang="en-US" sz="1400" dirty="0"/>
-          </a:p>
-        </p:txBody>
-      </p:sp>
-      <p:sp>
-        <p:nvSpPr>
-          <p:cNvPr id="37" name="Text 35"/>
-          <p:cNvSpPr/>
-          <p:nvPr/>
-        </p:nvSpPr>
-        <p:spPr>
-          <a:xfrm>
-            <a:off x="6784848" y="3364992"/>
-            <a:ext cx="73152" cy="475488"/>
-          </a:xfrm>
-          <a:prstGeom prst="rect">
-            <a:avLst/>
-          </a:prstGeom>
-          <a:noFill/>
-          <a:ln/>
-        </p:spPr>
-        <p:txBody>
-          <a:bodyPr wrap="square" lIns="0" tIns="0" rIns="0" bIns="0" rtlCol="0" anchor="ctr"/>
-          <a:lstStyle/>
-          <a:p>
-            <a:pPr algn="ctr" indent="0" marL="0">
-              <a:buNone/>
-            </a:pPr>
-            <a:r>
-              <a:rPr lang="en-US" sz="1600" b="1" dirty="0">
-                <a:solidFill>
-                  <a:srgbClr val="0D9488"/>
-                </a:solidFill>
-                <a:latin typeface="Trebuchet MS" pitchFamily="34" charset="0"/>
-                <a:ea typeface="Trebuchet MS" pitchFamily="34" charset="-122"/>
-                <a:cs typeface="Trebuchet MS" pitchFamily="34" charset="-120"/>
-              </a:rPr>
-              <a:t>·</a:t>
-            </a:r>
-            <a:endParaRPr lang="en-US" sz="1600" dirty="0"/>
-          </a:p>
-        </p:txBody>
-      </p:sp>
-      <p:sp>
-        <p:nvSpPr>
-          <p:cNvPr id="38" name="Shape 36"/>
-          <p:cNvSpPr/>
-          <p:nvPr/>
-        </p:nvSpPr>
-        <p:spPr>
-          <a:xfrm>
-            <a:off x="6858000" y="3364992"/>
-            <a:ext cx="1554480" cy="475488"/>
-          </a:xfrm>
-          <a:prstGeom prst="rect">
-            <a:avLst>
-              <a:gd name="adj" fmla="val 9615"/>
-            </a:avLst>
-          </a:prstGeom>
-          <a:solidFill>
-            <a:srgbClr val="FFFFFF"/>
-          </a:solidFill>
-          <a:ln w="12700">
-            <a:solidFill>
-              <a:srgbClr val="0D9488"/>
-            </a:solidFill>
-            <a:prstDash val="solid"/>
-          </a:ln>
-        </p:spPr>
-      </p:sp>
-      <p:sp>
-        <p:nvSpPr>
-          <p:cNvPr id="39" name="Text 37"/>
-          <p:cNvSpPr/>
-          <p:nvPr/>
-        </p:nvSpPr>
-        <p:spPr>
-          <a:xfrm>
-            <a:off x="6858000" y="3364992"/>
-            <a:ext cx="1554480" cy="475488"/>
-          </a:xfrm>
-          <a:prstGeom prst="rect">
-            <a:avLst/>
-          </a:prstGeom>
-          <a:noFill/>
-          <a:ln/>
-        </p:spPr>
-        <p:txBody>
-          <a:bodyPr wrap="square" lIns="0" tIns="0" rIns="0" bIns="0" rtlCol="0" anchor="ctr"/>
-          <a:lstStyle/>
-          <a:p>
-            <a:pPr algn="ctr" indent="0" marL="0">
-              <a:buNone/>
-            </a:pPr>
-            <a:r>
-              <a:rPr lang="en-US" sz="1400" b="1" dirty="0">
-                <a:solidFill>
-                  <a:srgbClr val="0D9488"/>
-                </a:solidFill>
-                <a:latin typeface="Trebuchet MS" pitchFamily="34" charset="0"/>
-                <a:ea typeface="Trebuchet MS" pitchFamily="34" charset="-122"/>
-                <a:cs typeface="Trebuchet MS" pitchFamily="34" charset="-120"/>
-              </a:rPr>
-              <a:t>ble</a:t>
-            </a:r>
-            <a:endParaRPr lang="en-US" sz="1400" dirty="0"/>
-          </a:p>
-        </p:txBody>
-      </p:sp>
-      <p:sp>
-        <p:nvSpPr>
-          <p:cNvPr id="40" name="Shape 38"/>
-          <p:cNvSpPr/>
-          <p:nvPr/>
-        </p:nvSpPr>
-        <p:spPr>
-          <a:xfrm>
-            <a:off x="365760" y="4096512"/>
-            <a:ext cx="1371600" cy="804672"/>
-          </a:xfrm>
-          <a:prstGeom prst="rect">
-            <a:avLst>
-              <a:gd name="adj" fmla="val 6818"/>
-            </a:avLst>
-          </a:prstGeom>
-          <a:solidFill>
-            <a:srgbClr val="E2E8F0"/>
-          </a:solidFill>
-          <a:ln w="12700">
-            <a:solidFill>
-              <a:srgbClr val="E2E8F0"/>
-            </a:solidFill>
-            <a:prstDash val="solid"/>
-          </a:ln>
-        </p:spPr>
-      </p:sp>
-      <p:sp>
-        <p:nvSpPr>
-          <p:cNvPr id="41" name="Text 39"/>
-          <p:cNvSpPr/>
-          <p:nvPr/>
-        </p:nvSpPr>
-        <p:spPr>
-          <a:xfrm>
-            <a:off x="365760" y="4096512"/>
-            <a:ext cx="1371600" cy="804672"/>
-          </a:xfrm>
-          <a:prstGeom prst="rect">
-            <a:avLst/>
-          </a:prstGeom>
-          <a:noFill/>
-          <a:ln/>
-        </p:spPr>
-        <p:txBody>
-          <a:bodyPr wrap="square" lIns="0" tIns="0" rIns="0" bIns="0" rtlCol="0" anchor="ctr"/>
-          <a:lstStyle/>
-          <a:p>
-            <a:pPr algn="ctr" indent="0" marL="0">
-              <a:buNone/>
-            </a:pPr>
-            <a:r>
-              <a:rPr lang="en-US" sz="1100" b="1" dirty="0">
-                <a:solidFill>
-                  <a:srgbClr val="475569"/>
-                </a:solidFill>
-                <a:latin typeface="Trebuchet MS" pitchFamily="34" charset="0"/>
-                <a:ea typeface="Trebuchet MS" pitchFamily="34" charset="-122"/>
-                <a:cs typeface="Trebuchet MS" pitchFamily="34" charset="-120"/>
-              </a:rPr>
-              <a:t>Phonemes</a:t>
-            </a:r>
-            <a:endParaRPr lang="en-US" sz="1100" dirty="0"/>
-          </a:p>
-        </p:txBody>
-      </p:sp>
-      <p:sp>
-        <p:nvSpPr>
-          <p:cNvPr id="42" name="Shape 40"/>
-          <p:cNvSpPr/>
-          <p:nvPr/>
-        </p:nvSpPr>
-        <p:spPr>
-          <a:xfrm>
-            <a:off x="1874520" y="4096512"/>
-            <a:ext cx="6903720" cy="658368"/>
-          </a:xfrm>
-          <a:prstGeom prst="rect">
-            <a:avLst>
-              <a:gd name="adj" fmla="val 8333"/>
-            </a:avLst>
-          </a:prstGeom>
-          <a:solidFill>
-            <a:srgbClr val="FCE7F3"/>
-          </a:solidFill>
-          <a:ln w="12700">
-            <a:solidFill>
-              <a:srgbClr val="DB2777"/>
-            </a:solidFill>
-            <a:prstDash val="solid"/>
-          </a:ln>
-        </p:spPr>
-      </p:sp>
-      <p:sp>
-        <p:nvSpPr>
-          <p:cNvPr id="43" name="Shape 41"/>
-          <p:cNvSpPr/>
-          <p:nvPr/>
-        </p:nvSpPr>
-        <p:spPr>
-          <a:xfrm>
-            <a:off x="1951330" y="4169664"/>
-            <a:ext cx="676656" cy="475488"/>
-          </a:xfrm>
-          <a:prstGeom prst="rect">
-            <a:avLst>
-              <a:gd name="adj" fmla="val 7692"/>
-            </a:avLst>
-          </a:prstGeom>
-          <a:solidFill>
-            <a:srgbClr val="FFFFFF"/>
-          </a:solidFill>
-          <a:ln w="12700">
-            <a:solidFill>
-              <a:srgbClr val="DB2777"/>
-            </a:solidFill>
-            <a:prstDash val="solid"/>
-          </a:ln>
-        </p:spPr>
-      </p:sp>
-      <p:sp>
-        <p:nvSpPr>
-          <p:cNvPr id="44" name="Text 42"/>
-          <p:cNvSpPr/>
-          <p:nvPr/>
-        </p:nvSpPr>
-        <p:spPr>
-          <a:xfrm>
-            <a:off x="1951330" y="4169664"/>
-            <a:ext cx="676656" cy="475488"/>
-          </a:xfrm>
-          <a:prstGeom prst="rect">
-            <a:avLst/>
-          </a:prstGeom>
-          <a:noFill/>
-          <a:ln/>
-        </p:spPr>
-        <p:txBody>
-          <a:bodyPr wrap="square" lIns="0" tIns="0" rIns="0" bIns="0" rtlCol="0" anchor="ctr"/>
-          <a:lstStyle/>
-          <a:p>
-            <a:pPr algn="ctr" indent="0" marL="0">
-              <a:buNone/>
-            </a:pPr>
-            <a:r>
-              <a:rPr lang="en-US" sz="900" b="1" dirty="0">
-                <a:solidFill>
-                  <a:srgbClr val="9D174D"/>
-                </a:solidFill>
-                <a:latin typeface="Trebuchet MS" pitchFamily="34" charset="0"/>
-                <a:ea typeface="Trebuchet MS" pitchFamily="34" charset="-122"/>
-                <a:cs typeface="Trebuchet MS" pitchFamily="34" charset="-120"/>
-              </a:rPr>
-              <a:t>u</a:t>
-            </a:r>
-            <a:endParaRPr lang="en-US" sz="900" dirty="0"/>
-          </a:p>
-        </p:txBody>
-      </p:sp>
-      <p:sp>
-        <p:nvSpPr>
-          <p:cNvPr id="45" name="Shape 43"/>
-          <p:cNvSpPr/>
-          <p:nvPr/>
-        </p:nvSpPr>
-        <p:spPr>
-          <a:xfrm>
-            <a:off x="2677363" y="4169664"/>
-            <a:ext cx="676656" cy="475488"/>
-          </a:xfrm>
-          <a:prstGeom prst="rect">
-            <a:avLst>
-              <a:gd name="adj" fmla="val 7692"/>
-            </a:avLst>
-          </a:prstGeom>
-          <a:solidFill>
-            <a:srgbClr val="FFFFFF"/>
-          </a:solidFill>
-          <a:ln w="12700">
-            <a:solidFill>
-              <a:srgbClr val="DB2777"/>
-            </a:solidFill>
-            <a:prstDash val="solid"/>
-          </a:ln>
-        </p:spPr>
-      </p:sp>
-      <p:sp>
-        <p:nvSpPr>
-          <p:cNvPr id="46" name="Text 44"/>
-          <p:cNvSpPr/>
-          <p:nvPr/>
-        </p:nvSpPr>
-        <p:spPr>
-          <a:xfrm>
-            <a:off x="2677363" y="4169664"/>
-            <a:ext cx="676656" cy="475488"/>
-          </a:xfrm>
-          <a:prstGeom prst="rect">
-            <a:avLst/>
-          </a:prstGeom>
-          <a:noFill/>
-          <a:ln/>
-        </p:spPr>
-        <p:txBody>
-          <a:bodyPr wrap="square" lIns="0" tIns="0" rIns="0" bIns="0" rtlCol="0" anchor="ctr"/>
-          <a:lstStyle/>
-          <a:p>
-            <a:pPr algn="ctr" indent="0" marL="0">
-              <a:buNone/>
-            </a:pPr>
-            <a:r>
-              <a:rPr lang="en-US" sz="900" b="1" dirty="0">
-                <a:solidFill>
-                  <a:srgbClr val="9D174D"/>
-                </a:solidFill>
-                <a:latin typeface="Trebuchet MS" pitchFamily="34" charset="0"/>
-                <a:ea typeface="Trebuchet MS" pitchFamily="34" charset="-122"/>
-                <a:cs typeface="Trebuchet MS" pitchFamily="34" charset="-120"/>
-              </a:rPr>
-              <a:t>n</a:t>
-            </a:r>
-            <a:endParaRPr lang="en-US" sz="900" dirty="0"/>
-          </a:p>
-        </p:txBody>
-      </p:sp>
-      <p:sp>
-        <p:nvSpPr>
-          <p:cNvPr id="47" name="Shape 45"/>
-          <p:cNvSpPr/>
-          <p:nvPr/>
-        </p:nvSpPr>
-        <p:spPr>
-          <a:xfrm>
-            <a:off x="3403397" y="4169664"/>
-            <a:ext cx="676656" cy="475488"/>
-          </a:xfrm>
-          <a:prstGeom prst="rect">
-            <a:avLst>
-              <a:gd name="adj" fmla="val 7692"/>
-            </a:avLst>
-          </a:prstGeom>
-          <a:solidFill>
-            <a:srgbClr val="FFFFFF"/>
-          </a:solidFill>
-          <a:ln w="12700">
-            <a:solidFill>
-              <a:srgbClr val="DB2777"/>
-            </a:solidFill>
-            <a:prstDash val="solid"/>
-          </a:ln>
-        </p:spPr>
-      </p:sp>
-      <p:sp>
-        <p:nvSpPr>
-          <p:cNvPr id="48" name="Text 46"/>
-          <p:cNvSpPr/>
-          <p:nvPr/>
-        </p:nvSpPr>
-        <p:spPr>
-          <a:xfrm>
-            <a:off x="3403397" y="4169664"/>
-            <a:ext cx="676656" cy="475488"/>
-          </a:xfrm>
-          <a:prstGeom prst="rect">
-            <a:avLst/>
-          </a:prstGeom>
-          <a:noFill/>
-          <a:ln/>
-        </p:spPr>
-        <p:txBody>
-          <a:bodyPr wrap="square" lIns="0" tIns="0" rIns="0" bIns="0" rtlCol="0" anchor="ctr"/>
-          <a:lstStyle/>
-          <a:p>
-            <a:pPr algn="ctr" indent="0" marL="0">
-              <a:buNone/>
-            </a:pPr>
-            <a:r>
-              <a:rPr lang="en-US" sz="900" b="1" dirty="0">
-                <a:solidFill>
-                  <a:srgbClr val="9D174D"/>
-                </a:solidFill>
-                <a:latin typeface="Trebuchet MS" pitchFamily="34" charset="0"/>
-                <a:ea typeface="Trebuchet MS" pitchFamily="34" charset="-122"/>
-                <a:cs typeface="Trebuchet MS" pitchFamily="34" charset="-120"/>
-              </a:rPr>
-              <a:t>s</a:t>
-            </a:r>
-            <a:endParaRPr lang="en-US" sz="900" dirty="0"/>
-          </a:p>
-        </p:txBody>
-      </p:sp>
-      <p:sp>
-        <p:nvSpPr>
-          <p:cNvPr id="49" name="Shape 47"/>
-          <p:cNvSpPr/>
-          <p:nvPr/>
-        </p:nvSpPr>
-        <p:spPr>
-          <a:xfrm>
-            <a:off x="4129430" y="4169664"/>
-            <a:ext cx="676656" cy="475488"/>
-          </a:xfrm>
-          <a:prstGeom prst="rect">
-            <a:avLst>
-              <a:gd name="adj" fmla="val 7692"/>
-            </a:avLst>
-          </a:prstGeom>
-          <a:solidFill>
-            <a:srgbClr val="FFFFFF"/>
-          </a:solidFill>
-          <a:ln w="12700">
-            <a:solidFill>
-              <a:srgbClr val="DB2777"/>
-            </a:solidFill>
-            <a:prstDash val="solid"/>
-          </a:ln>
-        </p:spPr>
-      </p:sp>
-      <p:sp>
-        <p:nvSpPr>
-          <p:cNvPr id="50" name="Text 48"/>
-          <p:cNvSpPr/>
-          <p:nvPr/>
-        </p:nvSpPr>
-        <p:spPr>
-          <a:xfrm>
-            <a:off x="4129430" y="4169664"/>
-            <a:ext cx="676656" cy="475488"/>
-          </a:xfrm>
-          <a:prstGeom prst="rect">
-            <a:avLst/>
-          </a:prstGeom>
-          <a:noFill/>
-          <a:ln/>
-        </p:spPr>
-        <p:txBody>
-          <a:bodyPr wrap="square" lIns="0" tIns="0" rIns="0" bIns="0" rtlCol="0" anchor="ctr"/>
-          <a:lstStyle/>
-          <a:p>
-            <a:pPr algn="ctr" indent="0" marL="0">
-              <a:buNone/>
-            </a:pPr>
-            <a:r>
-              <a:rPr lang="en-US" sz="900" b="1" dirty="0">
-                <a:solidFill>
-                  <a:srgbClr val="9D174D"/>
-                </a:solidFill>
-                <a:latin typeface="Trebuchet MS" pitchFamily="34" charset="0"/>
-                <a:ea typeface="Trebuchet MS" pitchFamily="34" charset="-122"/>
-                <a:cs typeface="Trebuchet MS" pitchFamily="34" charset="-120"/>
-              </a:rPr>
               <a:t>t</a:t>
-            </a:r>
-            <a:endParaRPr lang="en-US" sz="900" dirty="0"/>
-          </a:p>
-        </p:txBody>
-      </p:sp>
-      <p:sp>
-        <p:nvSpPr>
-          <p:cNvPr id="51" name="Shape 49"/>
-          <p:cNvSpPr/>
-          <p:nvPr/>
-        </p:nvSpPr>
-        <p:spPr>
-          <a:xfrm>
-            <a:off x="4855464" y="4169664"/>
-            <a:ext cx="676656" cy="475488"/>
-          </a:xfrm>
-          <a:prstGeom prst="rect">
-            <a:avLst>
-              <a:gd name="adj" fmla="val 7692"/>
-            </a:avLst>
-          </a:prstGeom>
-          <a:solidFill>
-            <a:srgbClr val="FFFFFF"/>
-          </a:solidFill>
-          <a:ln w="12700">
-            <a:solidFill>
-              <a:srgbClr val="DB2777"/>
-            </a:solidFill>
-            <a:prstDash val="solid"/>
-          </a:ln>
-        </p:spPr>
-      </p:sp>
-      <p:sp>
-        <p:nvSpPr>
-          <p:cNvPr id="52" name="Text 50"/>
-          <p:cNvSpPr/>
-          <p:nvPr/>
-        </p:nvSpPr>
-        <p:spPr>
-          <a:xfrm>
-            <a:off x="4855464" y="4169664"/>
-            <a:ext cx="676656" cy="475488"/>
-          </a:xfrm>
-          <a:prstGeom prst="rect">
-            <a:avLst/>
-          </a:prstGeom>
-          <a:noFill/>
-          <a:ln/>
-        </p:spPr>
-        <p:txBody>
-          <a:bodyPr wrap="square" lIns="0" tIns="0" rIns="0" bIns="0" rtlCol="0" anchor="ctr"/>
-          <a:lstStyle/>
-          <a:p>
-            <a:pPr algn="ctr" indent="0" marL="0">
-              <a:buNone/>
-            </a:pPr>
-            <a:r>
-              <a:rPr lang="en-US" sz="900" b="1" dirty="0">
-                <a:solidFill>
-                  <a:srgbClr val="9D174D"/>
-                </a:solidFill>
-                <a:latin typeface="Trebuchet MS" pitchFamily="34" charset="0"/>
-                <a:ea typeface="Trebuchet MS" pitchFamily="34" charset="-122"/>
-                <a:cs typeface="Trebuchet MS" pitchFamily="34" charset="-120"/>
-              </a:rPr>
-              <a:t>o</a:t>
-            </a:r>
-            <a:endParaRPr lang="en-US" sz="900" dirty="0"/>
-          </a:p>
-        </p:txBody>
-      </p:sp>
-      <p:sp>
-        <p:nvSpPr>
-          <p:cNvPr id="53" name="Shape 51"/>
-          <p:cNvSpPr/>
-          <p:nvPr/>
-        </p:nvSpPr>
-        <p:spPr>
-          <a:xfrm>
-            <a:off x="5581498" y="4169664"/>
-            <a:ext cx="676656" cy="475488"/>
-          </a:xfrm>
-          <a:prstGeom prst="rect">
-            <a:avLst>
-              <a:gd name="adj" fmla="val 7692"/>
-            </a:avLst>
-          </a:prstGeom>
-          <a:solidFill>
-            <a:srgbClr val="FFFFFF"/>
-          </a:solidFill>
-          <a:ln w="12700">
-            <a:solidFill>
-              <a:srgbClr val="DB2777"/>
-            </a:solidFill>
-            <a:prstDash val="solid"/>
-          </a:ln>
-        </p:spPr>
-      </p:sp>
-      <p:sp>
-        <p:nvSpPr>
-          <p:cNvPr id="54" name="Text 52"/>
-          <p:cNvSpPr/>
-          <p:nvPr/>
-        </p:nvSpPr>
-        <p:spPr>
-          <a:xfrm>
-            <a:off x="5581498" y="4169664"/>
-            <a:ext cx="676656" cy="475488"/>
-          </a:xfrm>
-          <a:prstGeom prst="rect">
-            <a:avLst/>
-          </a:prstGeom>
-          <a:noFill/>
-          <a:ln/>
-        </p:spPr>
-        <p:txBody>
-          <a:bodyPr wrap="square" lIns="0" tIns="0" rIns="0" bIns="0" rtlCol="0" anchor="ctr"/>
-          <a:lstStyle/>
-          <a:p>
-            <a:pPr algn="ctr" indent="0" marL="0">
-              <a:buNone/>
-            </a:pPr>
-            <a:r>
-              <a:rPr lang="en-US" sz="900" b="1" dirty="0">
-                <a:solidFill>
-                  <a:srgbClr val="9D174D"/>
-                </a:solidFill>
-                <a:latin typeface="Trebuchet MS" pitchFamily="34" charset="0"/>
-                <a:ea typeface="Trebuchet MS" pitchFamily="34" charset="-122"/>
-                <a:cs typeface="Trebuchet MS" pitchFamily="34" charset="-120"/>
-              </a:rPr>
-              <a:t>pp</a:t>
-            </a:r>
-            <a:endParaRPr lang="en-US" sz="900" dirty="0"/>
-          </a:p>
-        </p:txBody>
-      </p:sp>
-      <p:sp>
-        <p:nvSpPr>
-          <p:cNvPr id="55" name="Shape 53"/>
-          <p:cNvSpPr/>
-          <p:nvPr/>
-        </p:nvSpPr>
-        <p:spPr>
-          <a:xfrm>
-            <a:off x="6307531" y="4169664"/>
-            <a:ext cx="676656" cy="475488"/>
-          </a:xfrm>
-          <a:prstGeom prst="rect">
-            <a:avLst>
-              <a:gd name="adj" fmla="val 7692"/>
-            </a:avLst>
-          </a:prstGeom>
-          <a:solidFill>
-            <a:srgbClr val="FFFFFF"/>
-          </a:solidFill>
-          <a:ln w="12700">
-            <a:solidFill>
-              <a:srgbClr val="DB2777"/>
-            </a:solidFill>
-            <a:prstDash val="solid"/>
-          </a:ln>
-        </p:spPr>
-      </p:sp>
-      <p:sp>
-        <p:nvSpPr>
-          <p:cNvPr id="56" name="Text 54"/>
-          <p:cNvSpPr/>
-          <p:nvPr/>
-        </p:nvSpPr>
-        <p:spPr>
-          <a:xfrm>
-            <a:off x="6307531" y="4169664"/>
-            <a:ext cx="676656" cy="475488"/>
-          </a:xfrm>
-          <a:prstGeom prst="rect">
-            <a:avLst/>
-          </a:prstGeom>
-          <a:noFill/>
-          <a:ln/>
-        </p:spPr>
-        <p:txBody>
-          <a:bodyPr wrap="square" lIns="0" tIns="0" rIns="0" bIns="0" rtlCol="0" anchor="ctr"/>
-          <a:lstStyle/>
-          <a:p>
-            <a:pPr algn="ctr" indent="0" marL="0">
-              <a:buNone/>
-            </a:pPr>
-            <a:r>
-              <a:rPr lang="en-US" sz="900" b="1" dirty="0">
-                <a:solidFill>
-                  <a:srgbClr val="9D174D"/>
-                </a:solidFill>
-                <a:latin typeface="Trebuchet MS" pitchFamily="34" charset="0"/>
-                <a:ea typeface="Trebuchet MS" pitchFamily="34" charset="-122"/>
-                <a:cs typeface="Trebuchet MS" pitchFamily="34" charset="-120"/>
-              </a:rPr>
-              <a:t>a</a:t>
-            </a:r>
-            <a:endParaRPr lang="en-US" sz="900" dirty="0"/>
-          </a:p>
-        </p:txBody>
-      </p:sp>
-      <p:sp>
-        <p:nvSpPr>
-          <p:cNvPr id="57" name="Shape 55"/>
-          <p:cNvSpPr/>
-          <p:nvPr/>
-        </p:nvSpPr>
-        <p:spPr>
-          <a:xfrm>
-            <a:off x="7033565" y="4169664"/>
-            <a:ext cx="676656" cy="475488"/>
-          </a:xfrm>
-          <a:prstGeom prst="rect">
-            <a:avLst>
-              <a:gd name="adj" fmla="val 7692"/>
-            </a:avLst>
-          </a:prstGeom>
-          <a:solidFill>
-            <a:srgbClr val="FFFFFF"/>
-          </a:solidFill>
-          <a:ln w="12700">
-            <a:solidFill>
-              <a:srgbClr val="DB2777"/>
-            </a:solidFill>
-            <a:prstDash val="solid"/>
-          </a:ln>
-        </p:spPr>
-      </p:sp>
-      <p:sp>
-        <p:nvSpPr>
-          <p:cNvPr id="58" name="Text 56"/>
-          <p:cNvSpPr/>
-          <p:nvPr/>
-        </p:nvSpPr>
-        <p:spPr>
-          <a:xfrm>
-            <a:off x="7033565" y="4169664"/>
-            <a:ext cx="676656" cy="475488"/>
-          </a:xfrm>
-          <a:prstGeom prst="rect">
-            <a:avLst/>
-          </a:prstGeom>
-          <a:noFill/>
-          <a:ln/>
-        </p:spPr>
-        <p:txBody>
-          <a:bodyPr wrap="square" lIns="0" tIns="0" rIns="0" bIns="0" rtlCol="0" anchor="ctr"/>
-          <a:lstStyle/>
-          <a:p>
-            <a:pPr algn="ctr" indent="0" marL="0">
-              <a:buNone/>
-            </a:pPr>
-            <a:r>
-              <a:rPr lang="en-US" sz="900" b="1" dirty="0">
-                <a:solidFill>
-                  <a:srgbClr val="9D174D"/>
-                </a:solidFill>
-                <a:latin typeface="Trebuchet MS" pitchFamily="34" charset="0"/>
-                <a:ea typeface="Trebuchet MS" pitchFamily="34" charset="-122"/>
-                <a:cs typeface="Trebuchet MS" pitchFamily="34" charset="-120"/>
-              </a:rPr>
-              <a:t>b</a:t>
-            </a:r>
-            <a:endParaRPr lang="en-US" sz="900" dirty="0"/>
-          </a:p>
-        </p:txBody>
-      </p:sp>
-      <p:sp>
-        <p:nvSpPr>
-          <p:cNvPr id="59" name="Shape 57"/>
-          <p:cNvSpPr/>
-          <p:nvPr/>
-        </p:nvSpPr>
-        <p:spPr>
-          <a:xfrm>
-            <a:off x="7759598" y="4169664"/>
-            <a:ext cx="676656" cy="475488"/>
-          </a:xfrm>
-          <a:prstGeom prst="rect">
-            <a:avLst>
-              <a:gd name="adj" fmla="val 7692"/>
-            </a:avLst>
-          </a:prstGeom>
-          <a:solidFill>
-            <a:srgbClr val="FFFFFF"/>
-          </a:solidFill>
-          <a:ln w="12700">
-            <a:solidFill>
-              <a:srgbClr val="DB2777"/>
-            </a:solidFill>
-            <a:prstDash val="solid"/>
-          </a:ln>
-        </p:spPr>
-      </p:sp>
-      <p:sp>
-        <p:nvSpPr>
-          <p:cNvPr id="60" name="Text 58"/>
-          <p:cNvSpPr/>
-          <p:nvPr/>
-        </p:nvSpPr>
-        <p:spPr>
-          <a:xfrm>
-            <a:off x="7759598" y="4169664"/>
-            <a:ext cx="676656" cy="475488"/>
-          </a:xfrm>
-          <a:prstGeom prst="rect">
-            <a:avLst/>
-          </a:prstGeom>
-          <a:noFill/>
-          <a:ln/>
-        </p:spPr>
-        <p:txBody>
-          <a:bodyPr wrap="square" lIns="0" tIns="0" rIns="0" bIns="0" rtlCol="0" anchor="ctr"/>
-          <a:lstStyle/>
-          <a:p>
-            <a:pPr algn="ctr" indent="0" marL="0">
-              <a:buNone/>
-            </a:pPr>
-            <a:r>
-              <a:rPr lang="en-US" sz="900" b="1" dirty="0">
-                <a:solidFill>
-                  <a:srgbClr val="9D174D"/>
-                </a:solidFill>
-                <a:latin typeface="Trebuchet MS" pitchFamily="34" charset="0"/>
-                <a:ea typeface="Trebuchet MS" pitchFamily="34" charset="-122"/>
-                <a:cs typeface="Trebuchet MS" pitchFamily="34" charset="-120"/>
-              </a:rPr>
-              <a:t>le</a:t>
             </a:r>
             <a:endParaRPr lang="en-US" sz="900" dirty="0"/>
           </a:p>
@@ -34206,7 +33267,7 @@
                 <a:ea typeface="Calibri" pitchFamily="34" charset="-122"/>
                 <a:cs typeface="Calibri" pitchFamily="34" charset="-120"/>
               </a:rPr>
-              <a:t>Word Labs  •  wordlabs.app  •  Root: 'stop' = cease, block, or halt</a:t>
+              <a:t>Word Labs  •  wordlabs.app  •  Root: 'stop' = cease, halt, block movement</a:t>
             </a:r>
             <a:endParaRPr lang="en-US" sz="800" dirty="0"/>
           </a:p>
@@ -35375,7 +34436,7 @@
                 <a:ea typeface="Calibri" pitchFamily="34" charset="-122"/>
                 <a:cs typeface="Calibri" pitchFamily="34" charset="-120"/>
               </a:rPr>
-              <a:t>Word Labs  •  wordlabs.app  •  Root: 'stop' = cease, block, or halt</a:t>
+              <a:t>Word Labs  •  wordlabs.app  •  Root: 'stop' = cease, halt, block movement</a:t>
             </a:r>
             <a:endParaRPr lang="en-US" sz="800" dirty="0"/>
           </a:p>
@@ -35804,7 +34865,7 @@
                 <a:ea typeface="Trebuchet MS" pitchFamily="34" charset="-122"/>
                 <a:cs typeface="Trebuchet MS" pitchFamily="34" charset="-120"/>
               </a:rPr>
-              <a:t>-ed</a:t>
+              <a:t>-per</a:t>
             </a:r>
             <a:endParaRPr lang="en-US" sz="1300" dirty="0"/>
           </a:p>
@@ -35957,7 +35018,7 @@
                 <a:ea typeface="Trebuchet MS" pitchFamily="34" charset="-122"/>
                 <a:cs typeface="Trebuchet MS" pitchFamily="34" charset="-120"/>
               </a:rPr>
-              <a:t>-ing</a:t>
+              <a:t>-page</a:t>
             </a:r>
             <a:endParaRPr lang="en-US" sz="1300" dirty="0"/>
           </a:p>
@@ -36021,7 +35082,7 @@
                 <a:ea typeface="Trebuchet MS" pitchFamily="34" charset="-122"/>
                 <a:cs typeface="Trebuchet MS" pitchFamily="34" charset="-120"/>
               </a:rPr>
-              <a:t>over-</a:t>
+              <a:t>door-</a:t>
             </a:r>
             <a:endParaRPr lang="en-US" sz="1300" dirty="0"/>
           </a:p>
@@ -36110,7 +35171,7 @@
                 <a:ea typeface="Trebuchet MS" pitchFamily="34" charset="-122"/>
                 <a:cs typeface="Trebuchet MS" pitchFamily="34" charset="-120"/>
               </a:rPr>
-              <a:t>-per</a:t>
+              <a:t>-light</a:t>
             </a:r>
             <a:endParaRPr lang="en-US" sz="1300" dirty="0"/>
           </a:p>
@@ -36174,7 +35235,7 @@
                 <a:ea typeface="Trebuchet MS" pitchFamily="34" charset="-122"/>
                 <a:cs typeface="Trebuchet MS" pitchFamily="34" charset="-120"/>
               </a:rPr>
-              <a:t>re-</a:t>
+              <a:t>pit-</a:t>
             </a:r>
             <a:endParaRPr lang="en-US" sz="1300" dirty="0"/>
           </a:p>
@@ -36263,7 +35324,7 @@
                 <a:ea typeface="Trebuchet MS" pitchFamily="34" charset="-122"/>
                 <a:cs typeface="Trebuchet MS" pitchFamily="34" charset="-120"/>
               </a:rPr>
-              <a:t>-page</a:t>
+              <a:t>-watch</a:t>
             </a:r>
             <a:endParaRPr lang="en-US" sz="1300" dirty="0"/>
           </a:p>
@@ -36327,7 +35388,7 @@
                 <a:ea typeface="Trebuchet MS" pitchFamily="34" charset="-122"/>
                 <a:cs typeface="Trebuchet MS" pitchFamily="34" charset="-120"/>
               </a:rPr>
-              <a:t>door-</a:t>
+              <a:t>re-</a:t>
             </a:r>
             <a:endParaRPr lang="en-US" sz="1300" dirty="0"/>
           </a:p>
@@ -36416,7 +35477,7 @@
                 <a:ea typeface="Trebuchet MS" pitchFamily="34" charset="-122"/>
                 <a:cs typeface="Trebuchet MS" pitchFamily="34" charset="-120"/>
               </a:rPr>
-              <a:t>-light</a:t>
+              <a:t>-over</a:t>
             </a:r>
             <a:endParaRPr lang="en-US" sz="1300" dirty="0"/>
           </a:p>
@@ -36587,7 +35648,7 @@
                 <a:ea typeface="Trebuchet MS" pitchFamily="34" charset="-122"/>
                 <a:cs typeface="Trebuchet MS" pitchFamily="34" charset="-120"/>
               </a:rPr>
-              <a:t>stopped</a:t>
+              <a:t>stoppage</a:t>
             </a:r>
             <a:endParaRPr lang="en-US" sz="1200" dirty="0"/>
           </a:p>
@@ -36653,7 +35714,7 @@
                 <a:ea typeface="Trebuchet MS" pitchFamily="34" charset="-122"/>
                 <a:cs typeface="Trebuchet MS" pitchFamily="34" charset="-120"/>
               </a:rPr>
-              <a:t>stopping</a:t>
+              <a:t>doorstop</a:t>
             </a:r>
             <a:endParaRPr lang="en-US" sz="1200" dirty="0"/>
           </a:p>
@@ -36719,7 +35780,7 @@
                 <a:ea typeface="Trebuchet MS" pitchFamily="34" charset="-122"/>
                 <a:cs typeface="Trebuchet MS" pitchFamily="34" charset="-120"/>
               </a:rPr>
-              <a:t>nonstop</a:t>
+              <a:t>stopwatch</a:t>
             </a:r>
             <a:endParaRPr lang="en-US" sz="1200" dirty="0"/>
           </a:p>
@@ -36785,7 +35846,7 @@
                 <a:ea typeface="Trebuchet MS" pitchFamily="34" charset="-122"/>
                 <a:cs typeface="Trebuchet MS" pitchFamily="34" charset="-120"/>
               </a:rPr>
-              <a:t>stopwatch</a:t>
+              <a:t>nonstop</a:t>
             </a:r>
             <a:endParaRPr lang="en-US" sz="1200" dirty="0"/>
           </a:p>
@@ -36851,7 +35912,7 @@
                 <a:ea typeface="Trebuchet MS" pitchFamily="34" charset="-122"/>
                 <a:cs typeface="Trebuchet MS" pitchFamily="34" charset="-120"/>
               </a:rPr>
-              <a:t>doorstop</a:t>
+              <a:t>pitstop</a:t>
             </a:r>
             <a:endParaRPr lang="en-US" sz="1200" dirty="0"/>
           </a:p>
@@ -36917,7 +35978,7 @@
                 <a:ea typeface="Trebuchet MS" pitchFamily="34" charset="-122"/>
                 <a:cs typeface="Trebuchet MS" pitchFamily="34" charset="-120"/>
               </a:rPr>
-              <a:t>overstep</a:t>
+              <a:t>stoplight</a:t>
             </a:r>
             <a:endParaRPr lang="en-US" sz="1200" dirty="0"/>
           </a:p>
@@ -36983,7 +36044,7 @@
                 <a:ea typeface="Trebuchet MS" pitchFamily="34" charset="-122"/>
                 <a:cs typeface="Trebuchet MS" pitchFamily="34" charset="-120"/>
               </a:rPr>
-              <a:t>stoppage</a:t>
+              <a:t>overstop</a:t>
             </a:r>
             <a:endParaRPr lang="en-US" sz="1200" dirty="0"/>
           </a:p>
@@ -37275,7 +36336,7 @@
                 <a:ea typeface="Calibri" pitchFamily="34" charset="-122"/>
                 <a:cs typeface="Calibri" pitchFamily="34" charset="-120"/>
               </a:rPr>
-              <a:t>Word Labs  •  wordlabs.app  •  Root: 'stop' = cease, block, or halt</a:t>
+              <a:t>Word Labs  •  wordlabs.app  •  Root: 'stop' = cease, halt, block movement</a:t>
             </a:r>
             <a:endParaRPr lang="en-US" sz="800" dirty="0"/>
           </a:p>
@@ -37439,7 +36500,7 @@
                 <a:ea typeface="Calibri" pitchFamily="34" charset="-122"/>
                 <a:cs typeface="Calibri" pitchFamily="34" charset="-120"/>
               </a:rPr>
-              <a:t>The core part of a word carrying its basic meaning. For example, 'stop' means 'cease, block, or halt'.</a:t>
+              <a:t>The core part of a word carrying its basic meaning. For example, 'stop' means 'cease, halt, block movement'.</a:t>
             </a:r>
             <a:endParaRPr lang="en-US" sz="1350" dirty="0"/>
           </a:p>
@@ -38059,7 +37120,7 @@
                 <a:ea typeface="Calibri" pitchFamily="34" charset="-122"/>
                 <a:cs typeface="Calibri" pitchFamily="34" charset="-120"/>
               </a:rPr>
-              <a:t>Word Labs  •  wordlabs.app  •  Root: 'stop' = cease, block, or halt</a:t>
+              <a:t>Word Labs  •  wordlabs.app  •  Root: 'stop' = cease, halt, block movement</a:t>
             </a:r>
             <a:endParaRPr lang="en-US" sz="800" dirty="0"/>
           </a:p>
@@ -38171,7 +37232,7 @@
                 <a:ea typeface="Calibri" pitchFamily="34" charset="-122"/>
                 <a:cs typeface="Calibri" pitchFamily="34" charset="-120"/>
               </a:rPr>
-              <a:t>1.  The word 'nonstop' contains the root 'stop' meaning to halt or cease.</a:t>
+              <a:t>1.  The root 'stop' comes from ancient Greek and means 'to run quickly'.</a:t>
             </a:r>
             <a:endParaRPr lang="en-US" sz="1300" dirty="0"/>
           </a:p>
@@ -38194,11 +37255,11 @@
             </a:avLst>
           </a:prstGeom>
           <a:solidFill>
-            <a:srgbClr val="DCFCE7"/>
-          </a:solidFill>
-          <a:ln w="12700">
-            <a:solidFill>
-              <a:srgbClr val="16A34A"/>
+            <a:srgbClr val="FEE2E2"/>
+          </a:solidFill>
+          <a:ln w="12700">
+            <a:solidFill>
+              <a:srgbClr val="DC2626"/>
             </a:solidFill>
             <a:prstDash val="solid"/>
           </a:ln>
@@ -38231,13 +37292,13 @@
             <a:r>
               <a:rPr lang="en-US" sz="1100" b="1" dirty="0">
                 <a:solidFill>
-                  <a:srgbClr val="16A34A"/>
+                  <a:srgbClr val="DC2626"/>
                 </a:solidFill>
                 <a:latin typeface="Trebuchet MS" pitchFamily="34" charset="0"/>
                 <a:ea typeface="Trebuchet MS" pitchFamily="34" charset="-122"/>
                 <a:cs typeface="Trebuchet MS" pitchFamily="34" charset="-120"/>
               </a:rPr>
-              <a:t>TRUE</a:t>
+              <a:t>FALSE</a:t>
             </a:r>
             <a:endParaRPr lang="en-US" sz="1100" dirty="0"/>
           </a:p>
@@ -38310,7 +37371,7 @@
                 <a:ea typeface="Calibri" pitchFamily="34" charset="-122"/>
                 <a:cs typeface="Calibri" pitchFamily="34" charset="-120"/>
               </a:rPr>
-              <a:t>2.  The prefix 'un-' in 'unstoppable' means 'always' or 'forever'.</a:t>
+              <a:t>2.  'Unstoppable' means something is impossible to halt or block.</a:t>
             </a:r>
             <a:endParaRPr lang="en-US" sz="1300" dirty="0"/>
           </a:p>
@@ -38333,11 +37394,11 @@
             </a:avLst>
           </a:prstGeom>
           <a:solidFill>
-            <a:srgbClr val="FEE2E2"/>
-          </a:solidFill>
-          <a:ln w="12700">
-            <a:solidFill>
-              <a:srgbClr val="DC2626"/>
+            <a:srgbClr val="DCFCE7"/>
+          </a:solidFill>
+          <a:ln w="12700">
+            <a:solidFill>
+              <a:srgbClr val="16A34A"/>
             </a:solidFill>
             <a:prstDash val="solid"/>
           </a:ln>
@@ -38370,13 +37431,13 @@
             <a:r>
               <a:rPr lang="en-US" sz="1100" b="1" dirty="0">
                 <a:solidFill>
-                  <a:srgbClr val="DC2626"/>
+                  <a:srgbClr val="16A34A"/>
                 </a:solidFill>
                 <a:latin typeface="Trebuchet MS" pitchFamily="34" charset="0"/>
                 <a:ea typeface="Trebuchet MS" pitchFamily="34" charset="-122"/>
                 <a:cs typeface="Trebuchet MS" pitchFamily="34" charset="-120"/>
               </a:rPr>
-              <a:t>FALSE</a:t>
+              <a:t>TRUE</a:t>
             </a:r>
             <a:endParaRPr lang="en-US" sz="1100" dirty="0"/>
           </a:p>
@@ -38449,7 +37510,7 @@
                 <a:ea typeface="Calibri" pitchFamily="34" charset="-122"/>
                 <a:cs typeface="Calibri" pitchFamily="34" charset="-120"/>
               </a:rPr>
-              <a:t>3.  A stopwatch is used to measure time because it can start and stop.</a:t>
+              <a:t>3.  The prefix 'non' in 'nonstop' means 'always' or 'forever'.</a:t>
             </a:r>
             <a:endParaRPr lang="en-US" sz="1300" dirty="0"/>
           </a:p>
@@ -38472,11 +37533,11 @@
             </a:avLst>
           </a:prstGeom>
           <a:solidFill>
-            <a:srgbClr val="DCFCE7"/>
-          </a:solidFill>
-          <a:ln w="12700">
-            <a:solidFill>
-              <a:srgbClr val="16A34A"/>
+            <a:srgbClr val="FEE2E2"/>
+          </a:solidFill>
+          <a:ln w="12700">
+            <a:solidFill>
+              <a:srgbClr val="DC2626"/>
             </a:solidFill>
             <a:prstDash val="solid"/>
           </a:ln>
@@ -38509,13 +37570,13 @@
             <a:r>
               <a:rPr lang="en-US" sz="1100" b="1" dirty="0">
                 <a:solidFill>
-                  <a:srgbClr val="16A34A"/>
+                  <a:srgbClr val="DC2626"/>
                 </a:solidFill>
                 <a:latin typeface="Trebuchet MS" pitchFamily="34" charset="0"/>
                 <a:ea typeface="Trebuchet MS" pitchFamily="34" charset="-122"/>
                 <a:cs typeface="Trebuchet MS" pitchFamily="34" charset="-120"/>
               </a:rPr>
-              <a:t>TRUE</a:t>
+              <a:t>FALSE</a:t>
             </a:r>
             <a:endParaRPr lang="en-US" sz="1100" dirty="0"/>
           </a:p>
@@ -38588,7 +37649,7 @@
                 <a:ea typeface="Calibri" pitchFamily="34" charset="-122"/>
                 <a:cs typeface="Calibri" pitchFamily="34" charset="-120"/>
               </a:rPr>
-              <a:t>4.  The word 'stoppage' uses the suffix '-age' to make a noun meaning a state of stopping.</a:t>
+              <a:t>4.  A stopwatch is named with 'stop' because you start and stop it to measure time.</a:t>
             </a:r>
             <a:endParaRPr lang="en-US" sz="1300" dirty="0"/>
           </a:p>
@@ -38727,7 +37788,7 @@
                 <a:ea typeface="Calibri" pitchFamily="34" charset="-122"/>
                 <a:cs typeface="Calibri" pitchFamily="34" charset="-120"/>
               </a:rPr>
-              <a:t>5.  The root 'stop' originally came from ancient Greek and means 'to run'.</a:t>
+              <a:t>5.  The word 'nonstop' contains the root 'stop' meaning to halt or cease.</a:t>
             </a:r>
             <a:endParaRPr lang="en-US" sz="1300" dirty="0"/>
           </a:p>
@@ -38750,11 +37811,11 @@
             </a:avLst>
           </a:prstGeom>
           <a:solidFill>
-            <a:srgbClr val="FEE2E2"/>
-          </a:solidFill>
-          <a:ln w="12700">
-            <a:solidFill>
-              <a:srgbClr val="DC2626"/>
+            <a:srgbClr val="DCFCE7"/>
+          </a:solidFill>
+          <a:ln w="12700">
+            <a:solidFill>
+              <a:srgbClr val="16A34A"/>
             </a:solidFill>
             <a:prstDash val="solid"/>
           </a:ln>
@@ -38787,13 +37848,13 @@
             <a:r>
               <a:rPr lang="en-US" sz="1100" b="1" dirty="0">
                 <a:solidFill>
-                  <a:srgbClr val="DC2626"/>
+                  <a:srgbClr val="16A34A"/>
                 </a:solidFill>
                 <a:latin typeface="Trebuchet MS" pitchFamily="34" charset="0"/>
                 <a:ea typeface="Trebuchet MS" pitchFamily="34" charset="-122"/>
                 <a:cs typeface="Trebuchet MS" pitchFamily="34" charset="-120"/>
               </a:rPr>
-              <a:t>FALSE</a:t>
+              <a:t>TRUE</a:t>
             </a:r>
             <a:endParaRPr lang="en-US" sz="1100" dirty="0"/>
           </a:p>
@@ -39085,7 +38146,7 @@
                 <a:ea typeface="Calibri" pitchFamily="34" charset="-122"/>
                 <a:cs typeface="Calibri" pitchFamily="34" charset="-120"/>
               </a:rPr>
-              <a:t>Word Labs  •  wordlabs.app  •  Root: 'stop' = cease, block, or halt</a:t>
+              <a:t>Word Labs  •  wordlabs.app  •  Root: 'stop' = cease, halt, block movement</a:t>
             </a:r>
             <a:endParaRPr lang="en-US" sz="800" dirty="0"/>
           </a:p>
@@ -39222,7 +38283,7 @@
                 <a:ea typeface="Trebuchet MS" pitchFamily="34" charset="-122"/>
                 <a:cs typeface="Trebuchet MS" pitchFamily="34" charset="-120"/>
               </a:rPr>
-              <a:t>cease, block, or halt</a:t>
+              <a:t>cease, halt, block movement</a:t>
             </a:r>
             <a:endParaRPr lang="en-US" sz="2000" dirty="0"/>
           </a:p>
@@ -39432,7 +38493,7 @@
                 <a:ea typeface="Trebuchet MS" pitchFamily="34" charset="-122"/>
                 <a:cs typeface="Trebuchet MS" pitchFamily="34" charset="-120"/>
               </a:rPr>
-              <a:t>stopped</a:t>
+              <a:t>stoppage</a:t>
             </a:r>
             <a:endParaRPr lang="en-US" sz="1300" dirty="0"/>
           </a:p>
@@ -39498,7 +38559,7 @@
                 <a:ea typeface="Trebuchet MS" pitchFamily="34" charset="-122"/>
                 <a:cs typeface="Trebuchet MS" pitchFamily="34" charset="-120"/>
               </a:rPr>
-              <a:t>stopping</a:t>
+              <a:t>doorstop</a:t>
             </a:r>
             <a:endParaRPr lang="en-US" sz="1300" dirty="0"/>
           </a:p>
@@ -39564,7 +38625,7 @@
                 <a:ea typeface="Trebuchet MS" pitchFamily="34" charset="-122"/>
                 <a:cs typeface="Trebuchet MS" pitchFamily="34" charset="-120"/>
               </a:rPr>
-              <a:t>nonstop</a:t>
+              <a:t>stopwatch</a:t>
             </a:r>
             <a:endParaRPr lang="en-US" sz="1300" dirty="0"/>
           </a:p>
@@ -39630,7 +38691,7 @@
                 <a:ea typeface="Trebuchet MS" pitchFamily="34" charset="-122"/>
                 <a:cs typeface="Trebuchet MS" pitchFamily="34" charset="-120"/>
               </a:rPr>
-              <a:t>stopwatch</a:t>
+              <a:t>nonstop</a:t>
             </a:r>
             <a:endParaRPr lang="en-US" sz="1300" dirty="0"/>
           </a:p>
@@ -39696,7 +38757,7 @@
                 <a:ea typeface="Trebuchet MS" pitchFamily="34" charset="-122"/>
                 <a:cs typeface="Trebuchet MS" pitchFamily="34" charset="-120"/>
               </a:rPr>
-              <a:t>doorstop</a:t>
+              <a:t>pitstop</a:t>
             </a:r>
             <a:endParaRPr lang="en-US" sz="1300" dirty="0"/>
           </a:p>
@@ -39762,7 +38823,7 @@
                 <a:ea typeface="Trebuchet MS" pitchFamily="34" charset="-122"/>
                 <a:cs typeface="Trebuchet MS" pitchFamily="34" charset="-120"/>
               </a:rPr>
-              <a:t>overstep</a:t>
+              <a:t>stoplight</a:t>
             </a:r>
             <a:endParaRPr lang="en-US" sz="1300" dirty="0"/>
           </a:p>
@@ -40054,7 +39115,7 @@
                 <a:ea typeface="Calibri" pitchFamily="34" charset="-122"/>
                 <a:cs typeface="Calibri" pitchFamily="34" charset="-120"/>
               </a:rPr>
-              <a:t>Word Labs  •  wordlabs.app  •  Root: 'stop' = cease, block, or halt</a:t>
+              <a:t>Word Labs  •  wordlabs.app  •  Root: 'stop' = cease, halt, block movement</a:t>
             </a:r>
             <a:endParaRPr lang="en-US" sz="800" dirty="0"/>
           </a:p>
@@ -40483,7 +39544,7 @@
                 <a:ea typeface="Trebuchet MS" pitchFamily="34" charset="-122"/>
                 <a:cs typeface="Trebuchet MS" pitchFamily="34" charset="-120"/>
               </a:rPr>
-              <a:t>-ed</a:t>
+              <a:t>-per</a:t>
             </a:r>
             <a:endParaRPr lang="en-US" sz="1300" dirty="0"/>
           </a:p>
@@ -40636,7 +39697,7 @@
                 <a:ea typeface="Trebuchet MS" pitchFamily="34" charset="-122"/>
                 <a:cs typeface="Trebuchet MS" pitchFamily="34" charset="-120"/>
               </a:rPr>
-              <a:t>-ing</a:t>
+              <a:t>-page</a:t>
             </a:r>
             <a:endParaRPr lang="en-US" sz="1300" dirty="0"/>
           </a:p>
@@ -40700,7 +39761,7 @@
                 <a:ea typeface="Trebuchet MS" pitchFamily="34" charset="-122"/>
                 <a:cs typeface="Trebuchet MS" pitchFamily="34" charset="-120"/>
               </a:rPr>
-              <a:t>over-</a:t>
+              <a:t>door-</a:t>
             </a:r>
             <a:endParaRPr lang="en-US" sz="1300" dirty="0"/>
           </a:p>
@@ -40789,7 +39850,7 @@
                 <a:ea typeface="Trebuchet MS" pitchFamily="34" charset="-122"/>
                 <a:cs typeface="Trebuchet MS" pitchFamily="34" charset="-120"/>
               </a:rPr>
-              <a:t>-per</a:t>
+              <a:t>-light</a:t>
             </a:r>
             <a:endParaRPr lang="en-US" sz="1300" dirty="0"/>
           </a:p>
@@ -40853,7 +39914,7 @@
                 <a:ea typeface="Trebuchet MS" pitchFamily="34" charset="-122"/>
                 <a:cs typeface="Trebuchet MS" pitchFamily="34" charset="-120"/>
               </a:rPr>
-              <a:t>re-</a:t>
+              <a:t>pit-</a:t>
             </a:r>
             <a:endParaRPr lang="en-US" sz="1300" dirty="0"/>
           </a:p>
@@ -40942,7 +40003,7 @@
                 <a:ea typeface="Trebuchet MS" pitchFamily="34" charset="-122"/>
                 <a:cs typeface="Trebuchet MS" pitchFamily="34" charset="-120"/>
               </a:rPr>
-              <a:t>-page</a:t>
+              <a:t>-watch</a:t>
             </a:r>
             <a:endParaRPr lang="en-US" sz="1300" dirty="0"/>
           </a:p>
@@ -41006,7 +40067,7 @@
                 <a:ea typeface="Trebuchet MS" pitchFamily="34" charset="-122"/>
                 <a:cs typeface="Trebuchet MS" pitchFamily="34" charset="-120"/>
               </a:rPr>
-              <a:t>door-</a:t>
+              <a:t>re-</a:t>
             </a:r>
             <a:endParaRPr lang="en-US" sz="1300" dirty="0"/>
           </a:p>
@@ -41095,7 +40156,7 @@
                 <a:ea typeface="Trebuchet MS" pitchFamily="34" charset="-122"/>
                 <a:cs typeface="Trebuchet MS" pitchFamily="34" charset="-120"/>
               </a:rPr>
-              <a:t>-light</a:t>
+              <a:t>-over</a:t>
             </a:r>
             <a:endParaRPr lang="en-US" sz="1300" dirty="0"/>
           </a:p>
@@ -41373,7 +40434,7 @@
         <p:spPr>
           <a:xfrm>
             <a:off x="4325112" y="4178808"/>
-            <a:ext cx="822960" cy="420624"/>
+            <a:ext cx="950976" cy="420624"/>
           </a:xfrm>
           <a:prstGeom prst="rect">
             <a:avLst>
@@ -41407,7 +40468,7 @@
         <p:spPr>
           <a:xfrm>
             <a:off x="4325112" y="4178808"/>
-            <a:ext cx="822960" cy="420624"/>
+            <a:ext cx="950976" cy="420624"/>
           </a:xfrm>
           <a:prstGeom prst="rect">
             <a:avLst/>
@@ -41431,7 +40492,7 @@
                 <a:ea typeface="Trebuchet MS" pitchFamily="34" charset="-122"/>
                 <a:cs typeface="Trebuchet MS" pitchFamily="34" charset="-120"/>
               </a:rPr>
-              <a:t>-ed</a:t>
+              <a:t>-per</a:t>
             </a:r>
             <a:endParaRPr lang="en-US" sz="1300" dirty="0"/>
           </a:p>
@@ -41445,7 +40506,7 @@
         </p:nvSpPr>
         <p:spPr>
           <a:xfrm>
-            <a:off x="5221224" y="4178808"/>
+            <a:off x="5349240" y="4178808"/>
             <a:ext cx="365760" cy="420624"/>
           </a:xfrm>
           <a:prstGeom prst="rect">
@@ -41484,7 +40545,7 @@
         </p:nvSpPr>
         <p:spPr>
           <a:xfrm>
-            <a:off x="5632704" y="4178808"/>
+            <a:off x="5760720" y="4178808"/>
             <a:ext cx="2194560" cy="420624"/>
           </a:xfrm>
           <a:prstGeom prst="rect">
@@ -41511,7 +40572,7 @@
         </p:nvSpPr>
         <p:spPr>
           <a:xfrm>
-            <a:off x="5632704" y="4178808"/>
+            <a:off x="5760720" y="4178808"/>
             <a:ext cx="2194560" cy="420624"/>
           </a:xfrm>
           <a:prstGeom prst="rect">
@@ -41828,7 +40889,7 @@
                 <a:ea typeface="Calibri" pitchFamily="34" charset="-122"/>
                 <a:cs typeface="Calibri" pitchFamily="34" charset="-120"/>
               </a:rPr>
-              <a:t>Word Labs  •  wordlabs.app  •  Root: 'stop' = cease, block, or halt</a:t>
+              <a:t>Word Labs  •  wordlabs.app  •  Root: 'stop' = cease, halt, block movement</a:t>
             </a:r>
             <a:endParaRPr lang="en-US" sz="800" dirty="0"/>
           </a:p>
@@ -42006,7 +41067,7 @@
                 <a:ea typeface="Calibri" pitchFamily="34" charset="-122"/>
                 <a:cs typeface="Calibri" pitchFamily="34" charset="-120"/>
               </a:rPr>
-              <a:t>To go further than what is allowed or expected.</a:t>
+              <a:t>A set of coloured lights at a road crossing that tell drivers when to stop and go.</a:t>
             </a:r>
             <a:endParaRPr lang="en-US" sz="1200" dirty="0"/>
           </a:p>
@@ -42079,7 +41140,7 @@
                 <a:ea typeface="Trebuchet MS" pitchFamily="34" charset="-122"/>
                 <a:cs typeface="Trebuchet MS" pitchFamily="34" charset="-120"/>
               </a:rPr>
-              <a:t>stopped</a:t>
+              <a:t>stoppage</a:t>
             </a:r>
             <a:endParaRPr lang="en-US" sz="1200" dirty="0"/>
           </a:p>
@@ -42145,7 +41206,7 @@
                 <a:ea typeface="Calibri" pitchFamily="34" charset="-122"/>
                 <a:cs typeface="Calibri" pitchFamily="34" charset="-120"/>
               </a:rPr>
-              <a:t>A special clock used to measure exactly how long something takes.</a:t>
+              <a:t>Something that continues without any pauses or breaks, like a nonstop flight.</a:t>
             </a:r>
             <a:endParaRPr lang="en-US" sz="1200" dirty="0"/>
           </a:p>
@@ -42218,7 +41279,7 @@
                 <a:ea typeface="Trebuchet MS" pitchFamily="34" charset="-122"/>
                 <a:cs typeface="Trebuchet MS" pitchFamily="34" charset="-120"/>
               </a:rPr>
-              <a:t>stopping</a:t>
+              <a:t>doorstop</a:t>
             </a:r>
             <a:endParaRPr lang="en-US" sz="1200" dirty="0"/>
           </a:p>
@@ -42284,7 +41345,7 @@
                 <a:ea typeface="Calibri" pitchFamily="34" charset="-122"/>
                 <a:cs typeface="Calibri" pitchFamily="34" charset="-120"/>
               </a:rPr>
-              <a:t>Something that continues without any pauses or breaks.</a:t>
+              <a:t>A special clock you can start and stop to measure exactly how long something takes.</a:t>
             </a:r>
             <a:endParaRPr lang="en-US" sz="1200" dirty="0"/>
           </a:p>
@@ -42357,7 +41418,7 @@
                 <a:ea typeface="Trebuchet MS" pitchFamily="34" charset="-122"/>
                 <a:cs typeface="Trebuchet MS" pitchFamily="34" charset="-120"/>
               </a:rPr>
-              <a:t>nonstop</a:t>
+              <a:t>stopwatch</a:t>
             </a:r>
             <a:endParaRPr lang="en-US" sz="1200" dirty="0"/>
           </a:p>
@@ -42423,7 +41484,7 @@
                 <a:ea typeface="Calibri" pitchFamily="34" charset="-122"/>
                 <a:cs typeface="Calibri" pitchFamily="34" charset="-120"/>
               </a:rPr>
-              <a:t>An object placed against a door to keep it from closing.</a:t>
+              <a:t>A short break during a race for a car to get fuel or repairs, or any quick stop during a trip.</a:t>
             </a:r>
             <a:endParaRPr lang="en-US" sz="1200" dirty="0"/>
           </a:p>
@@ -42496,7 +41557,7 @@
                 <a:ea typeface="Trebuchet MS" pitchFamily="34" charset="-122"/>
                 <a:cs typeface="Trebuchet MS" pitchFamily="34" charset="-120"/>
               </a:rPr>
-              <a:t>stopwatch</a:t>
+              <a:t>nonstop</a:t>
             </a:r>
             <a:endParaRPr lang="en-US" sz="1200" dirty="0"/>
           </a:p>
@@ -42562,7 +41623,7 @@
                 <a:ea typeface="Calibri" pitchFamily="34" charset="-122"/>
                 <a:cs typeface="Calibri" pitchFamily="34" charset="-120"/>
               </a:rPr>
-              <a:t>The act of coming to a halt or making something cease.</a:t>
+              <a:t>An object placed behind a door to keep it from swinging shut.</a:t>
             </a:r>
             <a:endParaRPr lang="en-US" sz="1200" dirty="0"/>
           </a:p>
@@ -42635,7 +41696,7 @@
                 <a:ea typeface="Trebuchet MS" pitchFamily="34" charset="-122"/>
                 <a:cs typeface="Trebuchet MS" pitchFamily="34" charset="-120"/>
               </a:rPr>
-              <a:t>doorstop</a:t>
+              <a:t>pitstop</a:t>
             </a:r>
             <a:endParaRPr lang="en-US" sz="1200" dirty="0"/>
           </a:p>
@@ -42701,7 +41762,7 @@
                 <a:ea typeface="Calibri" pitchFamily="34" charset="-122"/>
                 <a:cs typeface="Calibri" pitchFamily="34" charset="-120"/>
               </a:rPr>
-              <a:t>Something so powerful it cannot be halted or held back.</a:t>
+              <a:t>Something so powerful or strong that nothing can make it halt or slow down.</a:t>
             </a:r>
             <a:endParaRPr lang="en-US" sz="1200" dirty="0"/>
           </a:p>
@@ -42774,7 +41835,7 @@
                 <a:ea typeface="Trebuchet MS" pitchFamily="34" charset="-122"/>
                 <a:cs typeface="Trebuchet MS" pitchFamily="34" charset="-120"/>
               </a:rPr>
-              <a:t>overstep</a:t>
+              <a:t>stoplight</a:t>
             </a:r>
             <a:endParaRPr lang="en-US" sz="1200" dirty="0"/>
           </a:p>
@@ -42840,7 +41901,7 @@
                 <a:ea typeface="Calibri" pitchFamily="34" charset="-122"/>
                 <a:cs typeface="Calibri" pitchFamily="34" charset="-120"/>
               </a:rPr>
-              <a:t>When something has already come to a halt or been blocked.</a:t>
+              <a:t>A time when work or movement is blocked or paused, like a delay in a game.</a:t>
             </a:r>
             <a:endParaRPr lang="en-US" sz="1200" dirty="0"/>
           </a:p>
@@ -43132,7 +42193,7 @@
                 <a:ea typeface="Calibri" pitchFamily="34" charset="-122"/>
                 <a:cs typeface="Calibri" pitchFamily="34" charset="-120"/>
               </a:rPr>
-              <a:t>Word Labs  •  wordlabs.app  •  Root: 'stop' = cease, block, or halt</a:t>
+              <a:t>Word Labs  •  wordlabs.app  •  Root: 'stop' = cease, halt, block movement</a:t>
             </a:r>
             <a:endParaRPr lang="en-US" sz="800" dirty="0"/>
           </a:p>
@@ -43335,7 +42396,7 @@
                 <a:ea typeface="Calibri" pitchFamily="34" charset="-122"/>
                 <a:cs typeface="Calibri" pitchFamily="34" charset="-120"/>
               </a:rPr>
-              <a:t>The unstoppable footballer charged down the field and scored the winning goal.</a:t>
+              <a:t>The unstoppable flood rushed through the valley, sweeping away everything in its path.</a:t>
             </a:r>
             <a:endParaRPr lang="en-US" sz="1500" dirty="0"/>
           </a:p>
@@ -43499,7 +42560,7 @@
                 <a:ea typeface="Calibri" pitchFamily="34" charset="-122"/>
                 <a:cs typeface="Calibri" pitchFamily="34" charset="-120"/>
               </a:rPr>
-              <a:t>The referee called a stoppage in play after the player was injured near the boundary.</a:t>
+              <a:t>The referee called a stoppage in play after the player was injured on the field.</a:t>
             </a:r>
             <a:endParaRPr lang="en-US" sz="1500" dirty="0"/>
           </a:p>
@@ -43663,7 +42724,7 @@
                 <a:ea typeface="Calibri" pitchFamily="34" charset="-122"/>
                 <a:cs typeface="Calibri" pitchFamily="34" charset="-120"/>
               </a:rPr>
-              <a:t>We ran nonstop from the oval to the canteen before the bell rang.</a:t>
+              <a:t>We drove nonstop from Sydney to Canberra without taking a single break.</a:t>
             </a:r>
             <a:endParaRPr lang="en-US" sz="1500" dirty="0"/>
           </a:p>
